--- a/docs/slides/leashed-agent-slides.pptx
+++ b/docs/slides/leashed-agent-slides.pptx
@@ -1569,7 +1569,7 @@
     <p:bg>
       <p:bgPr>
         <a:solidFill>
-          <a:srgbClr val="171208"/>
+          <a:srgbClr val="0B1A2F"/>
         </a:solidFill>
       </p:bgPr>
     </p:bg>
@@ -1595,8 +1595,8 @@
         </p:nvSpPr>
         <p:spPr>
           <a:xfrm>
-            <a:off x="502920" y="1371600"/>
-            <a:ext cx="11183112" cy="1005840"/>
+            <a:off x="502920" y="1097280"/>
+            <a:ext cx="11183112" cy="914400"/>
           </a:xfrm>
           <a:prstGeom prst="rect">
             <a:avLst/>
@@ -1612,17 +1612,17 @@
               <a:buNone/>
             </a:pPr>
             <a:r>
-              <a:rPr lang="en-US" sz="6000" b="1" spc="200" kern="0" dirty="0">
-                <a:solidFill>
-                  <a:srgbClr val="F1EBDE"/>
-                </a:solidFill>
-                <a:latin typeface="Georgia" pitchFamily="34" charset="0"/>
-                <a:ea typeface="Georgia" pitchFamily="34" charset="-122"/>
-                <a:cs typeface="Georgia" pitchFamily="34" charset="-120"/>
-              </a:rPr>
-              <a:t>LEASHED AGENT</a:t>
-            </a:r>
-            <a:endParaRPr lang="en-US" sz="6000" dirty="0"/>
+              <a:rPr lang="en-US" sz="4800" b="1" spc="200" kern="0" dirty="0">
+                <a:solidFill>
+                  <a:srgbClr val="F4F7FB"/>
+                </a:solidFill>
+                <a:latin typeface="Inter" pitchFamily="34" charset="0"/>
+                <a:ea typeface="Inter" pitchFamily="34" charset="-122"/>
+                <a:cs typeface="Inter" pitchFamily="34" charset="-120"/>
+              </a:rPr>
+              <a:t>LEASHED AGENT PLATFORM</a:t>
+            </a:r>
+            <a:endParaRPr lang="en-US" sz="4800" dirty="0"/>
           </a:p>
         </p:txBody>
       </p:sp>
@@ -1634,8 +1634,8 @@
         </p:nvSpPr>
         <p:spPr>
           <a:xfrm>
-            <a:off x="502920" y="2514600"/>
-            <a:ext cx="8686800" cy="914400"/>
+            <a:off x="502920" y="2057400"/>
+            <a:ext cx="5943600" cy="274320"/>
           </a:xfrm>
           <a:prstGeom prst="rect">
             <a:avLst/>
@@ -1651,30 +1651,108 @@
               <a:buNone/>
             </a:pPr>
             <a:r>
-              <a:rPr lang="en-US" sz="2000" i="1" dirty="0">
-                <a:solidFill>
-                  <a:srgbClr val="C9BFA8"/>
-                </a:solidFill>
-                <a:latin typeface="Georgia" pitchFamily="34" charset="0"/>
-                <a:ea typeface="Georgia" pitchFamily="34" charset="-122"/>
-                <a:cs typeface="Georgia" pitchFamily="34" charset="-120"/>
-              </a:rPr>
-              <a:t>An AI worker you can fund with a QR code, audit on-chain, and fire with a button.</a:t>
-            </a:r>
-            <a:endParaRPr lang="en-US" sz="2000" dirty="0"/>
-          </a:p>
-        </p:txBody>
-      </p:sp>
-      <p:sp>
-        <p:nvSpPr>
-          <p:cNvPr id="4" name="Shape 2"/>
-          <p:cNvSpPr/>
-          <p:nvPr/>
-        </p:nvSpPr>
-        <p:spPr>
-          <a:xfrm>
-            <a:off x="502920" y="3703320"/>
-            <a:ext cx="5669280" cy="0"/>
+              <a:rPr lang="en-US" sz="1150" b="1" spc="400" kern="0" dirty="0">
+                <a:solidFill>
+                  <a:srgbClr val="00C2A8"/>
+                </a:solidFill>
+                <a:latin typeface="Consolas" pitchFamily="34" charset="0"/>
+                <a:ea typeface="Consolas" pitchFamily="34" charset="-122"/>
+                <a:cs typeface="Consolas" pitchFamily="34" charset="-120"/>
+              </a:rPr>
+              <a:t>TRUST LAYER FOR AI AGENTS</a:t>
+            </a:r>
+            <a:endParaRPr lang="en-US" sz="1150" dirty="0"/>
+          </a:p>
+        </p:txBody>
+      </p:sp>
+      <p:sp>
+        <p:nvSpPr>
+          <p:cNvPr id="4" name="Text 2"/>
+          <p:cNvSpPr/>
+          <p:nvPr/>
+        </p:nvSpPr>
+        <p:spPr>
+          <a:xfrm>
+            <a:off x="502920" y="2423160"/>
+            <a:ext cx="10058400" cy="822960"/>
+          </a:xfrm>
+          <a:prstGeom prst="rect">
+            <a:avLst/>
+          </a:prstGeom>
+          <a:noFill/>
+          <a:ln/>
+        </p:spPr>
+        <p:txBody>
+          <a:bodyPr wrap="square" rtlCol="0" anchor="ctr"/>
+          <a:lstStyle/>
+          <a:p>
+            <a:pPr indent="0" marL="0">
+              <a:buNone/>
+            </a:pPr>
+            <a:r>
+              <a:rPr lang="en-US" sz="2800" i="1" dirty="0">
+                <a:solidFill>
+                  <a:srgbClr val="E6EDF7"/>
+                </a:solidFill>
+                <a:latin typeface="Inter" pitchFamily="34" charset="0"/>
+                <a:ea typeface="Inter" pitchFamily="34" charset="-122"/>
+                <a:cs typeface="Inter" pitchFamily="34" charset="-120"/>
+              </a:rPr>
+              <a:t>One leash, every payment, independently checked.</a:t>
+            </a:r>
+            <a:endParaRPr lang="en-US" sz="2800" dirty="0"/>
+          </a:p>
+        </p:txBody>
+      </p:sp>
+      <p:sp>
+        <p:nvSpPr>
+          <p:cNvPr id="5" name="Text 3"/>
+          <p:cNvSpPr/>
+          <p:nvPr/>
+        </p:nvSpPr>
+        <p:spPr>
+          <a:xfrm>
+            <a:off x="502920" y="3291840"/>
+            <a:ext cx="10058400" cy="1005840"/>
+          </a:xfrm>
+          <a:prstGeom prst="rect">
+            <a:avLst/>
+          </a:prstGeom>
+          <a:noFill/>
+          <a:ln/>
+        </p:spPr>
+        <p:txBody>
+          <a:bodyPr wrap="square" rtlCol="0" anchor="ctr"/>
+          <a:lstStyle/>
+          <a:p>
+            <a:pPr indent="0" marL="0">
+              <a:buNone/>
+            </a:pPr>
+            <a:r>
+              <a:rPr lang="en-US" sz="1400" dirty="0">
+                <a:solidFill>
+                  <a:srgbClr val="8AA0BD"/>
+                </a:solidFill>
+                <a:latin typeface="Inter" pitchFamily="34" charset="0"/>
+                <a:ea typeface="Inter" pitchFamily="34" charset="-122"/>
+                <a:cs typeface="Inter" pitchFamily="34" charset="-120"/>
+              </a:rPr>
+              <a:t>A chain-enforced spending cap. A receipts ledger. A CRE auditor that attests the verdict on Sepolia. A fiat on-ramp via PromptPay.</a:t>
+            </a:r>
+            <a:endParaRPr lang="en-US" sz="1400" dirty="0"/>
+          </a:p>
+        </p:txBody>
+      </p:sp>
+      <p:sp>
+        <p:nvSpPr>
+          <p:cNvPr id="6" name="Shape 4"/>
+          <p:cNvSpPr/>
+          <p:nvPr/>
+        </p:nvSpPr>
+        <p:spPr>
+          <a:xfrm>
+            <a:off x="502920" y="4526280"/>
+            <a:ext cx="5943600" cy="0"/>
           </a:xfrm>
           <a:prstGeom prst="line">
             <a:avLst/>
@@ -1682,7 +1760,7 @@
           <a:noFill/>
           <a:ln w="19050">
             <a:solidFill>
-              <a:srgbClr val="6E5F45"/>
+              <a:srgbClr val="00C2A8"/>
             </a:solidFill>
             <a:prstDash val="solid"/>
           </a:ln>
@@ -1690,13 +1768,13 @@
       </p:sp>
       <p:sp>
         <p:nvSpPr>
-          <p:cNvPr id="5" name="Text 3"/>
-          <p:cNvSpPr/>
-          <p:nvPr/>
-        </p:nvSpPr>
-        <p:spPr>
-          <a:xfrm>
-            <a:off x="502920" y="3886200"/>
+          <p:cNvPr id="7" name="Text 5"/>
+          <p:cNvSpPr/>
+          <p:nvPr/>
+        </p:nvSpPr>
+        <p:spPr>
+          <a:xfrm>
+            <a:off x="502920" y="4663440"/>
             <a:ext cx="8686800" cy="731520"/>
           </a:xfrm>
           <a:prstGeom prst="rect">
@@ -1746,13 +1824,13 @@
       </p:sp>
       <p:sp>
         <p:nvSpPr>
-          <p:cNvPr id="6" name="Text 4"/>
+          <p:cNvPr id="8" name="Text 6"/>
           <p:cNvSpPr/>
           <p:nvPr/>
         </p:nvSpPr>
         <p:spPr>
           <a:xfrm rot="-240000">
-            <a:off x="8321040" y="1554480"/>
+            <a:off x="8321040" y="1371600"/>
             <a:ext cx="3383280" cy="457200"/>
           </a:xfrm>
           <a:prstGeom prst="rect">
@@ -1765,7 +1843,7 @@
           </a:solidFill>
           <a:ln w="22225">
             <a:solidFill>
-              <a:srgbClr val="B3372B"/>
+              <a:srgbClr val="E5484D"/>
             </a:solidFill>
           </a:ln>
         </p:spPr>
@@ -1779,7 +1857,7 @@
             <a:r>
               <a:rPr lang="en-US" sz="1300" b="1" spc="300" kern="0" dirty="0">
                 <a:solidFill>
-                  <a:srgbClr val="B3372B"/>
+                  <a:srgbClr val="E5484D"/>
                 </a:solidFill>
                 <a:latin typeface="Consolas" pitchFamily="34" charset="0"/>
                 <a:ea typeface="Consolas" pitchFamily="34" charset="-122"/>
@@ -1793,7 +1871,7 @@
       </p:sp>
       <p:sp>
         <p:nvSpPr>
-          <p:cNvPr id="7" name="Text 5"/>
+          <p:cNvPr id="9" name="Text 7"/>
           <p:cNvSpPr/>
           <p:nvPr/>
         </p:nvSpPr>
@@ -1818,13 +1896,13 @@
             <a:r>
               <a:rPr lang="en-US" sz="1200" dirty="0">
                 <a:solidFill>
-                  <a:srgbClr val="8A7F6C"/>
+                  <a:srgbClr val="8AA0BD"/>
                 </a:solidFill>
                 <a:latin typeface="Consolas" pitchFamily="34" charset="0"/>
                 <a:ea typeface="Consolas" pitchFamily="34" charset="-122"/>
                 <a:cs typeface="Consolas" pitchFamily="34" charset="-120"/>
               </a:rPr>
-              <a:t>the poster on slide 5 was bought by the agent · everything recorded during the 36h sprint</a:t>
+              <a:t>the poster on slide 5 was bought by the agent · every line of code written during the 36h sprint</a:t>
             </a:r>
             <a:endParaRPr lang="en-US" sz="1200" dirty="0"/>
           </a:p>
@@ -1844,7 +1922,7 @@
     <p:bg>
       <p:bgPr>
         <a:solidFill>
-          <a:srgbClr val="F1EBDE"/>
+          <a:srgbClr val="F4F7FB"/>
         </a:solidFill>
       </p:bgPr>
     </p:bg>
@@ -1870,8 +1948,8 @@
         </p:nvSpPr>
         <p:spPr>
           <a:xfrm>
-            <a:off x="502920" y="502920"/>
-            <a:ext cx="10515600" cy="1188720"/>
+            <a:off x="502920" y="548640"/>
+            <a:ext cx="10972800" cy="274320"/>
           </a:xfrm>
           <a:prstGeom prst="rect">
             <a:avLst/>
@@ -1887,17 +1965,17 @@
               <a:buNone/>
             </a:pPr>
             <a:r>
-              <a:rPr lang="en-US" sz="3400" b="1" dirty="0">
-                <a:solidFill>
-                  <a:srgbClr val="211B10"/>
-                </a:solidFill>
-                <a:latin typeface="Georgia" pitchFamily="34" charset="0"/>
-                <a:ea typeface="Georgia" pitchFamily="34" charset="-122"/>
-                <a:cs typeface="Georgia" pitchFamily="34" charset="-120"/>
-              </a:rPr>
-              <a:t>AI agents already spend money. Nobody is holding the leash.</a:t>
-            </a:r>
-            <a:endParaRPr lang="en-US" sz="3400" dirty="0"/>
+              <a:rPr lang="en-US" sz="1150" b="1" spc="400" kern="0" dirty="0">
+                <a:solidFill>
+                  <a:srgbClr val="00C2A8"/>
+                </a:solidFill>
+                <a:latin typeface="Consolas" pitchFamily="34" charset="0"/>
+                <a:ea typeface="Consolas" pitchFamily="34" charset="-122"/>
+                <a:cs typeface="Consolas" pitchFamily="34" charset="-120"/>
+              </a:rPr>
+              <a:t>POSITIONING · TRUST LAYER FOR AI AGENTS</a:t>
+            </a:r>
+            <a:endParaRPr lang="en-US" sz="1150" dirty="0"/>
           </a:p>
         </p:txBody>
       </p:sp>
@@ -1909,8 +1987,8 @@
         </p:nvSpPr>
         <p:spPr>
           <a:xfrm>
-            <a:off x="502920" y="1920240"/>
-            <a:ext cx="3291840" cy="822960"/>
+            <a:off x="502920" y="914400"/>
+            <a:ext cx="11155680" cy="1463040"/>
           </a:xfrm>
           <a:prstGeom prst="rect">
             <a:avLst/>
@@ -1923,16 +2001,78 @@
           <a:lstStyle/>
           <a:p>
             <a:pPr indent="0" marL="0">
+              <a:lnSpc>
+                <a:spcPts val="4400"/>
+              </a:lnSpc>
+              <a:buNone/>
+            </a:pPr>
+            <a:r>
+              <a:rPr lang="en-US" sz="3600" b="1" dirty="0">
+                <a:solidFill>
+                  <a:srgbClr val="0F172A"/>
+                </a:solidFill>
+                <a:latin typeface="Inter" pitchFamily="34" charset="0"/>
+                <a:ea typeface="Inter" pitchFamily="34" charset="-122"/>
+                <a:cs typeface="Inter" pitchFamily="34" charset="-120"/>
+              </a:rPr>
+              <a:t>AI agents already spend money.</a:t>
+            </a:r>
+            <a:endParaRPr lang="en-US" sz="3600" dirty="0"/>
+          </a:p>
+          <a:p>
+            <a:pPr indent="0" marL="0">
+              <a:lnSpc>
+                <a:spcPts val="4400"/>
+              </a:lnSpc>
+              <a:buNone/>
+            </a:pPr>
+            <a:r>
+              <a:rPr lang="en-US" sz="3600" b="1" dirty="0">
+                <a:solidFill>
+                  <a:srgbClr val="0F172A"/>
+                </a:solidFill>
+                <a:latin typeface="Inter" pitchFamily="34" charset="0"/>
+                <a:ea typeface="Inter" pitchFamily="34" charset="-122"/>
+                <a:cs typeface="Inter" pitchFamily="34" charset="-120"/>
+              </a:rPr>
+              <a:t>Nobody is holding the leash.</a:t>
+            </a:r>
+            <a:endParaRPr lang="en-US" sz="3600" dirty="0"/>
+          </a:p>
+        </p:txBody>
+      </p:sp>
+      <p:sp>
+        <p:nvSpPr>
+          <p:cNvPr id="4" name="Text 2"/>
+          <p:cNvSpPr/>
+          <p:nvPr/>
+        </p:nvSpPr>
+        <p:spPr>
+          <a:xfrm>
+            <a:off x="502920" y="2194560"/>
+            <a:ext cx="3291840" cy="777240"/>
+          </a:xfrm>
+          <a:prstGeom prst="rect">
+            <a:avLst/>
+          </a:prstGeom>
+          <a:noFill/>
+          <a:ln/>
+        </p:spPr>
+        <p:txBody>
+          <a:bodyPr wrap="square" rtlCol="0" anchor="ctr"/>
+          <a:lstStyle/>
+          <a:p>
+            <a:pPr indent="0" marL="0">
               <a:buNone/>
             </a:pPr>
             <a:r>
               <a:rPr lang="en-US" sz="1800" b="1" dirty="0">
                 <a:solidFill>
-                  <a:srgbClr val="211B10"/>
-                </a:solidFill>
-                <a:latin typeface="Georgia" pitchFamily="34" charset="0"/>
-                <a:ea typeface="Georgia" pitchFamily="34" charset="-122"/>
-                <a:cs typeface="Georgia" pitchFamily="34" charset="-120"/>
+                  <a:srgbClr val="0F172A"/>
+                </a:solidFill>
+                <a:latin typeface="Inter" pitchFamily="34" charset="0"/>
+                <a:ea typeface="Inter" pitchFamily="34" charset="-122"/>
+                <a:cs typeface="Inter" pitchFamily="34" charset="-120"/>
               </a:rPr>
               <a:t>No enforced budgets</a:t>
             </a:r>
@@ -1942,13 +2082,13 @@
       </p:sp>
       <p:sp>
         <p:nvSpPr>
-          <p:cNvPr id="4" name="Text 2"/>
-          <p:cNvSpPr/>
-          <p:nvPr/>
-        </p:nvSpPr>
-        <p:spPr>
-          <a:xfrm>
-            <a:off x="4023360" y="1938528"/>
+          <p:cNvPr id="5" name="Text 3"/>
+          <p:cNvSpPr/>
+          <p:nvPr/>
+        </p:nvSpPr>
+        <p:spPr>
+          <a:xfrm>
+            <a:off x="4023360" y="2212848"/>
             <a:ext cx="7589520" cy="914400"/>
           </a:xfrm>
           <a:prstGeom prst="rect">
@@ -1967,11 +2107,11 @@
             <a:r>
               <a:rPr lang="en-US" sz="1450" dirty="0">
                 <a:solidFill>
-                  <a:srgbClr val="5C5340"/>
-                </a:solidFill>
-                <a:latin typeface="Georgia" pitchFamily="34" charset="0"/>
-                <a:ea typeface="Georgia" pitchFamily="34" charset="-122"/>
-                <a:cs typeface="Georgia" pitchFamily="34" charset="-120"/>
+                  <a:srgbClr val="334155"/>
+                </a:solidFill>
+                <a:latin typeface="Inter" pitchFamily="34" charset="0"/>
+                <a:ea typeface="Inter" pitchFamily="34" charset="-122"/>
+                <a:cs typeface="Inter" pitchFamily="34" charset="-120"/>
               </a:rPr>
               <a:t>x402 agents pay per call with whatever the key holds — spending caps live in app code, not the chain</a:t>
             </a:r>
@@ -1981,13 +2121,13 @@
       </p:sp>
       <p:sp>
         <p:nvSpPr>
-          <p:cNvPr id="5" name="Shape 3"/>
-          <p:cNvSpPr/>
-          <p:nvPr/>
-        </p:nvSpPr>
-        <p:spPr>
-          <a:xfrm>
-            <a:off x="502920" y="2834640"/>
+          <p:cNvPr id="6" name="Shape 4"/>
+          <p:cNvSpPr/>
+          <p:nvPr/>
+        </p:nvSpPr>
+        <p:spPr>
+          <a:xfrm>
+            <a:off x="502920" y="3063240"/>
             <a:ext cx="11183112" cy="0"/>
           </a:xfrm>
           <a:prstGeom prst="line">
@@ -1996,7 +2136,7 @@
           <a:noFill/>
           <a:ln w="12700">
             <a:solidFill>
-              <a:srgbClr val="D8CDB4"/>
+              <a:srgbClr val="CBD5E1"/>
             </a:solidFill>
             <a:prstDash val="solid"/>
           </a:ln>
@@ -2004,14 +2144,14 @@
       </p:sp>
       <p:sp>
         <p:nvSpPr>
-          <p:cNvPr id="6" name="Text 4"/>
-          <p:cNvSpPr/>
-          <p:nvPr/>
-        </p:nvSpPr>
-        <p:spPr>
-          <a:xfrm>
-            <a:off x="502920" y="2971800"/>
-            <a:ext cx="3291840" cy="822960"/>
+          <p:cNvPr id="7" name="Text 5"/>
+          <p:cNvSpPr/>
+          <p:nvPr/>
+        </p:nvSpPr>
+        <p:spPr>
+          <a:xfrm>
+            <a:off x="502920" y="3154680"/>
+            <a:ext cx="3291840" cy="777240"/>
           </a:xfrm>
           <a:prstGeom prst="rect">
             <a:avLst/>
@@ -2029,11 +2169,11 @@
             <a:r>
               <a:rPr lang="en-US" sz="1800" b="1" dirty="0">
                 <a:solidFill>
-                  <a:srgbClr val="211B10"/>
-                </a:solidFill>
-                <a:latin typeface="Georgia" pitchFamily="34" charset="0"/>
-                <a:ea typeface="Georgia" pitchFamily="34" charset="-122"/>
-                <a:cs typeface="Georgia" pitchFamily="34" charset="-120"/>
+                  <a:srgbClr val="0F172A"/>
+                </a:solidFill>
+                <a:latin typeface="Inter" pitchFamily="34" charset="0"/>
+                <a:ea typeface="Inter" pitchFamily="34" charset="-122"/>
+                <a:cs typeface="Inter" pitchFamily="34" charset="-120"/>
               </a:rPr>
               <a:t>No receipts</a:t>
             </a:r>
@@ -2043,13 +2183,13 @@
       </p:sp>
       <p:sp>
         <p:nvSpPr>
-          <p:cNvPr id="7" name="Text 5"/>
-          <p:cNvSpPr/>
-          <p:nvPr/>
-        </p:nvSpPr>
-        <p:spPr>
-          <a:xfrm>
-            <a:off x="4023360" y="2990088"/>
+          <p:cNvPr id="8" name="Text 6"/>
+          <p:cNvSpPr/>
+          <p:nvPr/>
+        </p:nvSpPr>
+        <p:spPr>
+          <a:xfrm>
+            <a:off x="4023360" y="3172968"/>
             <a:ext cx="7589520" cy="914400"/>
           </a:xfrm>
           <a:prstGeom prst="rect">
@@ -2068,11 +2208,11 @@
             <a:r>
               <a:rPr lang="en-US" sz="1450" dirty="0">
                 <a:solidFill>
-                  <a:srgbClr val="5C5340"/>
-                </a:solidFill>
-                <a:latin typeface="Georgia" pitchFamily="34" charset="0"/>
-                <a:ea typeface="Georgia" pitchFamily="34" charset="-122"/>
-                <a:cs typeface="Georgia" pitchFamily="34" charset="-120"/>
+                  <a:srgbClr val="334155"/>
+                </a:solidFill>
+                <a:latin typeface="Inter" pitchFamily="34" charset="0"/>
+                <a:ea typeface="Inter" pitchFamily="34" charset="-122"/>
+                <a:cs typeface="Inter" pitchFamily="34" charset="-120"/>
               </a:rPr>
               <a:t>once the API call returns, the payment evidence is scattered across explorers, if it exists at all</a:t>
             </a:r>
@@ -2082,13 +2222,13 @@
       </p:sp>
       <p:sp>
         <p:nvSpPr>
-          <p:cNvPr id="8" name="Shape 6"/>
-          <p:cNvSpPr/>
-          <p:nvPr/>
-        </p:nvSpPr>
-        <p:spPr>
-          <a:xfrm>
-            <a:off x="502920" y="3886200"/>
+          <p:cNvPr id="9" name="Shape 7"/>
+          <p:cNvSpPr/>
+          <p:nvPr/>
+        </p:nvSpPr>
+        <p:spPr>
+          <a:xfrm>
+            <a:off x="502920" y="4023360"/>
             <a:ext cx="11183112" cy="0"/>
           </a:xfrm>
           <a:prstGeom prst="line">
@@ -2097,7 +2237,7 @@
           <a:noFill/>
           <a:ln w="12700">
             <a:solidFill>
-              <a:srgbClr val="D8CDB4"/>
+              <a:srgbClr val="CBD5E1"/>
             </a:solidFill>
             <a:prstDash val="solid"/>
           </a:ln>
@@ -2105,14 +2245,14 @@
       </p:sp>
       <p:sp>
         <p:nvSpPr>
-          <p:cNvPr id="9" name="Text 7"/>
-          <p:cNvSpPr/>
-          <p:nvPr/>
-        </p:nvSpPr>
-        <p:spPr>
-          <a:xfrm>
-            <a:off x="502920" y="4023360"/>
-            <a:ext cx="3291840" cy="822960"/>
+          <p:cNvPr id="10" name="Text 8"/>
+          <p:cNvSpPr/>
+          <p:nvPr/>
+        </p:nvSpPr>
+        <p:spPr>
+          <a:xfrm>
+            <a:off x="502920" y="4114800"/>
+            <a:ext cx="3291840" cy="777240"/>
           </a:xfrm>
           <a:prstGeom prst="rect">
             <a:avLst/>
@@ -2130,11 +2270,11 @@
             <a:r>
               <a:rPr lang="en-US" sz="1800" b="1" dirty="0">
                 <a:solidFill>
-                  <a:srgbClr val="211B10"/>
-                </a:solidFill>
-                <a:latin typeface="Georgia" pitchFamily="34" charset="0"/>
-                <a:ea typeface="Georgia" pitchFamily="34" charset="-122"/>
-                <a:cs typeface="Georgia" pitchFamily="34" charset="-120"/>
+                  <a:srgbClr val="0F172A"/>
+                </a:solidFill>
+                <a:latin typeface="Inter" pitchFamily="34" charset="0"/>
+                <a:ea typeface="Inter" pitchFamily="34" charset="-122"/>
+                <a:cs typeface="Inter" pitchFamily="34" charset="-120"/>
               </a:rPr>
               <a:t>No independent audit</a:t>
             </a:r>
@@ -2144,13 +2284,13 @@
       </p:sp>
       <p:sp>
         <p:nvSpPr>
-          <p:cNvPr id="10" name="Text 8"/>
-          <p:cNvSpPr/>
-          <p:nvPr/>
-        </p:nvSpPr>
-        <p:spPr>
-          <a:xfrm>
-            <a:off x="4023360" y="4041648"/>
+          <p:cNvPr id="11" name="Text 9"/>
+          <p:cNvSpPr/>
+          <p:nvPr/>
+        </p:nvSpPr>
+        <p:spPr>
+          <a:xfrm>
+            <a:off x="4023360" y="4133088"/>
             <a:ext cx="7589520" cy="914400"/>
           </a:xfrm>
           <a:prstGeom prst="rect">
@@ -2169,11 +2309,11 @@
             <a:r>
               <a:rPr lang="en-US" sz="1450" dirty="0">
                 <a:solidFill>
-                  <a:srgbClr val="5C5340"/>
-                </a:solidFill>
-                <a:latin typeface="Georgia" pitchFamily="34" charset="0"/>
-                <a:ea typeface="Georgia" pitchFamily="34" charset="-122"/>
-                <a:cs typeface="Georgia" pitchFamily="34" charset="-120"/>
+                  <a:srgbClr val="334155"/>
+                </a:solidFill>
+                <a:latin typeface="Inter" pitchFamily="34" charset="0"/>
+                <a:ea typeface="Inter" pitchFamily="34" charset="-122"/>
+                <a:cs typeface="Inter" pitchFamily="34" charset="-120"/>
               </a:rPr>
               <a:t>the agent's operator grades its own homework — there is no third party vouching for the books</a:t>
             </a:r>
@@ -2183,13 +2323,13 @@
       </p:sp>
       <p:sp>
         <p:nvSpPr>
-          <p:cNvPr id="11" name="Shape 9"/>
-          <p:cNvSpPr/>
-          <p:nvPr/>
-        </p:nvSpPr>
-        <p:spPr>
-          <a:xfrm>
-            <a:off x="502920" y="4937760"/>
+          <p:cNvPr id="12" name="Shape 10"/>
+          <p:cNvSpPr/>
+          <p:nvPr/>
+        </p:nvSpPr>
+        <p:spPr>
+          <a:xfrm>
+            <a:off x="502920" y="4983480"/>
             <a:ext cx="11183112" cy="0"/>
           </a:xfrm>
           <a:prstGeom prst="line">
@@ -2198,7 +2338,7 @@
           <a:noFill/>
           <a:ln w="12700">
             <a:solidFill>
-              <a:srgbClr val="D8CDB4"/>
+              <a:srgbClr val="CBD5E1"/>
             </a:solidFill>
             <a:prstDash val="solid"/>
           </a:ln>
@@ -2206,14 +2346,14 @@
       </p:sp>
       <p:sp>
         <p:nvSpPr>
-          <p:cNvPr id="12" name="Text 10"/>
+          <p:cNvPr id="13" name="Text 11"/>
           <p:cNvSpPr/>
           <p:nvPr/>
         </p:nvSpPr>
         <p:spPr>
           <a:xfrm>
             <a:off x="502920" y="5074920"/>
-            <a:ext cx="3291840" cy="822960"/>
+            <a:ext cx="3291840" cy="777240"/>
           </a:xfrm>
           <a:prstGeom prst="rect">
             <a:avLst/>
@@ -2231,11 +2371,11 @@
             <a:r>
               <a:rPr lang="en-US" sz="1800" b="1" dirty="0">
                 <a:solidFill>
-                  <a:srgbClr val="211B10"/>
-                </a:solidFill>
-                <a:latin typeface="Georgia" pitchFamily="34" charset="0"/>
-                <a:ea typeface="Georgia" pitchFamily="34" charset="-122"/>
-                <a:cs typeface="Georgia" pitchFamily="34" charset="-120"/>
+                  <a:srgbClr val="0F172A"/>
+                </a:solidFill>
+                <a:latin typeface="Inter" pitchFamily="34" charset="0"/>
+                <a:ea typeface="Inter" pitchFamily="34" charset="-122"/>
+                <a:cs typeface="Inter" pitchFamily="34" charset="-120"/>
               </a:rPr>
               <a:t>No fiat on-ramp</a:t>
             </a:r>
@@ -2245,7 +2385,7 @@
       </p:sp>
       <p:sp>
         <p:nvSpPr>
-          <p:cNvPr id="13" name="Text 11"/>
+          <p:cNvPr id="14" name="Text 12"/>
           <p:cNvSpPr/>
           <p:nvPr/>
         </p:nvSpPr>
@@ -2270,11 +2410,11 @@
             <a:r>
               <a:rPr lang="en-US" sz="1450" dirty="0">
                 <a:solidFill>
-                  <a:srgbClr val="5C5340"/>
-                </a:solidFill>
-                <a:latin typeface="Georgia" pitchFamily="34" charset="0"/>
-                <a:ea typeface="Georgia" pitchFamily="34" charset="-122"/>
-                <a:cs typeface="Georgia" pitchFamily="34" charset="-120"/>
+                  <a:srgbClr val="334155"/>
+                </a:solidFill>
+                <a:latin typeface="Inter" pitchFamily="34" charset="0"/>
+                <a:ea typeface="Inter" pitchFamily="34" charset="-122"/>
+                <a:cs typeface="Inter" pitchFamily="34" charset="-120"/>
               </a:rPr>
               <a:t>a Thai shop owner cannot top up an agent from a bank app today</a:t>
             </a:r>
@@ -2284,7 +2424,7 @@
       </p:sp>
       <p:sp>
         <p:nvSpPr>
-          <p:cNvPr id="14" name="Text 12"/>
+          <p:cNvPr id="15" name="Text 13"/>
           <p:cNvSpPr/>
           <p:nvPr/>
         </p:nvSpPr>
@@ -2303,7 +2443,7 @@
           </a:solidFill>
           <a:ln w="22225">
             <a:solidFill>
-              <a:srgbClr val="B3372B"/>
+              <a:srgbClr val="E5484D"/>
             </a:solidFill>
           </a:ln>
         </p:spPr>
@@ -2317,7 +2457,7 @@
             <a:r>
               <a:rPr lang="en-US" sz="1300" b="1" spc="300" kern="0" dirty="0">
                 <a:solidFill>
-                  <a:srgbClr val="B3372B"/>
+                  <a:srgbClr val="E5484D"/>
                 </a:solidFill>
                 <a:latin typeface="Consolas" pitchFamily="34" charset="0"/>
                 <a:ea typeface="Consolas" pitchFamily="34" charset="-122"/>
@@ -2331,7 +2471,7 @@
       </p:sp>
       <p:sp>
         <p:nvSpPr>
-          <p:cNvPr id="15" name="Text 13"/>
+          <p:cNvPr id="16" name="Text 14"/>
           <p:cNvSpPr/>
           <p:nvPr/>
         </p:nvSpPr>
@@ -2356,13 +2496,13 @@
             <a:r>
               <a:rPr lang="en-US" sz="1150" dirty="0">
                 <a:solidFill>
-                  <a:srgbClr val="8A7F6C"/>
+                  <a:srgbClr val="64748B"/>
                 </a:solidFill>
                 <a:latin typeface="Consolas" pitchFamily="34" charset="0"/>
                 <a:ea typeface="Consolas" pitchFamily="34" charset="-122"/>
                 <a:cs typeface="Consolas" pitchFamily="34" charset="-120"/>
               </a:rPr>
-              <a:t>Source: x402 Foundation stats — 75.4M txs but only $24.2M volume in 30 days (Aug 2026): micropayments dominate, oversight does not exist.</a:t>
+              <a:t>x402 Foundation stats — 75.4M txs but only $24.2M volume in 30 days (Aug 2026): micropayments dominate, oversight does not exist.</a:t>
             </a:r>
             <a:endParaRPr lang="en-US" sz="1150" dirty="0"/>
           </a:p>
@@ -2382,7 +2522,7 @@
     <p:bg>
       <p:bgPr>
         <a:solidFill>
-          <a:srgbClr val="F1EBDE"/>
+          <a:srgbClr val="F4F7FB"/>
         </a:solidFill>
       </p:bgPr>
     </p:bg>
@@ -2408,8 +2548,8 @@
         </p:nvSpPr>
         <p:spPr>
           <a:xfrm>
-            <a:off x="502920" y="502920"/>
-            <a:ext cx="11155680" cy="1097280"/>
+            <a:off x="502920" y="548640"/>
+            <a:ext cx="10972800" cy="274320"/>
           </a:xfrm>
           <a:prstGeom prst="rect">
             <a:avLst/>
@@ -2425,15 +2565,54 @@
               <a:buNone/>
             </a:pPr>
             <a:r>
+              <a:rPr lang="en-US" sz="1150" b="1" spc="400" kern="0" dirty="0">
+                <a:solidFill>
+                  <a:srgbClr val="00C2A8"/>
+                </a:solidFill>
+                <a:latin typeface="Consolas" pitchFamily="34" charset="0"/>
+                <a:ea typeface="Consolas" pitchFamily="34" charset="-122"/>
+                <a:cs typeface="Consolas" pitchFamily="34" charset="-120"/>
+              </a:rPr>
+              <a:t>SOLUTION · THE FOUR PIECES</a:t>
+            </a:r>
+            <a:endParaRPr lang="en-US" sz="1150" dirty="0"/>
+          </a:p>
+        </p:txBody>
+      </p:sp>
+      <p:sp>
+        <p:nvSpPr>
+          <p:cNvPr id="3" name="Text 1"/>
+          <p:cNvSpPr/>
+          <p:nvPr/>
+        </p:nvSpPr>
+        <p:spPr>
+          <a:xfrm>
+            <a:off x="502920" y="914400"/>
+            <a:ext cx="11155680" cy="914400"/>
+          </a:xfrm>
+          <a:prstGeom prst="rect">
+            <a:avLst/>
+          </a:prstGeom>
+          <a:noFill/>
+          <a:ln/>
+        </p:spPr>
+        <p:txBody>
+          <a:bodyPr wrap="square" rtlCol="0" anchor="ctr"/>
+          <a:lstStyle/>
+          <a:p>
+            <a:pPr indent="0" marL="0">
+              <a:buNone/>
+            </a:pPr>
+            <a:r>
               <a:rPr lang="en-US" sz="3200" b="1" dirty="0">
                 <a:solidFill>
-                  <a:srgbClr val="211B10"/>
-                </a:solidFill>
-                <a:latin typeface="Georgia" pitchFamily="34" charset="0"/>
-                <a:ea typeface="Georgia" pitchFamily="34" charset="-122"/>
-                <a:cs typeface="Georgia" pitchFamily="34" charset="-120"/>
-              </a:rPr>
-              <a:t>The Leashed Agent — a pay-as-you-go worker on a chain-enforced leash</a:t>
+                  <a:srgbClr val="0F172A"/>
+                </a:solidFill>
+                <a:latin typeface="Inter" pitchFamily="34" charset="0"/>
+                <a:ea typeface="Inter" pitchFamily="34" charset="-122"/>
+                <a:cs typeface="Inter" pitchFamily="34" charset="-120"/>
+              </a:rPr>
+              <a:t>Leash · Receipts · Audit · Funding</a:t>
             </a:r>
             <a:endParaRPr lang="en-US" sz="3200" dirty="0"/>
           </a:p>
@@ -2441,14 +2620,14 @@
       </p:sp>
       <p:sp>
         <p:nvSpPr>
-          <p:cNvPr id="3" name="Text 1"/>
+          <p:cNvPr id="4" name="Text 2"/>
           <p:cNvSpPr/>
           <p:nvPr/>
         </p:nvSpPr>
         <p:spPr>
           <a:xfrm>
             <a:off x="502920" y="1691640"/>
-            <a:ext cx="10789920" cy="822960"/>
+            <a:ext cx="10789920" cy="731520"/>
           </a:xfrm>
           <a:prstGeom prst="rect">
             <a:avLst/>
@@ -2466,13 +2645,13 @@
             <a:r>
               <a:rPr lang="en-US" sz="1600" dirty="0">
                 <a:solidFill>
-                  <a:srgbClr val="5C5340"/>
-                </a:solidFill>
-                <a:latin typeface="Georgia" pitchFamily="34" charset="0"/>
-                <a:ea typeface="Georgia" pitchFamily="34" charset="-122"/>
-                <a:cs typeface="Georgia" pitchFamily="34" charset="-120"/>
-              </a:rPr>
-              <a:t>The agent is a Thai SME marketing worker: it pays an LLM for copy (0.2 THCFI) and an image model for the finished Thai-text poster (1.5 THCFI) — per call, per use.</a:t>
+                  <a:srgbClr val="334155"/>
+                </a:solidFill>
+                <a:latin typeface="Inter" pitchFamily="34" charset="0"/>
+                <a:ea typeface="Inter" pitchFamily="34" charset="-122"/>
+                <a:cs typeface="Inter" pitchFamily="34" charset="-120"/>
+              </a:rPr>
+              <a:t>The Leashed Agent Platform is the trust layer that holds an AI agent to four chain-enforced promises:</a:t>
             </a:r>
             <a:endParaRPr lang="en-US" sz="1600" dirty="0"/>
           </a:p>
@@ -2480,31 +2659,31 @@
       </p:sp>
       <p:sp>
         <p:nvSpPr>
-          <p:cNvPr id="4" name="Shape 2"/>
-          <p:cNvSpPr/>
-          <p:nvPr/>
-        </p:nvSpPr>
-        <p:spPr>
-          <a:xfrm>
-            <a:off x="502920" y="2834640"/>
+          <p:cNvPr id="5" name="Shape 3"/>
+          <p:cNvSpPr/>
+          <p:nvPr/>
+        </p:nvSpPr>
+        <p:spPr>
+          <a:xfrm>
+            <a:off x="502920" y="2743200"/>
             <a:ext cx="2670048" cy="3108960"/>
           </a:xfrm>
           <a:prstGeom prst="rect">
             <a:avLst/>
           </a:prstGeom>
           <a:solidFill>
-            <a:srgbClr val="FAF6EC"/>
+            <a:srgbClr val="FFFFFF"/>
           </a:solidFill>
-          <a:ln w="12700">
+          <a:ln w="19050">
             <a:solidFill>
-              <a:srgbClr val="D8CDB4"/>
+              <a:srgbClr val="00C2A8"/>
             </a:solidFill>
             <a:prstDash val="solid"/>
           </a:ln>
           <a:effectLst>
-            <a:outerShdw sx="100000" sy="100000" kx="0" ky="0" algn="bl" rotWithShape="0" blurRad="101600" dist="25400" dir="2700000">
-              <a:srgbClr val="000000">
-                <a:alpha val="12000"/>
+            <a:outerShdw sx="100000" sy="100000" kx="0" ky="0" algn="bl" rotWithShape="0" blurRad="127000" dist="25400" dir="2700000">
+              <a:srgbClr val="0B1A2F">
+                <a:alpha val="10000"/>
               </a:srgbClr>
             </a:outerShdw>
           </a:effectLst>
@@ -2512,13 +2691,13 @@
       </p:sp>
       <p:sp>
         <p:nvSpPr>
-          <p:cNvPr id="5" name="Text 3"/>
-          <p:cNvSpPr/>
-          <p:nvPr/>
-        </p:nvSpPr>
-        <p:spPr>
-          <a:xfrm>
-            <a:off x="685800" y="3063240"/>
+          <p:cNvPr id="6" name="Text 4"/>
+          <p:cNvSpPr/>
+          <p:nvPr/>
+        </p:nvSpPr>
+        <p:spPr>
+          <a:xfrm>
+            <a:off x="685800" y="2926080"/>
             <a:ext cx="2286000" cy="457200"/>
           </a:xfrm>
           <a:prstGeom prst="rect">
@@ -2537,7 +2716,7 @@
             <a:r>
               <a:rPr lang="en-US" sz="1600" b="1" spc="300" kern="0" dirty="0">
                 <a:solidFill>
-                  <a:srgbClr val="211B10"/>
+                  <a:srgbClr val="00C2A8"/>
                 </a:solidFill>
                 <a:latin typeface="Consolas" pitchFamily="34" charset="0"/>
                 <a:ea typeface="Consolas" pitchFamily="34" charset="-122"/>
@@ -2551,13 +2730,13 @@
       </p:sp>
       <p:sp>
         <p:nvSpPr>
-          <p:cNvPr id="6" name="Shape 4"/>
-          <p:cNvSpPr/>
-          <p:nvPr/>
-        </p:nvSpPr>
-        <p:spPr>
-          <a:xfrm>
-            <a:off x="685800" y="3611880"/>
+          <p:cNvPr id="7" name="Shape 5"/>
+          <p:cNvSpPr/>
+          <p:nvPr/>
+        </p:nvSpPr>
+        <p:spPr>
+          <a:xfrm>
+            <a:off x="685800" y="3520440"/>
             <a:ext cx="2286000" cy="0"/>
           </a:xfrm>
           <a:prstGeom prst="line">
@@ -2566,7 +2745,7 @@
           <a:noFill/>
           <a:ln w="12700">
             <a:solidFill>
-              <a:srgbClr val="D8CDB4"/>
+              <a:srgbClr val="CBD5E1"/>
             </a:solidFill>
             <a:prstDash val="solid"/>
           </a:ln>
@@ -2574,13 +2753,13 @@
       </p:sp>
       <p:sp>
         <p:nvSpPr>
-          <p:cNvPr id="7" name="Text 5"/>
-          <p:cNvSpPr/>
-          <p:nvPr/>
-        </p:nvSpPr>
-        <p:spPr>
-          <a:xfrm>
-            <a:off x="685800" y="3749040"/>
+          <p:cNvPr id="8" name="Text 6"/>
+          <p:cNvSpPr/>
+          <p:nvPr/>
+        </p:nvSpPr>
+        <p:spPr>
+          <a:xfrm>
+            <a:off x="685800" y="3657600"/>
             <a:ext cx="2331720" cy="2011680"/>
           </a:xfrm>
           <a:prstGeom prst="rect">
@@ -2599,11 +2778,11 @@
             <a:r>
               <a:rPr lang="en-US" sz="1350" dirty="0">
                 <a:solidFill>
-                  <a:srgbClr val="5C5340"/>
-                </a:solidFill>
-                <a:latin typeface="Georgia" pitchFamily="34" charset="0"/>
-                <a:ea typeface="Georgia" pitchFamily="34" charset="-122"/>
-                <a:cs typeface="Georgia" pitchFamily="34" charset="-120"/>
+                  <a:srgbClr val="334155"/>
+                </a:solidFill>
+                <a:latin typeface="Inter" pitchFamily="34" charset="0"/>
+                <a:ea typeface="Inter" pitchFamily="34" charset="-122"/>
+                <a:cs typeface="Inter" pitchFamily="34" charset="-120"/>
               </a:rPr>
               <a:t>Spending cap set by the human and enforced by the ThaiFi chain itself (AccountKeychain, TIP-1011). Revocation is instant and on-chain.</a:t>
             </a:r>
@@ -2613,31 +2792,31 @@
       </p:sp>
       <p:sp>
         <p:nvSpPr>
-          <p:cNvPr id="8" name="Shape 6"/>
-          <p:cNvSpPr/>
-          <p:nvPr/>
-        </p:nvSpPr>
-        <p:spPr>
-          <a:xfrm>
-            <a:off x="3355848" y="2834640"/>
+          <p:cNvPr id="9" name="Shape 7"/>
+          <p:cNvSpPr/>
+          <p:nvPr/>
+        </p:nvSpPr>
+        <p:spPr>
+          <a:xfrm>
+            <a:off x="3355848" y="2743200"/>
             <a:ext cx="2670048" cy="3108960"/>
           </a:xfrm>
           <a:prstGeom prst="rect">
             <a:avLst/>
           </a:prstGeom>
           <a:solidFill>
-            <a:srgbClr val="FAF6EC"/>
+            <a:srgbClr val="FFFFFF"/>
           </a:solidFill>
-          <a:ln w="12700">
+          <a:ln w="19050">
             <a:solidFill>
-              <a:srgbClr val="D8CDB4"/>
+              <a:srgbClr val="0F172A"/>
             </a:solidFill>
             <a:prstDash val="solid"/>
           </a:ln>
           <a:effectLst>
-            <a:outerShdw sx="100000" sy="100000" kx="0" ky="0" algn="bl" rotWithShape="0" blurRad="101600" dist="25400" dir="2700000">
-              <a:srgbClr val="000000">
-                <a:alpha val="12000"/>
+            <a:outerShdw sx="100000" sy="100000" kx="0" ky="0" algn="bl" rotWithShape="0" blurRad="127000" dist="25400" dir="2700000">
+              <a:srgbClr val="0B1A2F">
+                <a:alpha val="10000"/>
               </a:srgbClr>
             </a:outerShdw>
           </a:effectLst>
@@ -2645,13 +2824,13 @@
       </p:sp>
       <p:sp>
         <p:nvSpPr>
-          <p:cNvPr id="9" name="Text 7"/>
-          <p:cNvSpPr/>
-          <p:nvPr/>
-        </p:nvSpPr>
-        <p:spPr>
-          <a:xfrm>
-            <a:off x="3538728" y="3063240"/>
+          <p:cNvPr id="10" name="Text 8"/>
+          <p:cNvSpPr/>
+          <p:nvPr/>
+        </p:nvSpPr>
+        <p:spPr>
+          <a:xfrm>
+            <a:off x="3538728" y="2926080"/>
             <a:ext cx="2286000" cy="457200"/>
           </a:xfrm>
           <a:prstGeom prst="rect">
@@ -2670,7 +2849,7 @@
             <a:r>
               <a:rPr lang="en-US" sz="1600" b="1" spc="300" kern="0" dirty="0">
                 <a:solidFill>
-                  <a:srgbClr val="211B10"/>
+                  <a:srgbClr val="0F172A"/>
                 </a:solidFill>
                 <a:latin typeface="Consolas" pitchFamily="34" charset="0"/>
                 <a:ea typeface="Consolas" pitchFamily="34" charset="-122"/>
@@ -2684,13 +2863,13 @@
       </p:sp>
       <p:sp>
         <p:nvSpPr>
-          <p:cNvPr id="10" name="Shape 8"/>
-          <p:cNvSpPr/>
-          <p:nvPr/>
-        </p:nvSpPr>
-        <p:spPr>
-          <a:xfrm>
-            <a:off x="3538728" y="3611880"/>
+          <p:cNvPr id="11" name="Shape 9"/>
+          <p:cNvSpPr/>
+          <p:nvPr/>
+        </p:nvSpPr>
+        <p:spPr>
+          <a:xfrm>
+            <a:off x="3538728" y="3520440"/>
             <a:ext cx="2286000" cy="0"/>
           </a:xfrm>
           <a:prstGeom prst="line">
@@ -2699,7 +2878,7 @@
           <a:noFill/>
           <a:ln w="12700">
             <a:solidFill>
-              <a:srgbClr val="D8CDB4"/>
+              <a:srgbClr val="CBD5E1"/>
             </a:solidFill>
             <a:prstDash val="solid"/>
           </a:ln>
@@ -2707,13 +2886,13 @@
       </p:sp>
       <p:sp>
         <p:nvSpPr>
-          <p:cNvPr id="11" name="Text 9"/>
-          <p:cNvSpPr/>
-          <p:nvPr/>
-        </p:nvSpPr>
-        <p:spPr>
-          <a:xfrm>
-            <a:off x="3538728" y="3749040"/>
+          <p:cNvPr id="12" name="Text 10"/>
+          <p:cNvSpPr/>
+          <p:nvPr/>
+        </p:nvSpPr>
+        <p:spPr>
+          <a:xfrm>
+            <a:off x="3538728" y="3657600"/>
             <a:ext cx="2331720" cy="2011680"/>
           </a:xfrm>
           <a:prstGeom prst="rect">
@@ -2732,11 +2911,11 @@
             <a:r>
               <a:rPr lang="en-US" sz="1350" dirty="0">
                 <a:solidFill>
-                  <a:srgbClr val="5C5340"/>
-                </a:solidFill>
-                <a:latin typeface="Georgia" pitchFamily="34" charset="0"/>
-                <a:ea typeface="Georgia" pitchFamily="34" charset="-122"/>
-                <a:cs typeface="Georgia" pitchFamily="34" charset="-120"/>
+                  <a:srgbClr val="334155"/>
+                </a:solidFill>
+                <a:latin typeface="Inter" pitchFamily="34" charset="0"/>
+                <a:ea typeface="Inter" pitchFamily="34" charset="-122"/>
+                <a:cs typeface="Inter" pitchFamily="34" charset="-120"/>
               </a:rPr>
               <a:t>Every payment on every rail becomes one ledger entry — amount, purpose, explorer link — readable like a bank passbook.</a:t>
             </a:r>
@@ -2746,31 +2925,31 @@
       </p:sp>
       <p:sp>
         <p:nvSpPr>
-          <p:cNvPr id="12" name="Shape 10"/>
-          <p:cNvSpPr/>
-          <p:nvPr/>
-        </p:nvSpPr>
-        <p:spPr>
-          <a:xfrm>
-            <a:off x="6208776" y="2834640"/>
+          <p:cNvPr id="13" name="Shape 11"/>
+          <p:cNvSpPr/>
+          <p:nvPr/>
+        </p:nvSpPr>
+        <p:spPr>
+          <a:xfrm>
+            <a:off x="6208776" y="2743200"/>
             <a:ext cx="2670048" cy="3108960"/>
           </a:xfrm>
           <a:prstGeom prst="rect">
             <a:avLst/>
           </a:prstGeom>
           <a:solidFill>
-            <a:srgbClr val="FAF6EC"/>
+            <a:srgbClr val="FFFFFF"/>
           </a:solidFill>
-          <a:ln w="12700">
+          <a:ln w="19050">
             <a:solidFill>
-              <a:srgbClr val="D8CDB4"/>
+              <a:srgbClr val="00C2A8"/>
             </a:solidFill>
             <a:prstDash val="solid"/>
           </a:ln>
           <a:effectLst>
-            <a:outerShdw sx="100000" sy="100000" kx="0" ky="0" algn="bl" rotWithShape="0" blurRad="101600" dist="25400" dir="2700000">
-              <a:srgbClr val="000000">
-                <a:alpha val="12000"/>
+            <a:outerShdw sx="100000" sy="100000" kx="0" ky="0" algn="bl" rotWithShape="0" blurRad="127000" dist="25400" dir="2700000">
+              <a:srgbClr val="0B1A2F">
+                <a:alpha val="10000"/>
               </a:srgbClr>
             </a:outerShdw>
           </a:effectLst>
@@ -2778,13 +2957,13 @@
       </p:sp>
       <p:sp>
         <p:nvSpPr>
-          <p:cNvPr id="13" name="Text 11"/>
-          <p:cNvSpPr/>
-          <p:nvPr/>
-        </p:nvSpPr>
-        <p:spPr>
-          <a:xfrm>
-            <a:off x="6391656" y="3063240"/>
+          <p:cNvPr id="14" name="Text 12"/>
+          <p:cNvSpPr/>
+          <p:nvPr/>
+        </p:nvSpPr>
+        <p:spPr>
+          <a:xfrm>
+            <a:off x="6391656" y="2926080"/>
             <a:ext cx="2286000" cy="457200"/>
           </a:xfrm>
           <a:prstGeom prst="rect">
@@ -2803,7 +2982,7 @@
             <a:r>
               <a:rPr lang="en-US" sz="1600" b="1" spc="300" kern="0" dirty="0">
                 <a:solidFill>
-                  <a:srgbClr val="211B10"/>
+                  <a:srgbClr val="00C2A8"/>
                 </a:solidFill>
                 <a:latin typeface="Consolas" pitchFamily="34" charset="0"/>
                 <a:ea typeface="Consolas" pitchFamily="34" charset="-122"/>
@@ -2817,13 +2996,13 @@
       </p:sp>
       <p:sp>
         <p:nvSpPr>
-          <p:cNvPr id="14" name="Shape 12"/>
-          <p:cNvSpPr/>
-          <p:nvPr/>
-        </p:nvSpPr>
-        <p:spPr>
-          <a:xfrm>
-            <a:off x="6391656" y="3611880"/>
+          <p:cNvPr id="15" name="Shape 13"/>
+          <p:cNvSpPr/>
+          <p:nvPr/>
+        </p:nvSpPr>
+        <p:spPr>
+          <a:xfrm>
+            <a:off x="6391656" y="3520440"/>
             <a:ext cx="2286000" cy="0"/>
           </a:xfrm>
           <a:prstGeom prst="line">
@@ -2832,7 +3011,7 @@
           <a:noFill/>
           <a:ln w="12700">
             <a:solidFill>
-              <a:srgbClr val="D8CDB4"/>
+              <a:srgbClr val="CBD5E1"/>
             </a:solidFill>
             <a:prstDash val="solid"/>
           </a:ln>
@@ -2840,13 +3019,13 @@
       </p:sp>
       <p:sp>
         <p:nvSpPr>
-          <p:cNvPr id="15" name="Text 13"/>
-          <p:cNvSpPr/>
-          <p:nvPr/>
-        </p:nvSpPr>
-        <p:spPr>
-          <a:xfrm>
-            <a:off x="6391656" y="3749040"/>
+          <p:cNvPr id="16" name="Text 14"/>
+          <p:cNvSpPr/>
+          <p:nvPr/>
+        </p:nvSpPr>
+        <p:spPr>
+          <a:xfrm>
+            <a:off x="6391656" y="3657600"/>
             <a:ext cx="2331720" cy="2011680"/>
           </a:xfrm>
           <a:prstGeom prst="rect">
@@ -2865,11 +3044,11 @@
             <a:r>
               <a:rPr lang="en-US" sz="1350" dirty="0">
                 <a:solidFill>
-                  <a:srgbClr val="5C5340"/>
-                </a:solidFill>
-                <a:latin typeface="Georgia" pitchFamily="34" charset="0"/>
-                <a:ea typeface="Georgia" pitchFamily="34" charset="-122"/>
-                <a:cs typeface="Georgia" pitchFamily="34" charset="-120"/>
+                  <a:srgbClr val="334155"/>
+                </a:solidFill>
+                <a:latin typeface="Inter" pitchFamily="34" charset="0"/>
+                <a:ea typeface="Inter" pitchFamily="34" charset="-122"/>
+                <a:cs typeface="Inter" pitchFamily="34" charset="-120"/>
               </a:rPr>
               <a:t>A Chainlink CRE workflow re-checks the whole ledger and attests the verdict on-chain. Neither the agent nor we can forge it.</a:t>
             </a:r>
@@ -2879,31 +3058,31 @@
       </p:sp>
       <p:sp>
         <p:nvSpPr>
-          <p:cNvPr id="16" name="Shape 14"/>
-          <p:cNvSpPr/>
-          <p:nvPr/>
-        </p:nvSpPr>
-        <p:spPr>
-          <a:xfrm>
-            <a:off x="9061704" y="2834640"/>
+          <p:cNvPr id="17" name="Shape 15"/>
+          <p:cNvSpPr/>
+          <p:nvPr/>
+        </p:nvSpPr>
+        <p:spPr>
+          <a:xfrm>
+            <a:off x="9061704" y="2743200"/>
             <a:ext cx="2670048" cy="3108960"/>
           </a:xfrm>
           <a:prstGeom prst="rect">
             <a:avLst/>
           </a:prstGeom>
           <a:solidFill>
-            <a:srgbClr val="FAF6EC"/>
+            <a:srgbClr val="FFFFFF"/>
           </a:solidFill>
-          <a:ln w="12700">
+          <a:ln w="19050">
             <a:solidFill>
-              <a:srgbClr val="D8CDB4"/>
+              <a:srgbClr val="0F172A"/>
             </a:solidFill>
             <a:prstDash val="solid"/>
           </a:ln>
           <a:effectLst>
-            <a:outerShdw sx="100000" sy="100000" kx="0" ky="0" algn="bl" rotWithShape="0" blurRad="101600" dist="25400" dir="2700000">
-              <a:srgbClr val="000000">
-                <a:alpha val="12000"/>
+            <a:outerShdw sx="100000" sy="100000" kx="0" ky="0" algn="bl" rotWithShape="0" blurRad="127000" dist="25400" dir="2700000">
+              <a:srgbClr val="0B1A2F">
+                <a:alpha val="10000"/>
               </a:srgbClr>
             </a:outerShdw>
           </a:effectLst>
@@ -2911,13 +3090,13 @@
       </p:sp>
       <p:sp>
         <p:nvSpPr>
-          <p:cNvPr id="17" name="Text 15"/>
-          <p:cNvSpPr/>
-          <p:nvPr/>
-        </p:nvSpPr>
-        <p:spPr>
-          <a:xfrm>
-            <a:off x="9244584" y="3063240"/>
+          <p:cNvPr id="18" name="Text 16"/>
+          <p:cNvSpPr/>
+          <p:nvPr/>
+        </p:nvSpPr>
+        <p:spPr>
+          <a:xfrm>
+            <a:off x="9244584" y="2926080"/>
             <a:ext cx="2286000" cy="457200"/>
           </a:xfrm>
           <a:prstGeom prst="rect">
@@ -2936,7 +3115,7 @@
             <a:r>
               <a:rPr lang="en-US" sz="1600" b="1" spc="300" kern="0" dirty="0">
                 <a:solidFill>
-                  <a:srgbClr val="211B10"/>
+                  <a:srgbClr val="0F172A"/>
                 </a:solidFill>
                 <a:latin typeface="Consolas" pitchFamily="34" charset="0"/>
                 <a:ea typeface="Consolas" pitchFamily="34" charset="-122"/>
@@ -2950,13 +3129,13 @@
       </p:sp>
       <p:sp>
         <p:nvSpPr>
-          <p:cNvPr id="18" name="Shape 16"/>
-          <p:cNvSpPr/>
-          <p:nvPr/>
-        </p:nvSpPr>
-        <p:spPr>
-          <a:xfrm>
-            <a:off x="9244584" y="3611880"/>
+          <p:cNvPr id="19" name="Shape 17"/>
+          <p:cNvSpPr/>
+          <p:nvPr/>
+        </p:nvSpPr>
+        <p:spPr>
+          <a:xfrm>
+            <a:off x="9244584" y="3520440"/>
             <a:ext cx="2286000" cy="0"/>
           </a:xfrm>
           <a:prstGeom prst="line">
@@ -2965,7 +3144,7 @@
           <a:noFill/>
           <a:ln w="12700">
             <a:solidFill>
-              <a:srgbClr val="D8CDB4"/>
+              <a:srgbClr val="CBD5E1"/>
             </a:solidFill>
             <a:prstDash val="solid"/>
           </a:ln>
@@ -2973,13 +3152,13 @@
       </p:sp>
       <p:sp>
         <p:nvSpPr>
-          <p:cNvPr id="19" name="Text 17"/>
-          <p:cNvSpPr/>
-          <p:nvPr/>
-        </p:nvSpPr>
-        <p:spPr>
-          <a:xfrm>
-            <a:off x="9244584" y="3749040"/>
+          <p:cNvPr id="20" name="Text 18"/>
+          <p:cNvSpPr/>
+          <p:nvPr/>
+        </p:nvSpPr>
+        <p:spPr>
+          <a:xfrm>
+            <a:off x="9244584" y="3657600"/>
             <a:ext cx="2331720" cy="2011680"/>
           </a:xfrm>
           <a:prstGeom prst="rect">
@@ -2998,11 +3177,11 @@
             <a:r>
               <a:rPr lang="en-US" sz="1350" dirty="0">
                 <a:solidFill>
-                  <a:srgbClr val="5C5340"/>
-                </a:solidFill>
-                <a:latin typeface="Georgia" pitchFamily="34" charset="0"/>
-                <a:ea typeface="Georgia" pitchFamily="34" charset="-122"/>
-                <a:cs typeface="Georgia" pitchFamily="34" charset="-120"/>
+                  <a:srgbClr val="334155"/>
+                </a:solidFill>
+                <a:latin typeface="Inter" pitchFamily="34" charset="0"/>
+                <a:ea typeface="Inter" pitchFamily="34" charset="-122"/>
+                <a:cs typeface="Inter" pitchFamily="34" charset="-120"/>
               </a:rPr>
               <a:t>Budget runs low → the agent shows a PromptPay QR → 1 THB = 1 THCFI, straight from any Thai banking app.</a:t>
             </a:r>
@@ -3012,7 +3191,7 @@
       </p:sp>
       <p:sp>
         <p:nvSpPr>
-          <p:cNvPr id="20" name="Text 18"/>
+          <p:cNvPr id="21" name="Text 19"/>
           <p:cNvSpPr/>
           <p:nvPr/>
         </p:nvSpPr>
@@ -3031,7 +3210,7 @@
           </a:solidFill>
           <a:ln w="22225">
             <a:solidFill>
-              <a:srgbClr val="B3372B"/>
+              <a:srgbClr val="E5484D"/>
             </a:solidFill>
           </a:ln>
         </p:spPr>
@@ -3045,7 +3224,7 @@
             <a:r>
               <a:rPr lang="en-US" sz="1300" b="1" spc="300" kern="0" dirty="0">
                 <a:solidFill>
-                  <a:srgbClr val="B3372B"/>
+                  <a:srgbClr val="E5484D"/>
                 </a:solidFill>
                 <a:latin typeface="Consolas" pitchFamily="34" charset="0"/>
                 <a:ea typeface="Consolas" pitchFamily="34" charset="-122"/>
@@ -3071,7 +3250,7 @@
     <p:bg>
       <p:bgPr>
         <a:solidFill>
-          <a:srgbClr val="F1EBDE"/>
+          <a:srgbClr val="F4F7FB"/>
         </a:solidFill>
       </p:bgPr>
     </p:bg>
@@ -3116,11 +3295,11 @@
             <a:r>
               <a:rPr lang="en-US" sz="3200" b="1" dirty="0">
                 <a:solidFill>
-                  <a:srgbClr val="211B10"/>
-                </a:solidFill>
-                <a:latin typeface="Georgia" pitchFamily="34" charset="0"/>
-                <a:ea typeface="Georgia" pitchFamily="34" charset="-122"/>
-                <a:cs typeface="Georgia" pitchFamily="34" charset="-120"/>
+                  <a:srgbClr val="0F172A"/>
+                </a:solidFill>
+                <a:latin typeface="Inter" pitchFamily="34" charset="0"/>
+                <a:ea typeface="Inter" pitchFamily="34" charset="-122"/>
+                <a:cs typeface="Inter" pitchFamily="34" charset="-120"/>
               </a:rPr>
               <a:t>One agent, two payment rails, one independent auditor</a:t>
             </a:r>
@@ -3147,7 +3326,7 @@
           </a:solidFill>
           <a:ln w="19050">
             <a:solidFill>
-              <a:srgbClr val="211B10"/>
+              <a:srgbClr val="0F172A"/>
             </a:solidFill>
             <a:prstDash val="solid"/>
           </a:ln>
@@ -3180,7 +3359,7 @@
             <a:r>
               <a:rPr lang="en-US" sz="1350" b="1" dirty="0">
                 <a:solidFill>
-                  <a:srgbClr val="211B10"/>
+                  <a:srgbClr val="0F172A"/>
                 </a:solidFill>
                 <a:latin typeface="Consolas" pitchFamily="34" charset="0"/>
                 <a:ea typeface="Consolas" pitchFamily="34" charset="-122"/>
@@ -3221,9 +3400,9 @@
                 <a:solidFill>
                   <a:srgbClr val="5C5340"/>
                 </a:solidFill>
-                <a:latin typeface="Georgia" pitchFamily="34" charset="0"/>
-                <a:ea typeface="Georgia" pitchFamily="34" charset="-122"/>
-                <a:cs typeface="Georgia" pitchFamily="34" charset="-120"/>
+                <a:latin typeface="Inter" pitchFamily="34" charset="0"/>
+                <a:ea typeface="Inter" pitchFamily="34" charset="-122"/>
+                <a:cs typeface="Inter" pitchFamily="34" charset="-120"/>
               </a:rPr>
               <a:t>passkey wallet · sets the cap · one-click revoke</a:t>
             </a:r>
@@ -3250,7 +3429,7 @@
           </a:solidFill>
           <a:ln w="19050">
             <a:solidFill>
-              <a:srgbClr val="211B10"/>
+              <a:srgbClr val="0F172A"/>
             </a:solidFill>
             <a:prstDash val="solid"/>
           </a:ln>
@@ -3283,7 +3462,7 @@
             <a:r>
               <a:rPr lang="en-US" sz="1350" b="1" dirty="0">
                 <a:solidFill>
-                  <a:srgbClr val="211B10"/>
+                  <a:srgbClr val="0F172A"/>
                 </a:solidFill>
                 <a:latin typeface="Consolas" pitchFamily="34" charset="0"/>
                 <a:ea typeface="Consolas" pitchFamily="34" charset="-122"/>
@@ -3324,9 +3503,9 @@
                 <a:solidFill>
                   <a:srgbClr val="5C5340"/>
                 </a:solidFill>
-                <a:latin typeface="Georgia" pitchFamily="34" charset="0"/>
-                <a:ea typeface="Georgia" pitchFamily="34" charset="-122"/>
-                <a:cs typeface="Georgia" pitchFamily="34" charset="-120"/>
+                <a:latin typeface="Inter" pitchFamily="34" charset="0"/>
+                <a:ea typeface="Inter" pitchFamily="34" charset="-122"/>
+                <a:cs typeface="Inter" pitchFamily="34" charset="-120"/>
               </a:rPr>
               <a:t>plans the job · pays per call · budgets itself</a:t>
             </a:r>
@@ -3427,9 +3606,9 @@
                 <a:solidFill>
                   <a:srgbClr val="5C5340"/>
                 </a:solidFill>
-                <a:latin typeface="Georgia" pitchFamily="34" charset="0"/>
-                <a:ea typeface="Georgia" pitchFamily="34" charset="-122"/>
-                <a:cs typeface="Georgia" pitchFamily="34" charset="-120"/>
+                <a:latin typeface="Inter" pitchFamily="34" charset="0"/>
+                <a:ea typeface="Inter" pitchFamily="34" charset="-122"/>
+                <a:cs typeface="Inter" pitchFamily="34" charset="-120"/>
               </a:rPr>
               <a:t>Qwen3.8 copy 0.2 THCFI · iApp poster 1.5 THCFI · PromptPay top-up</a:t>
             </a:r>
@@ -3530,9 +3709,9 @@
                 <a:solidFill>
                   <a:srgbClr val="5C5340"/>
                 </a:solidFill>
-                <a:latin typeface="Georgia" pitchFamily="34" charset="0"/>
-                <a:ea typeface="Georgia" pitchFamily="34" charset="-122"/>
-                <a:cs typeface="Georgia" pitchFamily="34" charset="-120"/>
+                <a:latin typeface="Inter" pitchFamily="34" charset="0"/>
+                <a:ea typeface="Inter" pitchFamily="34" charset="-122"/>
+                <a:cs typeface="Inter" pitchFamily="34" charset="-120"/>
               </a:rPr>
               <a:t>our own seller: receipt verification 0.10 tUSDM — payments are core, not a bolt-on</a:t>
             </a:r>
@@ -3559,7 +3738,7 @@
           </a:solidFill>
           <a:ln w="19050">
             <a:solidFill>
-              <a:srgbClr val="2F6B4A"/>
+              <a:srgbClr val="1FA968"/>
             </a:solidFill>
             <a:prstDash val="solid"/>
           </a:ln>
@@ -3592,7 +3771,7 @@
             <a:r>
               <a:rPr lang="en-US" sz="1350" b="1" dirty="0">
                 <a:solidFill>
-                  <a:srgbClr val="2F6B4A"/>
+                  <a:srgbClr val="1FA968"/>
                 </a:solidFill>
                 <a:latin typeface="Consolas" pitchFamily="34" charset="0"/>
                 <a:ea typeface="Consolas" pitchFamily="34" charset="-122"/>
@@ -3633,9 +3812,9 @@
                 <a:solidFill>
                   <a:srgbClr val="5C5340"/>
                 </a:solidFill>
-                <a:latin typeface="Georgia" pitchFamily="34" charset="0"/>
-                <a:ea typeface="Georgia" pitchFamily="34" charset="-122"/>
-                <a:cs typeface="Georgia" pitchFamily="34" charset="-120"/>
+                <a:latin typeface="Inter" pitchFamily="34" charset="0"/>
+                <a:ea typeface="Inter" pitchFamily="34" charset="-122"/>
+                <a:cs typeface="Inter" pitchFamily="34" charset="-120"/>
               </a:rPr>
               <a:t>cron → fetch receipts → risk checks → on-chain attestation (Sepolia)</a:t>
             </a:r>
@@ -3662,7 +3841,7 @@
           </a:solidFill>
           <a:ln w="19050">
             <a:solidFill>
-              <a:srgbClr val="8A7F6C"/>
+              <a:srgbClr val="64748B"/>
             </a:solidFill>
             <a:prstDash val="solid"/>
           </a:ln>
@@ -3695,7 +3874,7 @@
             <a:r>
               <a:rPr lang="en-US" sz="1350" b="1" dirty="0">
                 <a:solidFill>
-                  <a:srgbClr val="8A7F6C"/>
+                  <a:srgbClr val="64748B"/>
                 </a:solidFill>
                 <a:latin typeface="Consolas" pitchFamily="34" charset="0"/>
                 <a:ea typeface="Consolas" pitchFamily="34" charset="-122"/>
@@ -3736,9 +3915,9 @@
                 <a:solidFill>
                   <a:srgbClr val="5C5340"/>
                 </a:solidFill>
-                <a:latin typeface="Georgia" pitchFamily="34" charset="0"/>
-                <a:ea typeface="Georgia" pitchFamily="34" charset="-122"/>
-                <a:cs typeface="Georgia" pitchFamily="34" charset="-120"/>
+                <a:latin typeface="Inter" pitchFamily="34" charset="0"/>
+                <a:ea typeface="Inter" pitchFamily="34" charset="-122"/>
+                <a:cs typeface="Inter" pitchFamily="34" charset="-120"/>
               </a:rPr>
               <a:t>multichain data plane for receipt verification</a:t>
             </a:r>
@@ -3763,7 +3942,7 @@
           <a:noFill/>
           <a:ln w="25400">
             <a:solidFill>
-              <a:srgbClr val="211B10"/>
+              <a:srgbClr val="0F172A"/>
             </a:solidFill>
             <a:prstDash val="solid"/>
             <a:tailEnd type="triangle"/>
@@ -3787,7 +3966,7 @@
           <a:noFill/>
           <a:ln w="25400">
             <a:solidFill>
-              <a:srgbClr val="211B10"/>
+              <a:srgbClr val="0F172A"/>
             </a:solidFill>
             <a:prstDash val="solid"/>
             <a:tailEnd type="triangle"/>
@@ -3811,7 +3990,7 @@
           <a:noFill/>
           <a:ln w="25400">
             <a:solidFill>
-              <a:srgbClr val="211B10"/>
+              <a:srgbClr val="0F172A"/>
             </a:solidFill>
             <a:prstDash val="solid"/>
             <a:tailEnd type="triangle"/>
@@ -3835,7 +4014,7 @@
           <a:noFill/>
           <a:ln w="25400">
             <a:solidFill>
-              <a:srgbClr val="211B10"/>
+              <a:srgbClr val="0F172A"/>
             </a:solidFill>
             <a:prstDash val="solid"/>
             <a:tailEnd type="triangle"/>
@@ -3859,7 +4038,7 @@
           <a:noFill/>
           <a:ln w="25400">
             <a:solidFill>
-              <a:srgbClr val="211B10"/>
+              <a:srgbClr val="0F172A"/>
             </a:solidFill>
             <a:prstDash val="solid"/>
             <a:tailEnd type="triangle"/>
@@ -3893,7 +4072,7 @@
             <a:r>
               <a:rPr lang="en-US" sz="1200" dirty="0">
                 <a:solidFill>
-                  <a:srgbClr val="8A7F6C"/>
+                  <a:srgbClr val="64748B"/>
                 </a:solidFill>
                 <a:latin typeface="Consolas" pitchFamily="34" charset="0"/>
                 <a:ea typeface="Consolas" pitchFamily="34" charset="-122"/>
@@ -3919,7 +4098,7 @@
     <p:bg>
       <p:bgPr>
         <a:solidFill>
-          <a:srgbClr val="171208"/>
+          <a:srgbClr val="0B1A2F"/>
         </a:solidFill>
       </p:bgPr>
     </p:bg>
@@ -3945,7 +4124,46 @@
         </p:nvSpPr>
         <p:spPr>
           <a:xfrm>
-            <a:off x="502920" y="365760"/>
+            <a:off x="502920" y="411480"/>
+            <a:ext cx="10972800" cy="274320"/>
+          </a:xfrm>
+          <a:prstGeom prst="rect">
+            <a:avLst/>
+          </a:prstGeom>
+          <a:noFill/>
+          <a:ln/>
+        </p:spPr>
+        <p:txBody>
+          <a:bodyPr wrap="square" rtlCol="0" anchor="ctr"/>
+          <a:lstStyle/>
+          <a:p>
+            <a:pPr indent="0" marL="0">
+              <a:buNone/>
+            </a:pPr>
+            <a:r>
+              <a:rPr lang="en-US" sz="1150" b="1" spc="400" kern="0" dirty="0">
+                <a:solidFill>
+                  <a:srgbClr val="00C2A8"/>
+                </a:solidFill>
+                <a:latin typeface="Consolas" pitchFamily="34" charset="0"/>
+                <a:ea typeface="Consolas" pitchFamily="34" charset="-122"/>
+                <a:cs typeface="Consolas" pitchFamily="34" charset="-120"/>
+              </a:rPr>
+              <a:t>EVIDENCE · TRUST LAYER IN ACTION</a:t>
+            </a:r>
+            <a:endParaRPr lang="en-US" sz="1150" dirty="0"/>
+          </a:p>
+        </p:txBody>
+      </p:sp>
+      <p:sp>
+        <p:nvSpPr>
+          <p:cNvPr id="3" name="Text 1"/>
+          <p:cNvSpPr/>
+          <p:nvPr/>
+        </p:nvSpPr>
+        <p:spPr>
+          <a:xfrm>
+            <a:off x="502920" y="777240"/>
             <a:ext cx="10972800" cy="822960"/>
           </a:xfrm>
           <a:prstGeom prst="rect">
@@ -3962,23 +4180,23 @@
               <a:buNone/>
             </a:pPr>
             <a:r>
-              <a:rPr lang="en-US" sz="3200" b="1" dirty="0">
-                <a:solidFill>
-                  <a:srgbClr val="F1EBDE"/>
-                </a:solidFill>
-                <a:latin typeface="Georgia" pitchFamily="34" charset="0"/>
-                <a:ea typeface="Georgia" pitchFamily="34" charset="-122"/>
-                <a:cs typeface="Georgia" pitchFamily="34" charset="-120"/>
-              </a:rPr>
-              <a:t>It ran. During the hackathon. On real rails.</a:t>
-            </a:r>
-            <a:endParaRPr lang="en-US" sz="3200" dirty="0"/>
+              <a:rPr lang="en-US" sz="3000" b="1" dirty="0">
+                <a:solidFill>
+                  <a:srgbClr val="F4F7FB"/>
+                </a:solidFill>
+                <a:latin typeface="Inter" pitchFamily="34" charset="0"/>
+                <a:ea typeface="Inter" pitchFamily="34" charset="-122"/>
+                <a:cs typeface="Inter" pitchFamily="34" charset="-120"/>
+              </a:rPr>
+              <a:t>Every trust-layer promise was kept, on-chain, during the sprint.</a:t>
+            </a:r>
+            <a:endParaRPr lang="en-US" sz="3000" dirty="0"/>
           </a:p>
         </p:txBody>
       </p:sp>
       <p:pic>
         <p:nvPicPr>
-          <p:cNvPr id="3" name="Image 0" descr="passbook.png">    </p:cNvPr>
+          <p:cNvPr id="4" name="Image 0" descr="passbook.png">    </p:cNvPr>
           <p:cNvPicPr>
             <a:picLocks noChangeAspect="1"/>
           </p:cNvPicPr>
@@ -3992,8 +4210,8 @@
         </p:blipFill>
         <p:spPr>
           <a:xfrm>
-            <a:off x="502920" y="1371600"/>
-            <a:ext cx="6949440" cy="4343400"/>
+            <a:off x="502920" y="1737360"/>
+            <a:ext cx="6949440" cy="4206240"/>
           </a:xfrm>
           <a:prstGeom prst="rect">
             <a:avLst/>
@@ -4002,7 +4220,7 @@
       </p:pic>
       <p:pic>
         <p:nvPicPr>
-          <p:cNvPr id="4" name="Image 1" descr="poster.png">    </p:cNvPr>
+          <p:cNvPr id="5" name="Image 1" descr="poster.png">    </p:cNvPr>
           <p:cNvPicPr>
             <a:picLocks noChangeAspect="1"/>
           </p:cNvPicPr>
@@ -4016,7 +4234,7 @@
         </p:blipFill>
         <p:spPr>
           <a:xfrm>
-            <a:off x="7772400" y="1371600"/>
+            <a:off x="7772400" y="1737360"/>
             <a:ext cx="3931920" cy="3931920"/>
           </a:xfrm>
           <a:prstGeom prst="rect">
@@ -4026,14 +4244,14 @@
       </p:pic>
       <p:sp>
         <p:nvSpPr>
-          <p:cNvPr id="5" name="Text 1"/>
-          <p:cNvSpPr/>
-          <p:nvPr/>
-        </p:nvSpPr>
-        <p:spPr>
-          <a:xfrm>
-            <a:off x="502920" y="5943600"/>
-            <a:ext cx="11155680" cy="731520"/>
+          <p:cNvPr id="6" name="Text 2"/>
+          <p:cNvSpPr/>
+          <p:nvPr/>
+        </p:nvSpPr>
+        <p:spPr>
+          <a:xfrm>
+            <a:off x="502920" y="5989320"/>
+            <a:ext cx="11155680" cy="914400"/>
           </a:xfrm>
           <a:prstGeom prst="rect">
             <a:avLst/>
@@ -4057,7 +4275,7 @@
                 <a:ea typeface="Consolas" pitchFamily="34" charset="-122"/>
                 <a:cs typeface="Consolas" pitchFamily="34" charset="-120"/>
               </a:rPr>
-              <a:t>Passbook: credit line 4,998.5 THCFI (on-chain) · 2 receipts · CRE verdict ✔ PASS</a:t>
+              <a:t>Leash · 4,998.5 / 5,000 THCFI (on-chain cap, decremented by the chain itself)</a:t>
             </a:r>
             <a:endParaRPr lang="en-US" sz="1250" dirty="0"/>
           </a:p>
@@ -4074,21 +4292,55 @@
                 <a:ea typeface="Consolas" pitchFamily="34" charset="-122"/>
                 <a:cs typeface="Consolas" pitchFamily="34" charset="-120"/>
               </a:rPr>
-              <a:t>Right: the deliverable the agent bought — Thai-text promo poster, 1.5 THCFI</a:t>
+              <a:t>Receipts · 2 on-chain payments, explorer-linked</a:t>
             </a:r>
             <a:endParaRPr lang="en-US" sz="1250" dirty="0"/>
           </a:p>
-        </p:txBody>
-      </p:sp>
-      <p:sp>
-        <p:nvSpPr>
-          <p:cNvPr id="6" name="Text 2"/>
+          <a:p>
+            <a:pPr indent="0" marL="0">
+              <a:buNone/>
+            </a:pPr>
+            <a:r>
+              <a:rPr lang="en-US" sz="1250" dirty="0">
+                <a:solidFill>
+                  <a:srgbClr val="C9BFA8"/>
+                </a:solidFill>
+                <a:latin typeface="Consolas" pitchFamily="34" charset="0"/>
+                <a:ea typeface="Consolas" pitchFamily="34" charset="-122"/>
+                <a:cs typeface="Consolas" pitchFamily="34" charset="-120"/>
+              </a:rPr>
+              <a:t>Audit · CRE verdict ✔ PASS, attested on Sepolia</a:t>
+            </a:r>
+            <a:endParaRPr lang="en-US" sz="1250" dirty="0"/>
+          </a:p>
+          <a:p>
+            <a:pPr indent="0" marL="0">
+              <a:buNone/>
+            </a:pPr>
+            <a:r>
+              <a:rPr lang="en-US" sz="1250" dirty="0">
+                <a:solidFill>
+                  <a:srgbClr val="C9BFA8"/>
+                </a:solidFill>
+                <a:latin typeface="Consolas" pitchFamily="34" charset="0"/>
+                <a:ea typeface="Consolas" pitchFamily="34" charset="-122"/>
+                <a:cs typeface="Consolas" pitchFamily="34" charset="-120"/>
+              </a:rPr>
+              <a:t>Funding · 1 THB → 1 THCFI via PromptPay QR</a:t>
+            </a:r>
+            <a:endParaRPr lang="en-US" sz="1250" dirty="0"/>
+          </a:p>
+        </p:txBody>
+      </p:sp>
+      <p:sp>
+        <p:nvSpPr>
+          <p:cNvPr id="7" name="Text 3"/>
           <p:cNvSpPr/>
           <p:nvPr/>
         </p:nvSpPr>
         <p:spPr>
           <a:xfrm rot="-240000">
-            <a:off x="9418320" y="457200"/>
+            <a:off x="9418320" y="365760"/>
             <a:ext cx="2377440" cy="457200"/>
           </a:xfrm>
           <a:prstGeom prst="rect">
@@ -4101,7 +4353,7 @@
           </a:solidFill>
           <a:ln w="22225">
             <a:solidFill>
-              <a:srgbClr val="B3372B"/>
+              <a:srgbClr val="E5484D"/>
             </a:solidFill>
           </a:ln>
         </p:spPr>
@@ -4115,7 +4367,7 @@
             <a:r>
               <a:rPr lang="en-US" sz="1300" b="1" spc="300" kern="0" dirty="0">
                 <a:solidFill>
-                  <a:srgbClr val="B3372B"/>
+                  <a:srgbClr val="E5484D"/>
                 </a:solidFill>
                 <a:latin typeface="Consolas" pitchFamily="34" charset="0"/>
                 <a:ea typeface="Consolas" pitchFamily="34" charset="-122"/>
@@ -4141,7 +4393,7 @@
     <p:bg>
       <p:bgPr>
         <a:solidFill>
-          <a:srgbClr val="F1EBDE"/>
+          <a:srgbClr val="F4F7FB"/>
         </a:solidFill>
       </p:bgPr>
     </p:bg>
@@ -4167,7 +4419,46 @@
         </p:nvSpPr>
         <p:spPr>
           <a:xfrm>
-            <a:off x="502920" y="502920"/>
+            <a:off x="502920" y="548640"/>
+            <a:ext cx="10972800" cy="274320"/>
+          </a:xfrm>
+          <a:prstGeom prst="rect">
+            <a:avLst/>
+          </a:prstGeom>
+          <a:noFill/>
+          <a:ln/>
+        </p:spPr>
+        <p:txBody>
+          <a:bodyPr wrap="square" rtlCol="0" anchor="ctr"/>
+          <a:lstStyle/>
+          <a:p>
+            <a:pPr indent="0" marL="0">
+              <a:buNone/>
+            </a:pPr>
+            <a:r>
+              <a:rPr lang="en-US" sz="1150" b="1" spc="400" kern="0" dirty="0">
+                <a:solidFill>
+                  <a:srgbClr val="00C2A8"/>
+                </a:solidFill>
+                <a:latin typeface="Consolas" pitchFamily="34" charset="0"/>
+                <a:ea typeface="Consolas" pitchFamily="34" charset="-122"/>
+                <a:cs typeface="Consolas" pitchFamily="34" charset="-120"/>
+              </a:rPr>
+              <a:t>EVIDENCE · THE LEASH HELD</a:t>
+            </a:r>
+            <a:endParaRPr lang="en-US" sz="1150" dirty="0"/>
+          </a:p>
+        </p:txBody>
+      </p:sp>
+      <p:sp>
+        <p:nvSpPr>
+          <p:cNvPr id="3" name="Text 1"/>
+          <p:cNvSpPr/>
+          <p:nvPr/>
+        </p:nvSpPr>
+        <p:spPr>
+          <a:xfrm>
+            <a:off x="502920" y="914400"/>
             <a:ext cx="10972800" cy="822960"/>
           </a:xfrm>
           <a:prstGeom prst="rect">
@@ -4184,17 +4475,17 @@
               <a:buNone/>
             </a:pPr>
             <a:r>
-              <a:rPr lang="en-US" sz="3200" b="1" dirty="0">
-                <a:solidFill>
-                  <a:srgbClr val="211B10"/>
-                </a:solidFill>
-                <a:latin typeface="Georgia" pitchFamily="34" charset="0"/>
-                <a:ea typeface="Georgia" pitchFamily="34" charset="-122"/>
-                <a:cs typeface="Georgia" pitchFamily="34" charset="-120"/>
-              </a:rPr>
-              <a:t>The evidence chain judges can click</a:t>
-            </a:r>
-            <a:endParaRPr lang="en-US" sz="3200" dirty="0"/>
+              <a:rPr lang="en-US" sz="3000" b="1" dirty="0">
+                <a:solidFill>
+                  <a:srgbClr val="0F172A"/>
+                </a:solidFill>
+                <a:latin typeface="Inter" pitchFamily="34" charset="0"/>
+                <a:ea typeface="Inter" pitchFamily="34" charset="-122"/>
+                <a:cs typeface="Inter" pitchFamily="34" charset="-120"/>
+              </a:rPr>
+              <a:t>The trust-layer evidence chain judges can click</a:t>
+            </a:r>
+            <a:endParaRPr lang="en-US" sz="3000" dirty="0"/>
           </a:p>
         </p:txBody>
       </p:sp>
@@ -4213,7 +4504,7 @@
           </p:nvPr>
         </p:nvGraphicFramePr>
         <p:xfrm>
-          <a:off x="502920" y="1554480"/>
+          <a:off x="502920" y="1783080"/>
           <a:ext cx="11155680" cy="914400"/>
         </p:xfrm>
         <a:graphic>
@@ -4238,25 +4529,25 @@
                       <a:r>
                         <a:rPr lang="en-US" sz="1250" b="1" dirty="0">
                           <a:solidFill>
-                            <a:srgbClr val="211B10"/>
+                            <a:srgbClr val="FFFFFF"/>
                           </a:solidFill>
-                          <a:latin typeface="Georgia" pitchFamily="34" charset="0"/>
-                          <a:ea typeface="Georgia" pitchFamily="34" charset="-122"/>
-                          <a:cs typeface="Georgia" pitchFamily="34" charset="-120"/>
+                          <a:latin typeface="Inter" pitchFamily="34" charset="0"/>
+                          <a:ea typeface="Inter" pitchFamily="34" charset="-122"/>
+                          <a:cs typeface="Inter" pitchFamily="34" charset="-120"/>
                         </a:rPr>
-                        <a:t>Event</a:t>
+                        <a:t>Promise</a:t>
                       </a:r>
                       <a:endParaRPr lang="en-US" sz="1250" dirty="0">
-                        <a:latin typeface="Georgia" charset="0"/>
-                        <a:ea typeface="Georgia" charset="0"/>
-                        <a:cs typeface="Georgia" charset="0"/>
+                        <a:latin typeface="Inter" charset="0"/>
+                        <a:ea typeface="Inter" charset="0"/>
+                        <a:cs typeface="Inter" charset="0"/>
                       </a:endParaRPr>
                     </a:p>
                   </a:txBody>
                   <a:tcPr marL="91440" marR="91440" marT="45720" marB="45720" anchor="ctr">
                     <a:lnL w="9525" cap="flat" cmpd="sng" algn="ctr">
                       <a:solidFill>
-                        <a:srgbClr val="D8CDB4"/>
+                        <a:srgbClr val="CBD5E1"/>
                       </a:solidFill>
                       <a:prstDash val="solid"/>
                       <a:round/>
@@ -4265,7 +4556,7 @@
                     </a:lnL>
                     <a:lnR w="9525" cap="flat" cmpd="sng" algn="ctr">
                       <a:solidFill>
-                        <a:srgbClr val="D8CDB4"/>
+                        <a:srgbClr val="CBD5E1"/>
                       </a:solidFill>
                       <a:prstDash val="solid"/>
                       <a:round/>
@@ -4274,7 +4565,7 @@
                     </a:lnR>
                     <a:lnT w="9525" cap="flat" cmpd="sng" algn="ctr">
                       <a:solidFill>
-                        <a:srgbClr val="D8CDB4"/>
+                        <a:srgbClr val="CBD5E1"/>
                       </a:solidFill>
                       <a:prstDash val="solid"/>
                       <a:round/>
@@ -4283,7 +4574,7 @@
                     </a:lnT>
                     <a:lnB w="9525" cap="flat" cmpd="sng" algn="ctr">
                       <a:solidFill>
-                        <a:srgbClr val="D8CDB4"/>
+                        <a:srgbClr val="CBD5E1"/>
                       </a:solidFill>
                       <a:prstDash val="solid"/>
                       <a:round/>
@@ -4291,7 +4582,7 @@
                       <a:tailEnd type="none" w="med" len="med"/>
                     </a:lnB>
                     <a:solidFill>
-                      <a:srgbClr val="E8E0CD"/>
+                      <a:srgbClr val="0F172A"/>
                     </a:solidFill>
                   </a:tcPr>
                 </a:tc>
@@ -4306,25 +4597,25 @@
                       <a:r>
                         <a:rPr lang="en-US" sz="1250" b="1" dirty="0">
                           <a:solidFill>
-                            <a:srgbClr val="211B10"/>
+                            <a:srgbClr val="FFFFFF"/>
                           </a:solidFill>
-                          <a:latin typeface="Georgia" pitchFamily="34" charset="0"/>
-                          <a:ea typeface="Georgia" pitchFamily="34" charset="-122"/>
-                          <a:cs typeface="Georgia" pitchFamily="34" charset="-120"/>
+                          <a:latin typeface="Inter" pitchFamily="34" charset="0"/>
+                          <a:ea typeface="Inter" pitchFamily="34" charset="-122"/>
+                          <a:cs typeface="Inter" pitchFamily="34" charset="-120"/>
                         </a:rPr>
                         <a:t>Rail</a:t>
                       </a:r>
                       <a:endParaRPr lang="en-US" sz="1250" dirty="0">
-                        <a:latin typeface="Georgia" charset="0"/>
-                        <a:ea typeface="Georgia" charset="0"/>
-                        <a:cs typeface="Georgia" charset="0"/>
+                        <a:latin typeface="Inter" charset="0"/>
+                        <a:ea typeface="Inter" charset="0"/>
+                        <a:cs typeface="Inter" charset="0"/>
                       </a:endParaRPr>
                     </a:p>
                   </a:txBody>
                   <a:tcPr marL="91440" marR="91440" marT="45720" marB="45720" anchor="ctr">
                     <a:lnL w="9525" cap="flat" cmpd="sng" algn="ctr">
                       <a:solidFill>
-                        <a:srgbClr val="D8CDB4"/>
+                        <a:srgbClr val="CBD5E1"/>
                       </a:solidFill>
                       <a:prstDash val="solid"/>
                       <a:round/>
@@ -4333,7 +4624,7 @@
                     </a:lnL>
                     <a:lnR w="9525" cap="flat" cmpd="sng" algn="ctr">
                       <a:solidFill>
-                        <a:srgbClr val="D8CDB4"/>
+                        <a:srgbClr val="CBD5E1"/>
                       </a:solidFill>
                       <a:prstDash val="solid"/>
                       <a:round/>
@@ -4342,7 +4633,7 @@
                     </a:lnR>
                     <a:lnT w="9525" cap="flat" cmpd="sng" algn="ctr">
                       <a:solidFill>
-                        <a:srgbClr val="D8CDB4"/>
+                        <a:srgbClr val="CBD5E1"/>
                       </a:solidFill>
                       <a:prstDash val="solid"/>
                       <a:round/>
@@ -4351,7 +4642,7 @@
                     </a:lnT>
                     <a:lnB w="9525" cap="flat" cmpd="sng" algn="ctr">
                       <a:solidFill>
-                        <a:srgbClr val="D8CDB4"/>
+                        <a:srgbClr val="CBD5E1"/>
                       </a:solidFill>
                       <a:prstDash val="solid"/>
                       <a:round/>
@@ -4359,7 +4650,7 @@
                       <a:tailEnd type="none" w="med" len="med"/>
                     </a:lnB>
                     <a:solidFill>
-                      <a:srgbClr val="E8E0CD"/>
+                      <a:srgbClr val="0F172A"/>
                     </a:solidFill>
                   </a:tcPr>
                 </a:tc>
@@ -4374,25 +4665,25 @@
                       <a:r>
                         <a:rPr lang="en-US" sz="1250" b="1" dirty="0">
                           <a:solidFill>
-                            <a:srgbClr val="211B10"/>
+                            <a:srgbClr val="FFFFFF"/>
                           </a:solidFill>
-                          <a:latin typeface="Georgia" pitchFamily="34" charset="0"/>
-                          <a:ea typeface="Georgia" pitchFamily="34" charset="-122"/>
-                          <a:cs typeface="Georgia" pitchFamily="34" charset="-120"/>
+                          <a:latin typeface="Inter" pitchFamily="34" charset="0"/>
+                          <a:ea typeface="Inter" pitchFamily="34" charset="-122"/>
+                          <a:cs typeface="Inter" pitchFamily="34" charset="-120"/>
                         </a:rPr>
                         <a:t>Amount</a:t>
                       </a:r>
                       <a:endParaRPr lang="en-US" sz="1250" dirty="0">
-                        <a:latin typeface="Georgia" charset="0"/>
-                        <a:ea typeface="Georgia" charset="0"/>
-                        <a:cs typeface="Georgia" charset="0"/>
+                        <a:latin typeface="Inter" charset="0"/>
+                        <a:ea typeface="Inter" charset="0"/>
+                        <a:cs typeface="Inter" charset="0"/>
                       </a:endParaRPr>
                     </a:p>
                   </a:txBody>
                   <a:tcPr marL="91440" marR="91440" marT="45720" marB="45720" anchor="ctr">
                     <a:lnL w="9525" cap="flat" cmpd="sng" algn="ctr">
                       <a:solidFill>
-                        <a:srgbClr val="D8CDB4"/>
+                        <a:srgbClr val="CBD5E1"/>
                       </a:solidFill>
                       <a:prstDash val="solid"/>
                       <a:round/>
@@ -4401,7 +4692,7 @@
                     </a:lnL>
                     <a:lnR w="9525" cap="flat" cmpd="sng" algn="ctr">
                       <a:solidFill>
-                        <a:srgbClr val="D8CDB4"/>
+                        <a:srgbClr val="CBD5E1"/>
                       </a:solidFill>
                       <a:prstDash val="solid"/>
                       <a:round/>
@@ -4410,7 +4701,7 @@
                     </a:lnR>
                     <a:lnT w="9525" cap="flat" cmpd="sng" algn="ctr">
                       <a:solidFill>
-                        <a:srgbClr val="D8CDB4"/>
+                        <a:srgbClr val="CBD5E1"/>
                       </a:solidFill>
                       <a:prstDash val="solid"/>
                       <a:round/>
@@ -4419,7 +4710,7 @@
                     </a:lnT>
                     <a:lnB w="9525" cap="flat" cmpd="sng" algn="ctr">
                       <a:solidFill>
-                        <a:srgbClr val="D8CDB4"/>
+                        <a:srgbClr val="CBD5E1"/>
                       </a:solidFill>
                       <a:prstDash val="solid"/>
                       <a:round/>
@@ -4427,7 +4718,7 @@
                       <a:tailEnd type="none" w="med" len="med"/>
                     </a:lnB>
                     <a:solidFill>
-                      <a:srgbClr val="E8E0CD"/>
+                      <a:srgbClr val="0F172A"/>
                     </a:solidFill>
                   </a:tcPr>
                 </a:tc>
@@ -4442,25 +4733,25 @@
                       <a:r>
                         <a:rPr lang="en-US" sz="1250" b="1" dirty="0">
                           <a:solidFill>
-                            <a:srgbClr val="211B10"/>
+                            <a:srgbClr val="FFFFFF"/>
                           </a:solidFill>
-                          <a:latin typeface="Georgia" pitchFamily="34" charset="0"/>
-                          <a:ea typeface="Georgia" pitchFamily="34" charset="-122"/>
-                          <a:cs typeface="Georgia" pitchFamily="34" charset="-120"/>
+                          <a:latin typeface="Inter" pitchFamily="34" charset="0"/>
+                          <a:ea typeface="Inter" pitchFamily="34" charset="-122"/>
+                          <a:cs typeface="Inter" pitchFamily="34" charset="-120"/>
                         </a:rPr>
                         <a:t>Proof (live links)</a:t>
                       </a:r>
                       <a:endParaRPr lang="en-US" sz="1250" dirty="0">
-                        <a:latin typeface="Georgia" charset="0"/>
-                        <a:ea typeface="Georgia" charset="0"/>
-                        <a:cs typeface="Georgia" charset="0"/>
+                        <a:latin typeface="Inter" charset="0"/>
+                        <a:ea typeface="Inter" charset="0"/>
+                        <a:cs typeface="Inter" charset="0"/>
                       </a:endParaRPr>
                     </a:p>
                   </a:txBody>
                   <a:tcPr marL="91440" marR="91440" marT="45720" marB="45720" anchor="ctr">
                     <a:lnL w="9525" cap="flat" cmpd="sng" algn="ctr">
                       <a:solidFill>
-                        <a:srgbClr val="D8CDB4"/>
+                        <a:srgbClr val="CBD5E1"/>
                       </a:solidFill>
                       <a:prstDash val="solid"/>
                       <a:round/>
@@ -4469,7 +4760,7 @@
                     </a:lnL>
                     <a:lnR w="9525" cap="flat" cmpd="sng" algn="ctr">
                       <a:solidFill>
-                        <a:srgbClr val="D8CDB4"/>
+                        <a:srgbClr val="CBD5E1"/>
                       </a:solidFill>
                       <a:prstDash val="solid"/>
                       <a:round/>
@@ -4478,7 +4769,7 @@
                     </a:lnR>
                     <a:lnT w="9525" cap="flat" cmpd="sng" algn="ctr">
                       <a:solidFill>
-                        <a:srgbClr val="D8CDB4"/>
+                        <a:srgbClr val="CBD5E1"/>
                       </a:solidFill>
                       <a:prstDash val="solid"/>
                       <a:round/>
@@ -4487,7 +4778,7 @@
                     </a:lnT>
                     <a:lnB w="9525" cap="flat" cmpd="sng" algn="ctr">
                       <a:solidFill>
-                        <a:srgbClr val="D8CDB4"/>
+                        <a:srgbClr val="CBD5E1"/>
                       </a:solidFill>
                       <a:prstDash val="solid"/>
                       <a:round/>
@@ -4495,7 +4786,7 @@
                       <a:tailEnd type="none" w="med" len="med"/>
                     </a:lnB>
                     <a:solidFill>
-                      <a:srgbClr val="E8E0CD"/>
+                      <a:srgbClr val="0F172A"/>
                     </a:solidFill>
                   </a:tcPr>
                 </a:tc>
@@ -4512,25 +4803,25 @@
                       <a:r>
                         <a:rPr lang="en-US" sz="1250" dirty="0">
                           <a:solidFill>
-                            <a:srgbClr val="211B10"/>
+                            <a:srgbClr val="0F172A"/>
                           </a:solidFill>
-                          <a:latin typeface="Georgia" pitchFamily="34" charset="0"/>
-                          <a:ea typeface="Georgia" pitchFamily="34" charset="-122"/>
-                          <a:cs typeface="Georgia" pitchFamily="34" charset="-120"/>
+                          <a:latin typeface="Inter" pitchFamily="34" charset="0"/>
+                          <a:ea typeface="Inter" pitchFamily="34" charset="-122"/>
+                          <a:cs typeface="Inter" pitchFamily="34" charset="-120"/>
                         </a:rPr>
-                        <a:t>Agent buys Thai poster render</a:t>
+                        <a:t>Receipts · agent buys Thai poster</a:t>
                       </a:r>
                       <a:endParaRPr lang="en-US" sz="1250" dirty="0">
-                        <a:latin typeface="Georgia" charset="0"/>
-                        <a:ea typeface="Georgia" charset="0"/>
-                        <a:cs typeface="Georgia" charset="0"/>
+                        <a:latin typeface="Inter" charset="0"/>
+                        <a:ea typeface="Inter" charset="0"/>
+                        <a:cs typeface="Inter" charset="0"/>
                       </a:endParaRPr>
                     </a:p>
                   </a:txBody>
                   <a:tcPr marL="91440" marR="91440" marT="45720" marB="45720" anchor="ctr">
                     <a:lnL w="9525" cap="flat" cmpd="sng" algn="ctr">
                       <a:solidFill>
-                        <a:srgbClr val="D8CDB4"/>
+                        <a:srgbClr val="CBD5E1"/>
                       </a:solidFill>
                       <a:prstDash val="solid"/>
                       <a:round/>
@@ -4539,7 +4830,7 @@
                     </a:lnL>
                     <a:lnR w="9525" cap="flat" cmpd="sng" algn="ctr">
                       <a:solidFill>
-                        <a:srgbClr val="D8CDB4"/>
+                        <a:srgbClr val="CBD5E1"/>
                       </a:solidFill>
                       <a:prstDash val="solid"/>
                       <a:round/>
@@ -4548,7 +4839,7 @@
                     </a:lnR>
                     <a:lnT w="9525" cap="flat" cmpd="sng" algn="ctr">
                       <a:solidFill>
-                        <a:srgbClr val="D8CDB4"/>
+                        <a:srgbClr val="CBD5E1"/>
                       </a:solidFill>
                       <a:prstDash val="solid"/>
                       <a:round/>
@@ -4557,7 +4848,7 @@
                     </a:lnT>
                     <a:lnB w="9525" cap="flat" cmpd="sng" algn="ctr">
                       <a:solidFill>
-                        <a:srgbClr val="D8CDB4"/>
+                        <a:srgbClr val="CBD5E1"/>
                       </a:solidFill>
                       <a:prstDash val="solid"/>
                       <a:round/>
@@ -4565,7 +4856,7 @@
                       <a:tailEnd type="none" w="med" len="med"/>
                     </a:lnB>
                     <a:solidFill>
-                      <a:srgbClr val="FAF6EC"/>
+                      <a:srgbClr val="FFFFFF"/>
                     </a:solidFill>
                   </a:tcPr>
                 </a:tc>
@@ -4580,25 +4871,25 @@
                       <a:r>
                         <a:rPr lang="en-US" sz="1250" dirty="0">
                           <a:solidFill>
-                            <a:srgbClr val="211B10"/>
+                            <a:srgbClr val="0F172A"/>
                           </a:solidFill>
-                          <a:latin typeface="Georgia" pitchFamily="34" charset="0"/>
-                          <a:ea typeface="Georgia" pitchFamily="34" charset="-122"/>
-                          <a:cs typeface="Georgia" pitchFamily="34" charset="-120"/>
+                          <a:latin typeface="Inter" pitchFamily="34" charset="0"/>
+                          <a:ea typeface="Inter" pitchFamily="34" charset="-122"/>
+                          <a:cs typeface="Inter" pitchFamily="34" charset="-120"/>
                         </a:rPr>
                         <a:t>ThaiFi MPP · chain 17</a:t>
                       </a:r>
                       <a:endParaRPr lang="en-US" sz="1250" dirty="0">
-                        <a:latin typeface="Georgia" charset="0"/>
-                        <a:ea typeface="Georgia" charset="0"/>
-                        <a:cs typeface="Georgia" charset="0"/>
+                        <a:latin typeface="Inter" charset="0"/>
+                        <a:ea typeface="Inter" charset="0"/>
+                        <a:cs typeface="Inter" charset="0"/>
                       </a:endParaRPr>
                     </a:p>
                   </a:txBody>
                   <a:tcPr marL="91440" marR="91440" marT="45720" marB="45720" anchor="ctr">
                     <a:lnL w="9525" cap="flat" cmpd="sng" algn="ctr">
                       <a:solidFill>
-                        <a:srgbClr val="D8CDB4"/>
+                        <a:srgbClr val="CBD5E1"/>
                       </a:solidFill>
                       <a:prstDash val="solid"/>
                       <a:round/>
@@ -4607,7 +4898,7 @@
                     </a:lnL>
                     <a:lnR w="9525" cap="flat" cmpd="sng" algn="ctr">
                       <a:solidFill>
-                        <a:srgbClr val="D8CDB4"/>
+                        <a:srgbClr val="CBD5E1"/>
                       </a:solidFill>
                       <a:prstDash val="solid"/>
                       <a:round/>
@@ -4616,7 +4907,7 @@
                     </a:lnR>
                     <a:lnT w="9525" cap="flat" cmpd="sng" algn="ctr">
                       <a:solidFill>
-                        <a:srgbClr val="D8CDB4"/>
+                        <a:srgbClr val="CBD5E1"/>
                       </a:solidFill>
                       <a:prstDash val="solid"/>
                       <a:round/>
@@ -4625,7 +4916,7 @@
                     </a:lnT>
                     <a:lnB w="9525" cap="flat" cmpd="sng" algn="ctr">
                       <a:solidFill>
-                        <a:srgbClr val="D8CDB4"/>
+                        <a:srgbClr val="CBD5E1"/>
                       </a:solidFill>
                       <a:prstDash val="solid"/>
                       <a:round/>
@@ -4633,7 +4924,7 @@
                       <a:tailEnd type="none" w="med" len="med"/>
                     </a:lnB>
                     <a:solidFill>
-                      <a:srgbClr val="FAF6EC"/>
+                      <a:srgbClr val="FFFFFF"/>
                     </a:solidFill>
                   </a:tcPr>
                 </a:tc>
@@ -4648,25 +4939,25 @@
                       <a:r>
                         <a:rPr lang="en-US" sz="1250" dirty="0">
                           <a:solidFill>
-                            <a:srgbClr val="211B10"/>
+                            <a:srgbClr val="0F172A"/>
                           </a:solidFill>
-                          <a:latin typeface="Georgia" pitchFamily="34" charset="0"/>
-                          <a:ea typeface="Georgia" pitchFamily="34" charset="-122"/>
-                          <a:cs typeface="Georgia" pitchFamily="34" charset="-120"/>
+                          <a:latin typeface="Inter" pitchFamily="34" charset="0"/>
+                          <a:ea typeface="Inter" pitchFamily="34" charset="-122"/>
+                          <a:cs typeface="Inter" pitchFamily="34" charset="-120"/>
                         </a:rPr>
                         <a:t>1.5 THCFI</a:t>
                       </a:r>
                       <a:endParaRPr lang="en-US" sz="1250" dirty="0">
-                        <a:latin typeface="Georgia" charset="0"/>
-                        <a:ea typeface="Georgia" charset="0"/>
-                        <a:cs typeface="Georgia" charset="0"/>
+                        <a:latin typeface="Inter" charset="0"/>
+                        <a:ea typeface="Inter" charset="0"/>
+                        <a:cs typeface="Inter" charset="0"/>
                       </a:endParaRPr>
                     </a:p>
                   </a:txBody>
                   <a:tcPr marL="91440" marR="91440" marT="45720" marB="45720" anchor="ctr">
                     <a:lnL w="9525" cap="flat" cmpd="sng" algn="ctr">
                       <a:solidFill>
-                        <a:srgbClr val="D8CDB4"/>
+                        <a:srgbClr val="CBD5E1"/>
                       </a:solidFill>
                       <a:prstDash val="solid"/>
                       <a:round/>
@@ -4675,7 +4966,7 @@
                     </a:lnL>
                     <a:lnR w="9525" cap="flat" cmpd="sng" algn="ctr">
                       <a:solidFill>
-                        <a:srgbClr val="D8CDB4"/>
+                        <a:srgbClr val="CBD5E1"/>
                       </a:solidFill>
                       <a:prstDash val="solid"/>
                       <a:round/>
@@ -4684,7 +4975,7 @@
                     </a:lnR>
                     <a:lnT w="9525" cap="flat" cmpd="sng" algn="ctr">
                       <a:solidFill>
-                        <a:srgbClr val="D8CDB4"/>
+                        <a:srgbClr val="CBD5E1"/>
                       </a:solidFill>
                       <a:prstDash val="solid"/>
                       <a:round/>
@@ -4693,7 +4984,7 @@
                     </a:lnT>
                     <a:lnB w="9525" cap="flat" cmpd="sng" algn="ctr">
                       <a:solidFill>
-                        <a:srgbClr val="D8CDB4"/>
+                        <a:srgbClr val="CBD5E1"/>
                       </a:solidFill>
                       <a:prstDash val="solid"/>
                       <a:round/>
@@ -4701,7 +4992,7 @@
                       <a:tailEnd type="none" w="med" len="med"/>
                     </a:lnB>
                     <a:solidFill>
-                      <a:srgbClr val="FAF6EC"/>
+                      <a:srgbClr val="FFFFFF"/>
                     </a:solidFill>
                   </a:tcPr>
                 </a:tc>
@@ -4718,9 +5009,9 @@
                           <a:solidFill>
                             <a:srgbClr val="2456A6"/>
                           </a:solidFill>
-                          <a:latin typeface="Georgia" pitchFamily="34" charset="0"/>
-                          <a:ea typeface="Georgia" pitchFamily="34" charset="-122"/>
-                          <a:cs typeface="Georgia" pitchFamily="34" charset="-120"/>
+                          <a:latin typeface="Inter" pitchFamily="34" charset="0"/>
+                          <a:ea typeface="Inter" pitchFamily="34" charset="-122"/>
+                          <a:cs typeface="Inter" pitchFamily="34" charset="-120"/>
                           <a:hlinkClick r:id="rId1" invalidUrl="" action="" tgtFrame="" tooltip="" history="1" highlightClick="0" endSnd="0">
                             <a:extLst>
                               <a:ext uri="{A12FA001-AC4F-418D-AE19-62706E023703}">
@@ -4732,16 +5023,16 @@
                         <a:t>exp.thaifi.com/tx/0xf6e9…3b65e</a:t>
                       </a:r>
                       <a:endParaRPr lang="en-US" sz="1250" dirty="0">
-                        <a:latin typeface="Georgia" charset="0"/>
-                        <a:ea typeface="Georgia" charset="0"/>
-                        <a:cs typeface="Georgia" charset="0"/>
+                        <a:latin typeface="Inter" charset="0"/>
+                        <a:ea typeface="Inter" charset="0"/>
+                        <a:cs typeface="Inter" charset="0"/>
                       </a:endParaRPr>
                     </a:p>
                   </a:txBody>
                   <a:tcPr marL="91440" marR="91440" marT="45720" marB="45720" anchor="ctr">
                     <a:lnL w="9525" cap="flat" cmpd="sng" algn="ctr">
                       <a:solidFill>
-                        <a:srgbClr val="D8CDB4"/>
+                        <a:srgbClr val="CBD5E1"/>
                       </a:solidFill>
                       <a:prstDash val="solid"/>
                       <a:round/>
@@ -4750,7 +5041,7 @@
                     </a:lnL>
                     <a:lnR w="9525" cap="flat" cmpd="sng" algn="ctr">
                       <a:solidFill>
-                        <a:srgbClr val="D8CDB4"/>
+                        <a:srgbClr val="CBD5E1"/>
                       </a:solidFill>
                       <a:prstDash val="solid"/>
                       <a:round/>
@@ -4759,7 +5050,7 @@
                     </a:lnR>
                     <a:lnT w="9525" cap="flat" cmpd="sng" algn="ctr">
                       <a:solidFill>
-                        <a:srgbClr val="D8CDB4"/>
+                        <a:srgbClr val="CBD5E1"/>
                       </a:solidFill>
                       <a:prstDash val="solid"/>
                       <a:round/>
@@ -4768,7 +5059,7 @@
                     </a:lnT>
                     <a:lnB w="9525" cap="flat" cmpd="sng" algn="ctr">
                       <a:solidFill>
-                        <a:srgbClr val="D8CDB4"/>
+                        <a:srgbClr val="CBD5E1"/>
                       </a:solidFill>
                       <a:prstDash val="solid"/>
                       <a:round/>
@@ -4776,7 +5067,7 @@
                       <a:tailEnd type="none" w="med" len="med"/>
                     </a:lnB>
                     <a:solidFill>
-                      <a:srgbClr val="FAF6EC"/>
+                      <a:srgbClr val="FFFFFF"/>
                     </a:solidFill>
                   </a:tcPr>
                 </a:tc>
@@ -4793,25 +5084,25 @@
                       <a:r>
                         <a:rPr lang="en-US" sz="1250" dirty="0">
                           <a:solidFill>
-                            <a:srgbClr val="211B10"/>
+                            <a:srgbClr val="0F172A"/>
                           </a:solidFill>
-                          <a:latin typeface="Georgia" pitchFamily="34" charset="0"/>
-                          <a:ea typeface="Georgia" pitchFamily="34" charset="-122"/>
-                          <a:cs typeface="Georgia" pitchFamily="34" charset="-120"/>
+                          <a:latin typeface="Inter" pitchFamily="34" charset="0"/>
+                          <a:ea typeface="Inter" pitchFamily="34" charset="-122"/>
+                          <a:cs typeface="Inter" pitchFamily="34" charset="-120"/>
                         </a:rPr>
-                        <a:t>Agent pays OUR x402 seller (Cardano)</a:t>
+                        <a:t>Receipts · agent pays OUR x402 seller</a:t>
                       </a:r>
                       <a:endParaRPr lang="en-US" sz="1250" dirty="0">
-                        <a:latin typeface="Georgia" charset="0"/>
-                        <a:ea typeface="Georgia" charset="0"/>
-                        <a:cs typeface="Georgia" charset="0"/>
+                        <a:latin typeface="Inter" charset="0"/>
+                        <a:ea typeface="Inter" charset="0"/>
+                        <a:cs typeface="Inter" charset="0"/>
                       </a:endParaRPr>
                     </a:p>
                   </a:txBody>
                   <a:tcPr marL="91440" marR="91440" marT="45720" marB="45720" anchor="ctr">
                     <a:lnL w="9525" cap="flat" cmpd="sng" algn="ctr">
                       <a:solidFill>
-                        <a:srgbClr val="D8CDB4"/>
+                        <a:srgbClr val="CBD5E1"/>
                       </a:solidFill>
                       <a:prstDash val="solid"/>
                       <a:round/>
@@ -4820,7 +5111,7 @@
                     </a:lnL>
                     <a:lnR w="9525" cap="flat" cmpd="sng" algn="ctr">
                       <a:solidFill>
-                        <a:srgbClr val="D8CDB4"/>
+                        <a:srgbClr val="CBD5E1"/>
                       </a:solidFill>
                       <a:prstDash val="solid"/>
                       <a:round/>
@@ -4829,7 +5120,7 @@
                     </a:lnR>
                     <a:lnT w="9525" cap="flat" cmpd="sng" algn="ctr">
                       <a:solidFill>
-                        <a:srgbClr val="D8CDB4"/>
+                        <a:srgbClr val="CBD5E1"/>
                       </a:solidFill>
                       <a:prstDash val="solid"/>
                       <a:round/>
@@ -4838,7 +5129,7 @@
                     </a:lnT>
                     <a:lnB w="9525" cap="flat" cmpd="sng" algn="ctr">
                       <a:solidFill>
-                        <a:srgbClr val="D8CDB4"/>
+                        <a:srgbClr val="CBD5E1"/>
                       </a:solidFill>
                       <a:prstDash val="solid"/>
                       <a:round/>
@@ -4846,7 +5137,7 @@
                       <a:tailEnd type="none" w="med" len="med"/>
                     </a:lnB>
                     <a:solidFill>
-                      <a:srgbClr val="FAF6EC"/>
+                      <a:srgbClr val="FFFFFF"/>
                     </a:solidFill>
                   </a:tcPr>
                 </a:tc>
@@ -4861,25 +5152,25 @@
                       <a:r>
                         <a:rPr lang="en-US" sz="1250" dirty="0">
                           <a:solidFill>
-                            <a:srgbClr val="211B10"/>
+                            <a:srgbClr val="0F172A"/>
                           </a:solidFill>
-                          <a:latin typeface="Georgia" pitchFamily="34" charset="0"/>
-                          <a:ea typeface="Georgia" pitchFamily="34" charset="-122"/>
-                          <a:cs typeface="Georgia" pitchFamily="34" charset="-120"/>
+                          <a:latin typeface="Inter" pitchFamily="34" charset="0"/>
+                          <a:ea typeface="Inter" pitchFamily="34" charset="-122"/>
+                          <a:cs typeface="Inter" pitchFamily="34" charset="-120"/>
                         </a:rPr>
                         <a:t>x402 · Cardano preprod</a:t>
                       </a:r>
                       <a:endParaRPr lang="en-US" sz="1250" dirty="0">
-                        <a:latin typeface="Georgia" charset="0"/>
-                        <a:ea typeface="Georgia" charset="0"/>
-                        <a:cs typeface="Georgia" charset="0"/>
+                        <a:latin typeface="Inter" charset="0"/>
+                        <a:ea typeface="Inter" charset="0"/>
+                        <a:cs typeface="Inter" charset="0"/>
                       </a:endParaRPr>
                     </a:p>
                   </a:txBody>
                   <a:tcPr marL="91440" marR="91440" marT="45720" marB="45720" anchor="ctr">
                     <a:lnL w="9525" cap="flat" cmpd="sng" algn="ctr">
                       <a:solidFill>
-                        <a:srgbClr val="D8CDB4"/>
+                        <a:srgbClr val="CBD5E1"/>
                       </a:solidFill>
                       <a:prstDash val="solid"/>
                       <a:round/>
@@ -4888,7 +5179,7 @@
                     </a:lnL>
                     <a:lnR w="9525" cap="flat" cmpd="sng" algn="ctr">
                       <a:solidFill>
-                        <a:srgbClr val="D8CDB4"/>
+                        <a:srgbClr val="CBD5E1"/>
                       </a:solidFill>
                       <a:prstDash val="solid"/>
                       <a:round/>
@@ -4897,7 +5188,7 @@
                     </a:lnR>
                     <a:lnT w="9525" cap="flat" cmpd="sng" algn="ctr">
                       <a:solidFill>
-                        <a:srgbClr val="D8CDB4"/>
+                        <a:srgbClr val="CBD5E1"/>
                       </a:solidFill>
                       <a:prstDash val="solid"/>
                       <a:round/>
@@ -4906,7 +5197,7 @@
                     </a:lnT>
                     <a:lnB w="9525" cap="flat" cmpd="sng" algn="ctr">
                       <a:solidFill>
-                        <a:srgbClr val="D8CDB4"/>
+                        <a:srgbClr val="CBD5E1"/>
                       </a:solidFill>
                       <a:prstDash val="solid"/>
                       <a:round/>
@@ -4914,7 +5205,7 @@
                       <a:tailEnd type="none" w="med" len="med"/>
                     </a:lnB>
                     <a:solidFill>
-                      <a:srgbClr val="FAF6EC"/>
+                      <a:srgbClr val="FFFFFF"/>
                     </a:solidFill>
                   </a:tcPr>
                 </a:tc>
@@ -4929,25 +5220,25 @@
                       <a:r>
                         <a:rPr lang="en-US" sz="1250" dirty="0">
                           <a:solidFill>
-                            <a:srgbClr val="211B10"/>
+                            <a:srgbClr val="0F172A"/>
                           </a:solidFill>
-                          <a:latin typeface="Georgia" pitchFamily="34" charset="0"/>
-                          <a:ea typeface="Georgia" pitchFamily="34" charset="-122"/>
-                          <a:cs typeface="Georgia" pitchFamily="34" charset="-120"/>
+                          <a:latin typeface="Inter" pitchFamily="34" charset="0"/>
+                          <a:ea typeface="Inter" pitchFamily="34" charset="-122"/>
+                          <a:cs typeface="Inter" pitchFamily="34" charset="-120"/>
                         </a:rPr>
                         <a:t>0.10 tUSDM</a:t>
                       </a:r>
                       <a:endParaRPr lang="en-US" sz="1250" dirty="0">
-                        <a:latin typeface="Georgia" charset="0"/>
-                        <a:ea typeface="Georgia" charset="0"/>
-                        <a:cs typeface="Georgia" charset="0"/>
+                        <a:latin typeface="Inter" charset="0"/>
+                        <a:ea typeface="Inter" charset="0"/>
+                        <a:cs typeface="Inter" charset="0"/>
                       </a:endParaRPr>
                     </a:p>
                   </a:txBody>
                   <a:tcPr marL="91440" marR="91440" marT="45720" marB="45720" anchor="ctr">
                     <a:lnL w="9525" cap="flat" cmpd="sng" algn="ctr">
                       <a:solidFill>
-                        <a:srgbClr val="D8CDB4"/>
+                        <a:srgbClr val="CBD5E1"/>
                       </a:solidFill>
                       <a:prstDash val="solid"/>
                       <a:round/>
@@ -4956,7 +5247,7 @@
                     </a:lnL>
                     <a:lnR w="9525" cap="flat" cmpd="sng" algn="ctr">
                       <a:solidFill>
-                        <a:srgbClr val="D8CDB4"/>
+                        <a:srgbClr val="CBD5E1"/>
                       </a:solidFill>
                       <a:prstDash val="solid"/>
                       <a:round/>
@@ -4965,7 +5256,7 @@
                     </a:lnR>
                     <a:lnT w="9525" cap="flat" cmpd="sng" algn="ctr">
                       <a:solidFill>
-                        <a:srgbClr val="D8CDB4"/>
+                        <a:srgbClr val="CBD5E1"/>
                       </a:solidFill>
                       <a:prstDash val="solid"/>
                       <a:round/>
@@ -4974,7 +5265,7 @@
                     </a:lnT>
                     <a:lnB w="9525" cap="flat" cmpd="sng" algn="ctr">
                       <a:solidFill>
-                        <a:srgbClr val="D8CDB4"/>
+                        <a:srgbClr val="CBD5E1"/>
                       </a:solidFill>
                       <a:prstDash val="solid"/>
                       <a:round/>
@@ -4982,7 +5273,7 @@
                       <a:tailEnd type="none" w="med" len="med"/>
                     </a:lnB>
                     <a:solidFill>
-                      <a:srgbClr val="FAF6EC"/>
+                      <a:srgbClr val="FFFFFF"/>
                     </a:solidFill>
                   </a:tcPr>
                 </a:tc>
@@ -4999,9 +5290,9 @@
                           <a:solidFill>
                             <a:srgbClr val="2456A6"/>
                           </a:solidFill>
-                          <a:latin typeface="Georgia" pitchFamily="34" charset="0"/>
-                          <a:ea typeface="Georgia" pitchFamily="34" charset="-122"/>
-                          <a:cs typeface="Georgia" pitchFamily="34" charset="-120"/>
+                          <a:latin typeface="Inter" pitchFamily="34" charset="0"/>
+                          <a:ea typeface="Inter" pitchFamily="34" charset="-122"/>
+                          <a:cs typeface="Inter" pitchFamily="34" charset="-120"/>
                           <a:hlinkClick r:id="rId2" invalidUrl="" action="" tgtFrame="" tooltip="" history="1" highlightClick="0" endSnd="0">
                             <a:extLst>
                               <a:ext uri="{A12FA001-AC4F-418D-AE19-62706E023703}">
@@ -5013,16 +5304,16 @@
                         <a:t>cardanoscan.io/tx/5e796a4c…bdc0</a:t>
                       </a:r>
                       <a:endParaRPr lang="en-US" sz="1250" dirty="0">
-                        <a:latin typeface="Georgia" charset="0"/>
-                        <a:ea typeface="Georgia" charset="0"/>
-                        <a:cs typeface="Georgia" charset="0"/>
+                        <a:latin typeface="Inter" charset="0"/>
+                        <a:ea typeface="Inter" charset="0"/>
+                        <a:cs typeface="Inter" charset="0"/>
                       </a:endParaRPr>
                     </a:p>
                   </a:txBody>
                   <a:tcPr marL="91440" marR="91440" marT="45720" marB="45720" anchor="ctr">
                     <a:lnL w="9525" cap="flat" cmpd="sng" algn="ctr">
                       <a:solidFill>
-                        <a:srgbClr val="D8CDB4"/>
+                        <a:srgbClr val="CBD5E1"/>
                       </a:solidFill>
                       <a:prstDash val="solid"/>
                       <a:round/>
@@ -5031,7 +5322,7 @@
                     </a:lnL>
                     <a:lnR w="9525" cap="flat" cmpd="sng" algn="ctr">
                       <a:solidFill>
-                        <a:srgbClr val="D8CDB4"/>
+                        <a:srgbClr val="CBD5E1"/>
                       </a:solidFill>
                       <a:prstDash val="solid"/>
                       <a:round/>
@@ -5040,7 +5331,7 @@
                     </a:lnR>
                     <a:lnT w="9525" cap="flat" cmpd="sng" algn="ctr">
                       <a:solidFill>
-                        <a:srgbClr val="D8CDB4"/>
+                        <a:srgbClr val="CBD5E1"/>
                       </a:solidFill>
                       <a:prstDash val="solid"/>
                       <a:round/>
@@ -5049,7 +5340,7 @@
                     </a:lnT>
                     <a:lnB w="9525" cap="flat" cmpd="sng" algn="ctr">
                       <a:solidFill>
-                        <a:srgbClr val="D8CDB4"/>
+                        <a:srgbClr val="CBD5E1"/>
                       </a:solidFill>
                       <a:prstDash val="solid"/>
                       <a:round/>
@@ -5057,7 +5348,7 @@
                       <a:tailEnd type="none" w="med" len="med"/>
                     </a:lnB>
                     <a:solidFill>
-                      <a:srgbClr val="FAF6EC"/>
+                      <a:srgbClr val="FFFFFF"/>
                     </a:solidFill>
                   </a:tcPr>
                 </a:tc>
@@ -5074,25 +5365,25 @@
                       <a:r>
                         <a:rPr lang="en-US" sz="1250" dirty="0">
                           <a:solidFill>
-                            <a:srgbClr val="211B10"/>
+                            <a:srgbClr val="0F172A"/>
                           </a:solidFill>
-                          <a:latin typeface="Georgia" pitchFamily="34" charset="0"/>
-                          <a:ea typeface="Georgia" pitchFamily="34" charset="-122"/>
-                          <a:cs typeface="Georgia" pitchFamily="34" charset="-120"/>
+                          <a:latin typeface="Inter" pitchFamily="34" charset="0"/>
+                          <a:ea typeface="Inter" pitchFamily="34" charset="-122"/>
+                          <a:cs typeface="Inter" pitchFamily="34" charset="-120"/>
                         </a:rPr>
-                        <a:t>CRE auditor verdict</a:t>
+                        <a:t>Audit · CRE verdict</a:t>
                       </a:r>
                       <a:endParaRPr lang="en-US" sz="1250" dirty="0">
-                        <a:latin typeface="Georgia" charset="0"/>
-                        <a:ea typeface="Georgia" charset="0"/>
-                        <a:cs typeface="Georgia" charset="0"/>
+                        <a:latin typeface="Inter" charset="0"/>
+                        <a:ea typeface="Inter" charset="0"/>
+                        <a:cs typeface="Inter" charset="0"/>
                       </a:endParaRPr>
                     </a:p>
                   </a:txBody>
                   <a:tcPr marL="91440" marR="91440" marT="45720" marB="45720" anchor="ctr">
                     <a:lnL w="9525" cap="flat" cmpd="sng" algn="ctr">
                       <a:solidFill>
-                        <a:srgbClr val="D8CDB4"/>
+                        <a:srgbClr val="CBD5E1"/>
                       </a:solidFill>
                       <a:prstDash val="solid"/>
                       <a:round/>
@@ -5101,7 +5392,7 @@
                     </a:lnL>
                     <a:lnR w="9525" cap="flat" cmpd="sng" algn="ctr">
                       <a:solidFill>
-                        <a:srgbClr val="D8CDB4"/>
+                        <a:srgbClr val="CBD5E1"/>
                       </a:solidFill>
                       <a:prstDash val="solid"/>
                       <a:round/>
@@ -5110,7 +5401,7 @@
                     </a:lnR>
                     <a:lnT w="9525" cap="flat" cmpd="sng" algn="ctr">
                       <a:solidFill>
-                        <a:srgbClr val="D8CDB4"/>
+                        <a:srgbClr val="CBD5E1"/>
                       </a:solidFill>
                       <a:prstDash val="solid"/>
                       <a:round/>
@@ -5119,7 +5410,7 @@
                     </a:lnT>
                     <a:lnB w="9525" cap="flat" cmpd="sng" algn="ctr">
                       <a:solidFill>
-                        <a:srgbClr val="D8CDB4"/>
+                        <a:srgbClr val="CBD5E1"/>
                       </a:solidFill>
                       <a:prstDash val="solid"/>
                       <a:round/>
@@ -5127,7 +5418,7 @@
                       <a:tailEnd type="none" w="med" len="med"/>
                     </a:lnB>
                     <a:solidFill>
-                      <a:srgbClr val="FAF6EC"/>
+                      <a:srgbClr val="FFFFFF"/>
                     </a:solidFill>
                   </a:tcPr>
                 </a:tc>
@@ -5142,25 +5433,25 @@
                       <a:r>
                         <a:rPr lang="en-US" sz="1250" dirty="0">
                           <a:solidFill>
-                            <a:srgbClr val="211B10"/>
+                            <a:srgbClr val="0F172A"/>
                           </a:solidFill>
-                          <a:latin typeface="Georgia" pitchFamily="34" charset="0"/>
-                          <a:ea typeface="Georgia" pitchFamily="34" charset="-122"/>
-                          <a:cs typeface="Georgia" pitchFamily="34" charset="-120"/>
+                          <a:latin typeface="Inter" pitchFamily="34" charset="0"/>
+                          <a:ea typeface="Inter" pitchFamily="34" charset="-122"/>
+                          <a:cs typeface="Inter" pitchFamily="34" charset="-120"/>
                         </a:rPr>
                         <a:t>Chainlink CRE → Sepolia</a:t>
                       </a:r>
                       <a:endParaRPr lang="en-US" sz="1250" dirty="0">
-                        <a:latin typeface="Georgia" charset="0"/>
-                        <a:ea typeface="Georgia" charset="0"/>
-                        <a:cs typeface="Georgia" charset="0"/>
+                        <a:latin typeface="Inter" charset="0"/>
+                        <a:ea typeface="Inter" charset="0"/>
+                        <a:cs typeface="Inter" charset="0"/>
                       </a:endParaRPr>
                     </a:p>
                   </a:txBody>
                   <a:tcPr marL="91440" marR="91440" marT="45720" marB="45720" anchor="ctr">
                     <a:lnL w="9525" cap="flat" cmpd="sng" algn="ctr">
                       <a:solidFill>
-                        <a:srgbClr val="D8CDB4"/>
+                        <a:srgbClr val="CBD5E1"/>
                       </a:solidFill>
                       <a:prstDash val="solid"/>
                       <a:round/>
@@ -5169,7 +5460,7 @@
                     </a:lnL>
                     <a:lnR w="9525" cap="flat" cmpd="sng" algn="ctr">
                       <a:solidFill>
-                        <a:srgbClr val="D8CDB4"/>
+                        <a:srgbClr val="CBD5E1"/>
                       </a:solidFill>
                       <a:prstDash val="solid"/>
                       <a:round/>
@@ -5178,7 +5469,7 @@
                     </a:lnR>
                     <a:lnT w="9525" cap="flat" cmpd="sng" algn="ctr">
                       <a:solidFill>
-                        <a:srgbClr val="D8CDB4"/>
+                        <a:srgbClr val="CBD5E1"/>
                       </a:solidFill>
                       <a:prstDash val="solid"/>
                       <a:round/>
@@ -5187,7 +5478,7 @@
                     </a:lnT>
                     <a:lnB w="9525" cap="flat" cmpd="sng" algn="ctr">
                       <a:solidFill>
-                        <a:srgbClr val="D8CDB4"/>
+                        <a:srgbClr val="CBD5E1"/>
                       </a:solidFill>
                       <a:prstDash val="solid"/>
                       <a:round/>
@@ -5195,7 +5486,7 @@
                       <a:tailEnd type="none" w="med" len="med"/>
                     </a:lnB>
                     <a:solidFill>
-                      <a:srgbClr val="FAF6EC"/>
+                      <a:srgbClr val="FFFFFF"/>
                     </a:solidFill>
                   </a:tcPr>
                 </a:tc>
@@ -5210,25 +5501,25 @@
                       <a:r>
                         <a:rPr lang="en-US" sz="1250" dirty="0">
                           <a:solidFill>
-                            <a:srgbClr val="211B10"/>
+                            <a:srgbClr val="0F172A"/>
                           </a:solidFill>
-                          <a:latin typeface="Georgia" pitchFamily="34" charset="0"/>
-                          <a:ea typeface="Georgia" pitchFamily="34" charset="-122"/>
-                          <a:cs typeface="Georgia" pitchFamily="34" charset="-120"/>
+                          <a:latin typeface="Inter" pitchFamily="34" charset="0"/>
+                          <a:ea typeface="Inter" pitchFamily="34" charset="-122"/>
+                          <a:cs typeface="Inter" pitchFamily="34" charset="-120"/>
                         </a:rPr>
                         <a:t>PASS ✔ 2 receipts</a:t>
                       </a:r>
                       <a:endParaRPr lang="en-US" sz="1250" dirty="0">
-                        <a:latin typeface="Georgia" charset="0"/>
-                        <a:ea typeface="Georgia" charset="0"/>
-                        <a:cs typeface="Georgia" charset="0"/>
+                        <a:latin typeface="Inter" charset="0"/>
+                        <a:ea typeface="Inter" charset="0"/>
+                        <a:cs typeface="Inter" charset="0"/>
                       </a:endParaRPr>
                     </a:p>
                   </a:txBody>
                   <a:tcPr marL="91440" marR="91440" marT="45720" marB="45720" anchor="ctr">
                     <a:lnL w="9525" cap="flat" cmpd="sng" algn="ctr">
                       <a:solidFill>
-                        <a:srgbClr val="D8CDB4"/>
+                        <a:srgbClr val="CBD5E1"/>
                       </a:solidFill>
                       <a:prstDash val="solid"/>
                       <a:round/>
@@ -5237,7 +5528,7 @@
                     </a:lnL>
                     <a:lnR w="9525" cap="flat" cmpd="sng" algn="ctr">
                       <a:solidFill>
-                        <a:srgbClr val="D8CDB4"/>
+                        <a:srgbClr val="CBD5E1"/>
                       </a:solidFill>
                       <a:prstDash val="solid"/>
                       <a:round/>
@@ -5246,7 +5537,7 @@
                     </a:lnR>
                     <a:lnT w="9525" cap="flat" cmpd="sng" algn="ctr">
                       <a:solidFill>
-                        <a:srgbClr val="D8CDB4"/>
+                        <a:srgbClr val="CBD5E1"/>
                       </a:solidFill>
                       <a:prstDash val="solid"/>
                       <a:round/>
@@ -5255,7 +5546,7 @@
                     </a:lnT>
                     <a:lnB w="9525" cap="flat" cmpd="sng" algn="ctr">
                       <a:solidFill>
-                        <a:srgbClr val="D8CDB4"/>
+                        <a:srgbClr val="CBD5E1"/>
                       </a:solidFill>
                       <a:prstDash val="solid"/>
                       <a:round/>
@@ -5263,7 +5554,7 @@
                       <a:tailEnd type="none" w="med" len="med"/>
                     </a:lnB>
                     <a:solidFill>
-                      <a:srgbClr val="FAF6EC"/>
+                      <a:srgbClr val="FFFFFF"/>
                     </a:solidFill>
                   </a:tcPr>
                 </a:tc>
@@ -5278,25 +5569,25 @@
                       <a:r>
                         <a:rPr lang="en-US" sz="1250" dirty="0">
                           <a:solidFill>
-                            <a:srgbClr val="2F6B4A"/>
+                            <a:srgbClr val="1FA968"/>
                           </a:solidFill>
-                          <a:latin typeface="Georgia" pitchFamily="34" charset="0"/>
-                          <a:ea typeface="Georgia" pitchFamily="34" charset="-122"/>
-                          <a:cs typeface="Georgia" pitchFamily="34" charset="-120"/>
+                          <a:latin typeface="Inter" pitchFamily="34" charset="0"/>
+                          <a:ea typeface="Inter" pitchFamily="34" charset="-122"/>
+                          <a:cs typeface="Inter" pitchFamily="34" charset="-120"/>
                         </a:rPr>
                         <a:t>docs/cre-auditor-evidence.txt (simulate log)</a:t>
                       </a:r>
                       <a:endParaRPr lang="en-US" sz="1250" dirty="0">
-                        <a:latin typeface="Georgia" charset="0"/>
-                        <a:ea typeface="Georgia" charset="0"/>
-                        <a:cs typeface="Georgia" charset="0"/>
+                        <a:latin typeface="Inter" charset="0"/>
+                        <a:ea typeface="Inter" charset="0"/>
+                        <a:cs typeface="Inter" charset="0"/>
                       </a:endParaRPr>
                     </a:p>
                   </a:txBody>
                   <a:tcPr marL="91440" marR="91440" marT="45720" marB="45720" anchor="ctr">
                     <a:lnL w="9525" cap="flat" cmpd="sng" algn="ctr">
                       <a:solidFill>
-                        <a:srgbClr val="D8CDB4"/>
+                        <a:srgbClr val="CBD5E1"/>
                       </a:solidFill>
                       <a:prstDash val="solid"/>
                       <a:round/>
@@ -5305,7 +5596,7 @@
                     </a:lnL>
                     <a:lnR w="9525" cap="flat" cmpd="sng" algn="ctr">
                       <a:solidFill>
-                        <a:srgbClr val="D8CDB4"/>
+                        <a:srgbClr val="CBD5E1"/>
                       </a:solidFill>
                       <a:prstDash val="solid"/>
                       <a:round/>
@@ -5314,7 +5605,7 @@
                     </a:lnR>
                     <a:lnT w="9525" cap="flat" cmpd="sng" algn="ctr">
                       <a:solidFill>
-                        <a:srgbClr val="D8CDB4"/>
+                        <a:srgbClr val="CBD5E1"/>
                       </a:solidFill>
                       <a:prstDash val="solid"/>
                       <a:round/>
@@ -5323,7 +5614,7 @@
                     </a:lnT>
                     <a:lnB w="9525" cap="flat" cmpd="sng" algn="ctr">
                       <a:solidFill>
-                        <a:srgbClr val="D8CDB4"/>
+                        <a:srgbClr val="CBD5E1"/>
                       </a:solidFill>
                       <a:prstDash val="solid"/>
                       <a:round/>
@@ -5331,7 +5622,7 @@
                       <a:tailEnd type="none" w="med" len="med"/>
                     </a:lnB>
                     <a:solidFill>
-                      <a:srgbClr val="FAF6EC"/>
+                      <a:srgbClr val="FFFFFF"/>
                     </a:solidFill>
                   </a:tcPr>
                 </a:tc>
@@ -5348,25 +5639,25 @@
                       <a:r>
                         <a:rPr lang="en-US" sz="1250" dirty="0">
                           <a:solidFill>
-                            <a:srgbClr val="211B10"/>
+                            <a:srgbClr val="0F172A"/>
                           </a:solidFill>
-                          <a:latin typeface="Georgia" pitchFamily="34" charset="0"/>
-                          <a:ea typeface="Georgia" pitchFamily="34" charset="-122"/>
-                          <a:cs typeface="Georgia" pitchFamily="34" charset="-120"/>
+                          <a:latin typeface="Inter" pitchFamily="34" charset="0"/>
+                          <a:ea typeface="Inter" pitchFamily="34" charset="-122"/>
+                          <a:cs typeface="Inter" pitchFamily="34" charset="-120"/>
                         </a:rPr>
-                        <a:t>Leash enforcement</a:t>
+                        <a:t>Leash · on-chain enforcement</a:t>
                       </a:r>
                       <a:endParaRPr lang="en-US" sz="1250" dirty="0">
-                        <a:latin typeface="Georgia" charset="0"/>
-                        <a:ea typeface="Georgia" charset="0"/>
-                        <a:cs typeface="Georgia" charset="0"/>
+                        <a:latin typeface="Inter" charset="0"/>
+                        <a:ea typeface="Inter" charset="0"/>
+                        <a:cs typeface="Inter" charset="0"/>
                       </a:endParaRPr>
                     </a:p>
                   </a:txBody>
                   <a:tcPr marL="91440" marR="91440" marT="45720" marB="45720" anchor="ctr">
                     <a:lnL w="9525" cap="flat" cmpd="sng" algn="ctr">
                       <a:solidFill>
-                        <a:srgbClr val="D8CDB4"/>
+                        <a:srgbClr val="CBD5E1"/>
                       </a:solidFill>
                       <a:prstDash val="solid"/>
                       <a:round/>
@@ -5375,7 +5666,7 @@
                     </a:lnL>
                     <a:lnR w="9525" cap="flat" cmpd="sng" algn="ctr">
                       <a:solidFill>
-                        <a:srgbClr val="D8CDB4"/>
+                        <a:srgbClr val="CBD5E1"/>
                       </a:solidFill>
                       <a:prstDash val="solid"/>
                       <a:round/>
@@ -5384,7 +5675,7 @@
                     </a:lnR>
                     <a:lnT w="9525" cap="flat" cmpd="sng" algn="ctr">
                       <a:solidFill>
-                        <a:srgbClr val="D8CDB4"/>
+                        <a:srgbClr val="CBD5E1"/>
                       </a:solidFill>
                       <a:prstDash val="solid"/>
                       <a:round/>
@@ -5393,7 +5684,7 @@
                     </a:lnT>
                     <a:lnB w="9525" cap="flat" cmpd="sng" algn="ctr">
                       <a:solidFill>
-                        <a:srgbClr val="D8CDB4"/>
+                        <a:srgbClr val="CBD5E1"/>
                       </a:solidFill>
                       <a:prstDash val="solid"/>
                       <a:round/>
@@ -5401,7 +5692,7 @@
                       <a:tailEnd type="none" w="med" len="med"/>
                     </a:lnB>
                     <a:solidFill>
-                      <a:srgbClr val="FAF6EC"/>
+                      <a:srgbClr val="FFFFFF"/>
                     </a:solidFill>
                   </a:tcPr>
                 </a:tc>
@@ -5416,25 +5707,25 @@
                       <a:r>
                         <a:rPr lang="en-US" sz="1250" dirty="0">
                           <a:solidFill>
-                            <a:srgbClr val="211B10"/>
+                            <a:srgbClr val="0F172A"/>
                           </a:solidFill>
-                          <a:latin typeface="Georgia" pitchFamily="34" charset="0"/>
-                          <a:ea typeface="Georgia" pitchFamily="34" charset="-122"/>
-                          <a:cs typeface="Georgia" pitchFamily="34" charset="-120"/>
+                          <a:latin typeface="Inter" pitchFamily="34" charset="0"/>
+                          <a:ea typeface="Inter" pitchFamily="34" charset="-122"/>
+                          <a:cs typeface="Inter" pitchFamily="34" charset="-120"/>
                         </a:rPr>
                         <a:t>AccountKeychain · TIP-1011</a:t>
                       </a:r>
                       <a:endParaRPr lang="en-US" sz="1250" dirty="0">
-                        <a:latin typeface="Georgia" charset="0"/>
-                        <a:ea typeface="Georgia" charset="0"/>
-                        <a:cs typeface="Georgia" charset="0"/>
+                        <a:latin typeface="Inter" charset="0"/>
+                        <a:ea typeface="Inter" charset="0"/>
+                        <a:cs typeface="Inter" charset="0"/>
                       </a:endParaRPr>
                     </a:p>
                   </a:txBody>
                   <a:tcPr marL="91440" marR="91440" marT="45720" marB="45720" anchor="ctr">
                     <a:lnL w="9525" cap="flat" cmpd="sng" algn="ctr">
                       <a:solidFill>
-                        <a:srgbClr val="D8CDB4"/>
+                        <a:srgbClr val="CBD5E1"/>
                       </a:solidFill>
                       <a:prstDash val="solid"/>
                       <a:round/>
@@ -5443,7 +5734,7 @@
                     </a:lnL>
                     <a:lnR w="9525" cap="flat" cmpd="sng" algn="ctr">
                       <a:solidFill>
-                        <a:srgbClr val="D8CDB4"/>
+                        <a:srgbClr val="CBD5E1"/>
                       </a:solidFill>
                       <a:prstDash val="solid"/>
                       <a:round/>
@@ -5452,7 +5743,7 @@
                     </a:lnR>
                     <a:lnT w="9525" cap="flat" cmpd="sng" algn="ctr">
                       <a:solidFill>
-                        <a:srgbClr val="D8CDB4"/>
+                        <a:srgbClr val="CBD5E1"/>
                       </a:solidFill>
                       <a:prstDash val="solid"/>
                       <a:round/>
@@ -5461,7 +5752,7 @@
                     </a:lnT>
                     <a:lnB w="9525" cap="flat" cmpd="sng" algn="ctr">
                       <a:solidFill>
-                        <a:srgbClr val="D8CDB4"/>
+                        <a:srgbClr val="CBD5E1"/>
                       </a:solidFill>
                       <a:prstDash val="solid"/>
                       <a:round/>
@@ -5469,7 +5760,7 @@
                       <a:tailEnd type="none" w="med" len="med"/>
                     </a:lnB>
                     <a:solidFill>
-                      <a:srgbClr val="FAF6EC"/>
+                      <a:srgbClr val="FFFFFF"/>
                     </a:solidFill>
                   </a:tcPr>
                 </a:tc>
@@ -5484,25 +5775,25 @@
                       <a:r>
                         <a:rPr lang="en-US" sz="1250" dirty="0">
                           <a:solidFill>
-                            <a:srgbClr val="211B10"/>
+                            <a:srgbClr val="0F172A"/>
                           </a:solidFill>
-                          <a:latin typeface="Georgia" pitchFamily="34" charset="0"/>
-                          <a:ea typeface="Georgia" pitchFamily="34" charset="-122"/>
-                          <a:cs typeface="Georgia" pitchFamily="34" charset="-120"/>
+                          <a:latin typeface="Inter" pitchFamily="34" charset="0"/>
+                          <a:ea typeface="Inter" pitchFamily="34" charset="-122"/>
+                          <a:cs typeface="Inter" pitchFamily="34" charset="-120"/>
                         </a:rPr>
                         <a:t>4,998.5 / 5,000 THCFI</a:t>
                       </a:r>
                       <a:endParaRPr lang="en-US" sz="1250" dirty="0">
-                        <a:latin typeface="Georgia" charset="0"/>
-                        <a:ea typeface="Georgia" charset="0"/>
-                        <a:cs typeface="Georgia" charset="0"/>
+                        <a:latin typeface="Inter" charset="0"/>
+                        <a:ea typeface="Inter" charset="0"/>
+                        <a:cs typeface="Inter" charset="0"/>
                       </a:endParaRPr>
                     </a:p>
                   </a:txBody>
                   <a:tcPr marL="91440" marR="91440" marT="45720" marB="45720" anchor="ctr">
                     <a:lnL w="9525" cap="flat" cmpd="sng" algn="ctr">
                       <a:solidFill>
-                        <a:srgbClr val="D8CDB4"/>
+                        <a:srgbClr val="CBD5E1"/>
                       </a:solidFill>
                       <a:prstDash val="solid"/>
                       <a:round/>
@@ -5511,7 +5802,7 @@
                     </a:lnL>
                     <a:lnR w="9525" cap="flat" cmpd="sng" algn="ctr">
                       <a:solidFill>
-                        <a:srgbClr val="D8CDB4"/>
+                        <a:srgbClr val="CBD5E1"/>
                       </a:solidFill>
                       <a:prstDash val="solid"/>
                       <a:round/>
@@ -5520,7 +5811,7 @@
                     </a:lnR>
                     <a:lnT w="9525" cap="flat" cmpd="sng" algn="ctr">
                       <a:solidFill>
-                        <a:srgbClr val="D8CDB4"/>
+                        <a:srgbClr val="CBD5E1"/>
                       </a:solidFill>
                       <a:prstDash val="solid"/>
                       <a:round/>
@@ -5529,7 +5820,7 @@
                     </a:lnT>
                     <a:lnB w="9525" cap="flat" cmpd="sng" algn="ctr">
                       <a:solidFill>
-                        <a:srgbClr val="D8CDB4"/>
+                        <a:srgbClr val="CBD5E1"/>
                       </a:solidFill>
                       <a:prstDash val="solid"/>
                       <a:round/>
@@ -5537,7 +5828,7 @@
                       <a:tailEnd type="none" w="med" len="med"/>
                     </a:lnB>
                     <a:solidFill>
-                      <a:srgbClr val="FAF6EC"/>
+                      <a:srgbClr val="FFFFFF"/>
                     </a:solidFill>
                   </a:tcPr>
                 </a:tc>
@@ -5552,25 +5843,25 @@
                       <a:r>
                         <a:rPr lang="en-US" sz="1250" dirty="0">
                           <a:solidFill>
-                            <a:srgbClr val="211B10"/>
+                            <a:srgbClr val="0F172A"/>
                           </a:solidFill>
-                          <a:latin typeface="Georgia" pitchFamily="34" charset="0"/>
-                          <a:ea typeface="Georgia" pitchFamily="34" charset="-122"/>
-                          <a:cs typeface="Georgia" pitchFamily="34" charset="-120"/>
+                          <a:latin typeface="Inter" pitchFamily="34" charset="0"/>
+                          <a:ea typeface="Inter" pitchFamily="34" charset="-122"/>
+                          <a:cs typeface="Inter" pitchFamily="34" charset="-120"/>
                         </a:rPr>
-                        <a:t>on-chain limit decremented by the chain itself — incl. gas</a:t>
+                        <a:t>limit decremented by the chain itself — incl. gas</a:t>
                       </a:r>
                       <a:endParaRPr lang="en-US" sz="1250" dirty="0">
-                        <a:latin typeface="Georgia" charset="0"/>
-                        <a:ea typeface="Georgia" charset="0"/>
-                        <a:cs typeface="Georgia" charset="0"/>
+                        <a:latin typeface="Inter" charset="0"/>
+                        <a:ea typeface="Inter" charset="0"/>
+                        <a:cs typeface="Inter" charset="0"/>
                       </a:endParaRPr>
                     </a:p>
                   </a:txBody>
                   <a:tcPr marL="91440" marR="91440" marT="45720" marB="45720" anchor="ctr">
                     <a:lnL w="9525" cap="flat" cmpd="sng" algn="ctr">
                       <a:solidFill>
-                        <a:srgbClr val="D8CDB4"/>
+                        <a:srgbClr val="CBD5E1"/>
                       </a:solidFill>
                       <a:prstDash val="solid"/>
                       <a:round/>
@@ -5579,7 +5870,7 @@
                     </a:lnL>
                     <a:lnR w="9525" cap="flat" cmpd="sng" algn="ctr">
                       <a:solidFill>
-                        <a:srgbClr val="D8CDB4"/>
+                        <a:srgbClr val="CBD5E1"/>
                       </a:solidFill>
                       <a:prstDash val="solid"/>
                       <a:round/>
@@ -5588,7 +5879,7 @@
                     </a:lnR>
                     <a:lnT w="9525" cap="flat" cmpd="sng" algn="ctr">
                       <a:solidFill>
-                        <a:srgbClr val="D8CDB4"/>
+                        <a:srgbClr val="CBD5E1"/>
                       </a:solidFill>
                       <a:prstDash val="solid"/>
                       <a:round/>
@@ -5597,7 +5888,7 @@
                     </a:lnT>
                     <a:lnB w="9525" cap="flat" cmpd="sng" algn="ctr">
                       <a:solidFill>
-                        <a:srgbClr val="D8CDB4"/>
+                        <a:srgbClr val="CBD5E1"/>
                       </a:solidFill>
                       <a:prstDash val="solid"/>
                       <a:round/>
@@ -5605,7 +5896,7 @@
                       <a:tailEnd type="none" w="med" len="med"/>
                     </a:lnB>
                     <a:solidFill>
-                      <a:srgbClr val="FAF6EC"/>
+                      <a:srgbClr val="FFFFFF"/>
                     </a:solidFill>
                   </a:tcPr>
                 </a:tc>
@@ -5616,7 +5907,7 @@
       </p:graphicFrame>
       <p:sp>
         <p:nvSpPr>
-          <p:cNvPr id="4" name="Text 1"/>
+          <p:cNvPr id="5" name="Text 2"/>
           <p:cNvSpPr/>
           <p:nvPr/>
         </p:nvSpPr>
@@ -5641,7 +5932,7 @@
             <a:r>
               <a:rPr lang="en-US" sz="1200" dirty="0">
                 <a:solidFill>
-                  <a:srgbClr val="8A7F6C"/>
+                  <a:srgbClr val="64748B"/>
                 </a:solidFill>
                 <a:latin typeface="Consolas" pitchFamily="34" charset="0"/>
                 <a:ea typeface="Consolas" pitchFamily="34" charset="-122"/>
@@ -5655,13 +5946,13 @@
       </p:sp>
       <p:sp>
         <p:nvSpPr>
-          <p:cNvPr id="5" name="Text 2"/>
+          <p:cNvPr id="6" name="Text 3"/>
           <p:cNvSpPr/>
           <p:nvPr/>
         </p:nvSpPr>
         <p:spPr>
           <a:xfrm rot="-240000">
-            <a:off x="9966960" y="411480"/>
+            <a:off x="9966960" y="457200"/>
             <a:ext cx="1737360" cy="457200"/>
           </a:xfrm>
           <a:prstGeom prst="rect">
@@ -5674,7 +5965,7 @@
           </a:solidFill>
           <a:ln w="22225">
             <a:solidFill>
-              <a:srgbClr val="B3372B"/>
+              <a:srgbClr val="E5484D"/>
             </a:solidFill>
           </a:ln>
         </p:spPr>
@@ -5688,7 +5979,7 @@
             <a:r>
               <a:rPr lang="en-US" sz="1300" b="1" spc="300" kern="0" dirty="0">
                 <a:solidFill>
-                  <a:srgbClr val="B3372B"/>
+                  <a:srgbClr val="E5484D"/>
                 </a:solidFill>
                 <a:latin typeface="Consolas" pitchFamily="34" charset="0"/>
                 <a:ea typeface="Consolas" pitchFamily="34" charset="-122"/>
@@ -5714,7 +6005,7 @@
     <p:bg>
       <p:bgPr>
         <a:solidFill>
-          <a:srgbClr val="F1EBDE"/>
+          <a:srgbClr val="F4F7FB"/>
         </a:solidFill>
       </p:bgPr>
     </p:bg>
@@ -5740,7 +6031,46 @@
         </p:nvSpPr>
         <p:spPr>
           <a:xfrm>
-            <a:off x="502920" y="502920"/>
+            <a:off x="502920" y="548640"/>
+            <a:ext cx="10972800" cy="274320"/>
+          </a:xfrm>
+          <a:prstGeom prst="rect">
+            <a:avLst/>
+          </a:prstGeom>
+          <a:noFill/>
+          <a:ln/>
+        </p:spPr>
+        <p:txBody>
+          <a:bodyPr wrap="square" rtlCol="0" anchor="ctr"/>
+          <a:lstStyle/>
+          <a:p>
+            <a:pPr indent="0" marL="0">
+              <a:buNone/>
+            </a:pPr>
+            <a:r>
+              <a:rPr lang="en-US" sz="1150" b="1" spc="400" kern="0" dirty="0">
+                <a:solidFill>
+                  <a:srgbClr val="00C2A8"/>
+                </a:solidFill>
+                <a:latin typeface="Consolas" pitchFamily="34" charset="0"/>
+                <a:ea typeface="Consolas" pitchFamily="34" charset="-122"/>
+                <a:cs typeface="Consolas" pitchFamily="34" charset="-120"/>
+              </a:rPr>
+              <a:t>TRACK MAP · ONE TRUST LAYER, FOUR TRACKS</a:t>
+            </a:r>
+            <a:endParaRPr lang="en-US" sz="1150" dirty="0"/>
+          </a:p>
+        </p:txBody>
+      </p:sp>
+      <p:sp>
+        <p:nvSpPr>
+          <p:cNvPr id="3" name="Text 1"/>
+          <p:cNvSpPr/>
+          <p:nvPr/>
+        </p:nvSpPr>
+        <p:spPr>
+          <a:xfrm>
+            <a:off x="502920" y="914400"/>
             <a:ext cx="10972800" cy="914400"/>
           </a:xfrm>
           <a:prstGeom prst="rect">
@@ -5757,40 +6087,40 @@
               <a:buNone/>
             </a:pPr>
             <a:r>
-              <a:rPr lang="en-US" sz="3200" b="1" dirty="0">
-                <a:solidFill>
-                  <a:srgbClr val="211B10"/>
-                </a:solidFill>
-                <a:latin typeface="Georgia" pitchFamily="34" charset="0"/>
-                <a:ea typeface="Georgia" pitchFamily="34" charset="-122"/>
-                <a:cs typeface="Georgia" pitchFamily="34" charset="-120"/>
-              </a:rPr>
-              <a:t>One product, four submissions — every integration is core</a:t>
-            </a:r>
-            <a:endParaRPr lang="en-US" sz="3200" dirty="0"/>
-          </a:p>
-        </p:txBody>
-      </p:sp>
-      <p:sp>
-        <p:nvSpPr>
-          <p:cNvPr id="3" name="Shape 1"/>
-          <p:cNvSpPr/>
-          <p:nvPr/>
-        </p:nvSpPr>
-        <p:spPr>
-          <a:xfrm>
-            <a:off x="502920" y="1691640"/>
+              <a:rPr lang="en-US" sz="3000" b="1" dirty="0">
+                <a:solidFill>
+                  <a:srgbClr val="0F172A"/>
+                </a:solidFill>
+                <a:latin typeface="Inter" pitchFamily="34" charset="0"/>
+                <a:ea typeface="Inter" pitchFamily="34" charset="-122"/>
+                <a:cs typeface="Inter" pitchFamily="34" charset="-120"/>
+              </a:rPr>
+              <a:t>Each track serves the trust layer — integrations are core, not bolt-ons.</a:t>
+            </a:r>
+            <a:endParaRPr lang="en-US" sz="3000" dirty="0"/>
+          </a:p>
+        </p:txBody>
+      </p:sp>
+      <p:sp>
+        <p:nvSpPr>
+          <p:cNvPr id="4" name="Shape 2"/>
+          <p:cNvSpPr/>
+          <p:nvPr/>
+        </p:nvSpPr>
+        <p:spPr>
+          <a:xfrm>
+            <a:off x="502920" y="1783080"/>
             <a:ext cx="5440680" cy="1828800"/>
           </a:xfrm>
           <a:prstGeom prst="rect">
             <a:avLst/>
           </a:prstGeom>
           <a:solidFill>
-            <a:srgbClr val="FAF6EC"/>
+            <a:srgbClr val="FFFFFF"/>
           </a:solidFill>
-          <a:ln w="12700">
+          <a:ln w="15240">
             <a:solidFill>
-              <a:srgbClr val="D8CDB4"/>
+              <a:srgbClr val="0F172A"/>
             </a:solidFill>
             <a:prstDash val="solid"/>
           </a:ln>
@@ -5798,13 +6128,13 @@
       </p:sp>
       <p:sp>
         <p:nvSpPr>
-          <p:cNvPr id="4" name="Text 2"/>
-          <p:cNvSpPr/>
-          <p:nvPr/>
-        </p:nvSpPr>
-        <p:spPr>
-          <a:xfrm>
-            <a:off x="704088" y="1856232"/>
+          <p:cNvPr id="5" name="Text 3"/>
+          <p:cNvSpPr/>
+          <p:nvPr/>
+        </p:nvSpPr>
+        <p:spPr>
+          <a:xfrm>
+            <a:off x="704088" y="1947672"/>
             <a:ext cx="5029200" cy="411480"/>
           </a:xfrm>
           <a:prstGeom prst="rect">
@@ -5823,7 +6153,7 @@
             <a:r>
               <a:rPr lang="en-US" sz="1500" b="1" spc="200" kern="0" dirty="0">
                 <a:solidFill>
-                  <a:srgbClr val="211B10"/>
+                  <a:srgbClr val="0F172A"/>
                 </a:solidFill>
                 <a:latin typeface="Consolas" pitchFamily="34" charset="0"/>
                 <a:ea typeface="Consolas" pitchFamily="34" charset="-122"/>
@@ -5837,13 +6167,13 @@
       </p:sp>
       <p:sp>
         <p:nvSpPr>
-          <p:cNvPr id="5" name="Text 3"/>
-          <p:cNvSpPr/>
-          <p:nvPr/>
-        </p:nvSpPr>
-        <p:spPr>
-          <a:xfrm>
-            <a:off x="704088" y="2331720"/>
+          <p:cNvPr id="6" name="Text 4"/>
+          <p:cNvSpPr/>
+          <p:nvPr/>
+        </p:nvSpPr>
+        <p:spPr>
+          <a:xfrm>
+            <a:off x="704088" y="2423160"/>
             <a:ext cx="5029200" cy="1097280"/>
           </a:xfrm>
           <a:prstGeom prst="rect">
@@ -5862,11 +6192,11 @@
             <a:r>
               <a:rPr lang="en-US" sz="1350" dirty="0">
                 <a:solidFill>
-                  <a:srgbClr val="5C5340"/>
-                </a:solidFill>
-                <a:latin typeface="Georgia" pitchFamily="34" charset="0"/>
-                <a:ea typeface="Georgia" pitchFamily="34" charset="-122"/>
-                <a:cs typeface="Georgia" pitchFamily="34" charset="-120"/>
+                  <a:srgbClr val="334155"/>
+                </a:solidFill>
+                <a:latin typeface="Inter" pitchFamily="34" charset="0"/>
+                <a:ea typeface="Inter" pitchFamily="34" charset="-122"/>
+                <a:cs typeface="Inter" pitchFamily="34" charset="-120"/>
               </a:rPr>
               <a:t>The whole product: two-rail agent + passbook oversight + CRE audit. Themes: AI x Crypto · Payments · Consumer.</a:t>
             </a:r>
@@ -5876,24 +6206,24 @@
       </p:sp>
       <p:sp>
         <p:nvSpPr>
-          <p:cNvPr id="6" name="Shape 4"/>
-          <p:cNvSpPr/>
-          <p:nvPr/>
-        </p:nvSpPr>
-        <p:spPr>
-          <a:xfrm>
-            <a:off x="6217920" y="1691640"/>
+          <p:cNvPr id="7" name="Shape 5"/>
+          <p:cNvSpPr/>
+          <p:nvPr/>
+        </p:nvSpPr>
+        <p:spPr>
+          <a:xfrm>
+            <a:off x="6217920" y="1783080"/>
             <a:ext cx="5440680" cy="1828800"/>
           </a:xfrm>
           <a:prstGeom prst="rect">
             <a:avLst/>
           </a:prstGeom>
           <a:solidFill>
-            <a:srgbClr val="FAF6EC"/>
+            <a:srgbClr val="FFFFFF"/>
           </a:solidFill>
-          <a:ln w="12700">
+          <a:ln w="15240">
             <a:solidFill>
-              <a:srgbClr val="D8CDB4"/>
+              <a:srgbClr val="00C2A8"/>
             </a:solidFill>
             <a:prstDash val="solid"/>
           </a:ln>
@@ -5901,13 +6231,13 @@
       </p:sp>
       <p:sp>
         <p:nvSpPr>
-          <p:cNvPr id="7" name="Text 5"/>
-          <p:cNvSpPr/>
-          <p:nvPr/>
-        </p:nvSpPr>
-        <p:spPr>
-          <a:xfrm>
-            <a:off x="6419088" y="1856232"/>
+          <p:cNvPr id="8" name="Text 6"/>
+          <p:cNvSpPr/>
+          <p:nvPr/>
+        </p:nvSpPr>
+        <p:spPr>
+          <a:xfrm>
+            <a:off x="6419088" y="1947672"/>
             <a:ext cx="5029200" cy="411480"/>
           </a:xfrm>
           <a:prstGeom prst="rect">
@@ -5926,7 +6256,7 @@
             <a:r>
               <a:rPr lang="en-US" sz="1500" b="1" spc="200" kern="0" dirty="0">
                 <a:solidFill>
-                  <a:srgbClr val="211B10"/>
+                  <a:srgbClr val="00C2A8"/>
                 </a:solidFill>
                 <a:latin typeface="Consolas" pitchFamily="34" charset="0"/>
                 <a:ea typeface="Consolas" pitchFamily="34" charset="-122"/>
@@ -5940,13 +6270,13 @@
       </p:sp>
       <p:sp>
         <p:nvSpPr>
-          <p:cNvPr id="8" name="Text 6"/>
-          <p:cNvSpPr/>
-          <p:nvPr/>
-        </p:nvSpPr>
-        <p:spPr>
-          <a:xfrm>
-            <a:off x="6419088" y="2331720"/>
+          <p:cNvPr id="9" name="Text 7"/>
+          <p:cNvSpPr/>
+          <p:nvPr/>
+        </p:nvSpPr>
+        <p:spPr>
+          <a:xfrm>
+            <a:off x="6419088" y="2423160"/>
             <a:ext cx="5029200" cy="1097280"/>
           </a:xfrm>
           <a:prstGeom prst="rect">
@@ -5965,11 +6295,11 @@
             <a:r>
               <a:rPr lang="en-US" sz="1350" dirty="0">
                 <a:solidFill>
-                  <a:srgbClr val="5C5340"/>
-                </a:solidFill>
-                <a:latin typeface="Georgia" pitchFamily="34" charset="0"/>
-                <a:ea typeface="Georgia" pitchFamily="34" charset="-122"/>
-                <a:cs typeface="Georgia" pitchFamily="34" charset="-120"/>
+                  <a:srgbClr val="334155"/>
+                </a:solidFill>
+                <a:latin typeface="Inter" pitchFamily="34" charset="0"/>
+                <a:ea typeface="Inter" pitchFamily="34" charset="-122"/>
+                <a:cs typeface="Inter" pitchFamily="34" charset="-120"/>
               </a:rPr>
               <a:t>Payments are Cardano-native: x402 preprod tUSDM, our own seller endpoint, TS-only SDK path — 0.10 tUSDM changed hands.</a:t>
             </a:r>
@@ -5979,24 +6309,24 @@
       </p:sp>
       <p:sp>
         <p:nvSpPr>
-          <p:cNvPr id="9" name="Shape 7"/>
-          <p:cNvSpPr/>
-          <p:nvPr/>
-        </p:nvSpPr>
-        <p:spPr>
-          <a:xfrm>
-            <a:off x="502920" y="3794760"/>
+          <p:cNvPr id="10" name="Shape 8"/>
+          <p:cNvSpPr/>
+          <p:nvPr/>
+        </p:nvSpPr>
+        <p:spPr>
+          <a:xfrm>
+            <a:off x="502920" y="3886200"/>
             <a:ext cx="5440680" cy="1828800"/>
           </a:xfrm>
           <a:prstGeom prst="rect">
             <a:avLst/>
           </a:prstGeom>
           <a:solidFill>
-            <a:srgbClr val="FAF6EC"/>
+            <a:srgbClr val="FFFFFF"/>
           </a:solidFill>
-          <a:ln w="12700">
+          <a:ln w="15240">
             <a:solidFill>
-              <a:srgbClr val="D8CDB4"/>
+              <a:srgbClr val="00C2A8"/>
             </a:solidFill>
             <a:prstDash val="solid"/>
           </a:ln>
@@ -6004,13 +6334,13 @@
       </p:sp>
       <p:sp>
         <p:nvSpPr>
-          <p:cNvPr id="10" name="Text 8"/>
-          <p:cNvSpPr/>
-          <p:nvPr/>
-        </p:nvSpPr>
-        <p:spPr>
-          <a:xfrm>
-            <a:off x="704088" y="3959352"/>
+          <p:cNvPr id="11" name="Text 9"/>
+          <p:cNvSpPr/>
+          <p:nvPr/>
+        </p:nvSpPr>
+        <p:spPr>
+          <a:xfrm>
+            <a:off x="704088" y="4050792"/>
             <a:ext cx="5029200" cy="411480"/>
           </a:xfrm>
           <a:prstGeom prst="rect">
@@ -6029,7 +6359,7 @@
             <a:r>
               <a:rPr lang="en-US" sz="1500" b="1" spc="200" kern="0" dirty="0">
                 <a:solidFill>
-                  <a:srgbClr val="211B10"/>
+                  <a:srgbClr val="00C2A8"/>
                 </a:solidFill>
                 <a:latin typeface="Consolas" pitchFamily="34" charset="0"/>
                 <a:ea typeface="Consolas" pitchFamily="34" charset="-122"/>
@@ -6043,13 +6373,13 @@
       </p:sp>
       <p:sp>
         <p:nvSpPr>
-          <p:cNvPr id="11" name="Text 9"/>
-          <p:cNvSpPr/>
-          <p:nvPr/>
-        </p:nvSpPr>
-        <p:spPr>
-          <a:xfrm>
-            <a:off x="704088" y="4434840"/>
+          <p:cNvPr id="12" name="Text 10"/>
+          <p:cNvSpPr/>
+          <p:nvPr/>
+        </p:nvSpPr>
+        <p:spPr>
+          <a:xfrm>
+            <a:off x="704088" y="4526280"/>
             <a:ext cx="5029200" cy="1097280"/>
           </a:xfrm>
           <a:prstGeom prst="rect">
@@ -6068,11 +6398,11 @@
             <a:r>
               <a:rPr lang="en-US" sz="1350" dirty="0">
                 <a:solidFill>
-                  <a:srgbClr val="5C5340"/>
-                </a:solidFill>
-                <a:latin typeface="Georgia" pitchFamily="34" charset="0"/>
-                <a:ea typeface="Georgia" pitchFamily="34" charset="-122"/>
-                <a:cs typeface="Georgia" pitchFamily="34" charset="-120"/>
+                  <a:srgbClr val="334155"/>
+                </a:solidFill>
+                <a:latin typeface="Inter" pitchFamily="34" charset="0"/>
+                <a:ea typeface="Inter" pitchFamily="34" charset="-122"/>
+                <a:cs typeface="Inter" pitchFamily="34" charset="-120"/>
               </a:rPr>
               <a:t>The auditor IS a CRE workflow: HTTP fetch + risk logic + EVM write, proven by cre workflow simulate.</a:t>
             </a:r>
@@ -6082,24 +6412,24 @@
       </p:sp>
       <p:sp>
         <p:nvSpPr>
-          <p:cNvPr id="12" name="Shape 10"/>
-          <p:cNvSpPr/>
-          <p:nvPr/>
-        </p:nvSpPr>
-        <p:spPr>
-          <a:xfrm>
-            <a:off x="6217920" y="3794760"/>
+          <p:cNvPr id="13" name="Shape 11"/>
+          <p:cNvSpPr/>
+          <p:nvPr/>
+        </p:nvSpPr>
+        <p:spPr>
+          <a:xfrm>
+            <a:off x="6217920" y="3886200"/>
             <a:ext cx="5440680" cy="1828800"/>
           </a:xfrm>
           <a:prstGeom prst="rect">
             <a:avLst/>
           </a:prstGeom>
           <a:solidFill>
-            <a:srgbClr val="FAF6EC"/>
+            <a:srgbClr val="FFFFFF"/>
           </a:solidFill>
-          <a:ln w="12700">
+          <a:ln w="15240">
             <a:solidFill>
-              <a:srgbClr val="D8CDB4"/>
+              <a:srgbClr val="00C2A8"/>
             </a:solidFill>
             <a:prstDash val="solid"/>
           </a:ln>
@@ -6107,13 +6437,13 @@
       </p:sp>
       <p:sp>
         <p:nvSpPr>
-          <p:cNvPr id="13" name="Text 11"/>
-          <p:cNvSpPr/>
-          <p:nvPr/>
-        </p:nvSpPr>
-        <p:spPr>
-          <a:xfrm>
-            <a:off x="6419088" y="3959352"/>
+          <p:cNvPr id="14" name="Text 12"/>
+          <p:cNvSpPr/>
+          <p:nvPr/>
+        </p:nvSpPr>
+        <p:spPr>
+          <a:xfrm>
+            <a:off x="6419088" y="4050792"/>
             <a:ext cx="5029200" cy="411480"/>
           </a:xfrm>
           <a:prstGeom prst="rect">
@@ -6132,7 +6462,7 @@
             <a:r>
               <a:rPr lang="en-US" sz="1500" b="1" spc="200" kern="0" dirty="0">
                 <a:solidFill>
-                  <a:srgbClr val="211B10"/>
+                  <a:srgbClr val="00C2A8"/>
                 </a:solidFill>
                 <a:latin typeface="Consolas" pitchFamily="34" charset="0"/>
                 <a:ea typeface="Consolas" pitchFamily="34" charset="-122"/>
@@ -6146,13 +6476,13 @@
       </p:sp>
       <p:sp>
         <p:nvSpPr>
-          <p:cNvPr id="14" name="Text 12"/>
-          <p:cNvSpPr/>
-          <p:nvPr/>
-        </p:nvSpPr>
-        <p:spPr>
-          <a:xfrm>
-            <a:off x="6419088" y="4434840"/>
+          <p:cNvPr id="15" name="Text 13"/>
+          <p:cNvSpPr/>
+          <p:nvPr/>
+        </p:nvSpPr>
+        <p:spPr>
+          <a:xfrm>
+            <a:off x="6419088" y="4526280"/>
             <a:ext cx="5029200" cy="1097280"/>
           </a:xfrm>
           <a:prstGeom prst="rect">
@@ -6171,11 +6501,11 @@
             <a:r>
               <a:rPr lang="en-US" sz="1350" dirty="0">
                 <a:solidFill>
-                  <a:srgbClr val="5C5340"/>
-                </a:solidFill>
-                <a:latin typeface="Georgia" pitchFamily="34" charset="0"/>
-                <a:ea typeface="Georgia" pitchFamily="34" charset="-122"/>
-                <a:cs typeface="Georgia" pitchFamily="34" charset="-120"/>
+                  <a:srgbClr val="334155"/>
+                </a:solidFill>
+                <a:latin typeface="Inter" pitchFamily="34" charset="0"/>
+                <a:ea typeface="Inter" pitchFamily="34" charset="-122"/>
+                <a:cs typeface="Inter" pitchFamily="34" charset="-120"/>
               </a:rPr>
               <a:t>The auditor's RPC data plane reads EVM receipt state through NOWNodes — architectural, not decorative.</a:t>
             </a:r>
@@ -6185,7 +6515,7 @@
       </p:sp>
       <p:sp>
         <p:nvSpPr>
-          <p:cNvPr id="15" name="Text 13"/>
+          <p:cNvPr id="16" name="Text 14"/>
           <p:cNvSpPr/>
           <p:nvPr/>
         </p:nvSpPr>
@@ -6210,13 +6540,13 @@
             <a:r>
               <a:rPr lang="en-US" sz="1300" i="1" dirty="0">
                 <a:solidFill>
-                  <a:srgbClr val="5C5340"/>
-                </a:solidFill>
-                <a:latin typeface="Georgia" pitchFamily="34" charset="0"/>
-                <a:ea typeface="Georgia" pitchFamily="34" charset="-122"/>
-                <a:cs typeface="Georgia" pitchFamily="34" charset="-120"/>
-              </a:rPr>
-              <a:t>Partner integrations are core functionality on every track — the rules disqualify bolt-ons, so each leg earns its keep.</a:t>
+                  <a:srgbClr val="334155"/>
+                </a:solidFill>
+                <a:latin typeface="Inter" pitchFamily="34" charset="0"/>
+                <a:ea typeface="Inter" pitchFamily="34" charset="-122"/>
+                <a:cs typeface="Inter" pitchFamily="34" charset="-120"/>
+              </a:rPr>
+              <a:t>The rules disqualify bolt-ons. Each leg earns its keep — the trust layer can't survive a single missing piece.</a:t>
             </a:r>
             <a:endParaRPr lang="en-US" sz="1300" dirty="0"/>
           </a:p>
@@ -6236,7 +6566,7 @@
     <p:bg>
       <p:bgPr>
         <a:solidFill>
-          <a:srgbClr val="F1EBDE"/>
+          <a:srgbClr val="F4F7FB"/>
         </a:solidFill>
       </p:bgPr>
     </p:bg>
@@ -6262,8 +6592,8 @@
         </p:nvSpPr>
         <p:spPr>
           <a:xfrm>
-            <a:off x="502920" y="502920"/>
-            <a:ext cx="11155680" cy="1005840"/>
+            <a:off x="502920" y="548640"/>
+            <a:ext cx="10972800" cy="274320"/>
           </a:xfrm>
           <a:prstGeom prst="rect">
             <a:avLst/>
@@ -6279,53 +6609,92 @@
               <a:buNone/>
             </a:pPr>
             <a:r>
-              <a:rPr lang="en-US" sz="3100" b="1" dirty="0">
-                <a:solidFill>
-                  <a:srgbClr val="211B10"/>
-                </a:solidFill>
-                <a:latin typeface="Georgia" pitchFamily="34" charset="0"/>
-                <a:ea typeface="Georgia" pitchFamily="34" charset="-122"/>
-                <a:cs typeface="Georgia" pitchFamily="34" charset="-120"/>
-              </a:rPr>
-              <a:t>Built for the rubric, in 30 hours, by humans with a leash of our own</a:t>
-            </a:r>
-            <a:endParaRPr lang="en-US" sz="3100" dirty="0"/>
-          </a:p>
-        </p:txBody>
-      </p:sp>
-      <p:sp>
-        <p:nvSpPr>
-          <p:cNvPr id="3" name="Text 1"/>
-          <p:cNvSpPr/>
-          <p:nvPr/>
-        </p:nvSpPr>
-        <p:spPr>
-          <a:xfrm>
-            <a:off x="502920" y="1600200"/>
-            <a:ext cx="2834640" cy="731520"/>
-          </a:xfrm>
-          <a:prstGeom prst="rect">
-            <a:avLst/>
-          </a:prstGeom>
-          <a:noFill/>
-          <a:ln/>
-        </p:spPr>
-        <p:txBody>
-          <a:bodyPr wrap="square" rtlCol="0" anchor="ctr"/>
-          <a:lstStyle/>
-          <a:p>
-            <a:pPr indent="0" marL="0">
-              <a:buNone/>
-            </a:pPr>
-            <a:r>
-              <a:rPr lang="en-US" sz="1500" b="1" dirty="0">
-                <a:solidFill>
-                  <a:srgbClr val="211B10"/>
+              <a:rPr lang="en-US" sz="1150" b="1" spc="400" kern="0" dirty="0">
+                <a:solidFill>
+                  <a:srgbClr val="00C2A8"/>
                 </a:solidFill>
                 <a:latin typeface="Consolas" pitchFamily="34" charset="0"/>
                 <a:ea typeface="Consolas" pitchFamily="34" charset="-122"/>
                 <a:cs typeface="Consolas" pitchFamily="34" charset="-120"/>
               </a:rPr>
+              <a:t>RUBRIC FIT · TRUST LAYER SCORES ON ALL FIVE</a:t>
+            </a:r>
+            <a:endParaRPr lang="en-US" sz="1150" dirty="0"/>
+          </a:p>
+        </p:txBody>
+      </p:sp>
+      <p:sp>
+        <p:nvSpPr>
+          <p:cNvPr id="3" name="Text 1"/>
+          <p:cNvSpPr/>
+          <p:nvPr/>
+        </p:nvSpPr>
+        <p:spPr>
+          <a:xfrm>
+            <a:off x="502920" y="914400"/>
+            <a:ext cx="11155680" cy="1005840"/>
+          </a:xfrm>
+          <a:prstGeom prst="rect">
+            <a:avLst/>
+          </a:prstGeom>
+          <a:noFill/>
+          <a:ln/>
+        </p:spPr>
+        <p:txBody>
+          <a:bodyPr wrap="square" rtlCol="0" anchor="ctr"/>
+          <a:lstStyle/>
+          <a:p>
+            <a:pPr indent="0" marL="0">
+              <a:buNone/>
+            </a:pPr>
+            <a:r>
+              <a:rPr lang="en-US" sz="2800" b="1" dirty="0">
+                <a:solidFill>
+                  <a:srgbClr val="0F172A"/>
+                </a:solidFill>
+                <a:latin typeface="Inter" pitchFamily="34" charset="0"/>
+                <a:ea typeface="Inter" pitchFamily="34" charset="-122"/>
+                <a:cs typeface="Inter" pitchFamily="34" charset="-120"/>
+              </a:rPr>
+              <a:t>Built for the rubric, in 30 hours, by humans with a leash of our own.</a:t>
+            </a:r>
+            <a:endParaRPr lang="en-US" sz="2800" dirty="0"/>
+          </a:p>
+        </p:txBody>
+      </p:sp>
+      <p:sp>
+        <p:nvSpPr>
+          <p:cNvPr id="4" name="Text 2"/>
+          <p:cNvSpPr/>
+          <p:nvPr/>
+        </p:nvSpPr>
+        <p:spPr>
+          <a:xfrm>
+            <a:off x="502920" y="1691640"/>
+            <a:ext cx="2834640" cy="731520"/>
+          </a:xfrm>
+          <a:prstGeom prst="rect">
+            <a:avLst/>
+          </a:prstGeom>
+          <a:noFill/>
+          <a:ln/>
+        </p:spPr>
+        <p:txBody>
+          <a:bodyPr wrap="square" rtlCol="0" anchor="ctr"/>
+          <a:lstStyle/>
+          <a:p>
+            <a:pPr indent="0" marL="0">
+              <a:buNone/>
+            </a:pPr>
+            <a:r>
+              <a:rPr lang="en-US" sz="1500" b="1" dirty="0">
+                <a:solidFill>
+                  <a:srgbClr val="0F172A"/>
+                </a:solidFill>
+                <a:latin typeface="Consolas" pitchFamily="34" charset="0"/>
+                <a:ea typeface="Consolas" pitchFamily="34" charset="-122"/>
+                <a:cs typeface="Consolas" pitchFamily="34" charset="-120"/>
+              </a:rPr>
               <a:t>Functionality 30%</a:t>
             </a:r>
             <a:endParaRPr lang="en-US" sz="1500" dirty="0"/>
@@ -6334,13 +6703,13 @@
       </p:sp>
       <p:sp>
         <p:nvSpPr>
-          <p:cNvPr id="4" name="Text 2"/>
-          <p:cNvSpPr/>
-          <p:nvPr/>
-        </p:nvSpPr>
-        <p:spPr>
-          <a:xfrm>
-            <a:off x="3566160" y="1618488"/>
+          <p:cNvPr id="5" name="Text 3"/>
+          <p:cNvSpPr/>
+          <p:nvPr/>
+        </p:nvSpPr>
+        <p:spPr>
+          <a:xfrm>
+            <a:off x="3566160" y="1709928"/>
             <a:ext cx="8138160" cy="822960"/>
           </a:xfrm>
           <a:prstGeom prst="rect">
@@ -6359,11 +6728,11 @@
             <a:r>
               <a:rPr lang="en-US" sz="1350" dirty="0">
                 <a:solidFill>
-                  <a:srgbClr val="5C5340"/>
-                </a:solidFill>
-                <a:latin typeface="Georgia" pitchFamily="34" charset="0"/>
-                <a:ea typeface="Georgia" pitchFamily="34" charset="-122"/>
-                <a:cs typeface="Georgia" pitchFamily="34" charset="-120"/>
+                  <a:srgbClr val="334155"/>
+                </a:solidFill>
+                <a:latin typeface="Inter" pitchFamily="34" charset="0"/>
+                <a:ea typeface="Inter" pitchFamily="34" charset="-122"/>
+                <a:cs typeface="Inter" pitchFamily="34" charset="-120"/>
               </a:rPr>
               <a:t>Two paid journeys ran end-to-end with explorer links; top-up, revoke and auditor flows all execute.</a:t>
             </a:r>
@@ -6373,13 +6742,13 @@
       </p:sp>
       <p:sp>
         <p:nvSpPr>
-          <p:cNvPr id="5" name="Shape 3"/>
-          <p:cNvSpPr/>
-          <p:nvPr/>
-        </p:nvSpPr>
-        <p:spPr>
-          <a:xfrm>
-            <a:off x="502920" y="2368296"/>
+          <p:cNvPr id="6" name="Shape 4"/>
+          <p:cNvSpPr/>
+          <p:nvPr/>
+        </p:nvSpPr>
+        <p:spPr>
+          <a:xfrm>
+            <a:off x="502920" y="2459736"/>
             <a:ext cx="11183112" cy="0"/>
           </a:xfrm>
           <a:prstGeom prst="line">
@@ -6388,7 +6757,7 @@
           <a:noFill/>
           <a:ln w="12700">
             <a:solidFill>
-              <a:srgbClr val="D8CDB4"/>
+              <a:srgbClr val="CBD5E1"/>
             </a:solidFill>
             <a:prstDash val="solid"/>
           </a:ln>
@@ -6396,13 +6765,13 @@
       </p:sp>
       <p:sp>
         <p:nvSpPr>
-          <p:cNvPr id="6" name="Text 4"/>
-          <p:cNvSpPr/>
-          <p:nvPr/>
-        </p:nvSpPr>
-        <p:spPr>
-          <a:xfrm>
-            <a:off x="502920" y="2496312"/>
+          <p:cNvPr id="7" name="Text 5"/>
+          <p:cNvSpPr/>
+          <p:nvPr/>
+        </p:nvSpPr>
+        <p:spPr>
+          <a:xfrm>
+            <a:off x="502920" y="2560320"/>
             <a:ext cx="2834640" cy="731520"/>
           </a:xfrm>
           <a:prstGeom prst="rect">
@@ -6421,7 +6790,7 @@
             <a:r>
               <a:rPr lang="en-US" sz="1500" b="1" dirty="0">
                 <a:solidFill>
-                  <a:srgbClr val="211B10"/>
+                  <a:srgbClr val="0F172A"/>
                 </a:solidFill>
                 <a:latin typeface="Consolas" pitchFamily="34" charset="0"/>
                 <a:ea typeface="Consolas" pitchFamily="34" charset="-122"/>
@@ -6435,13 +6804,13 @@
       </p:sp>
       <p:sp>
         <p:nvSpPr>
-          <p:cNvPr id="7" name="Text 5"/>
-          <p:cNvSpPr/>
-          <p:nvPr/>
-        </p:nvSpPr>
-        <p:spPr>
-          <a:xfrm>
-            <a:off x="3566160" y="2514600"/>
+          <p:cNvPr id="8" name="Text 6"/>
+          <p:cNvSpPr/>
+          <p:nvPr/>
+        </p:nvSpPr>
+        <p:spPr>
+          <a:xfrm>
+            <a:off x="3566160" y="2578608"/>
             <a:ext cx="8138160" cy="822960"/>
           </a:xfrm>
           <a:prstGeom prst="rect">
@@ -6460,11 +6829,11 @@
             <a:r>
               <a:rPr lang="en-US" sz="1350" dirty="0">
                 <a:solidFill>
-                  <a:srgbClr val="5C5340"/>
-                </a:solidFill>
-                <a:latin typeface="Georgia" pitchFamily="34" charset="0"/>
-                <a:ea typeface="Georgia" pitchFamily="34" charset="-122"/>
-                <a:cs typeface="Georgia" pitchFamily="34" charset="-120"/>
+                  <a:srgbClr val="334155"/>
+                </a:solidFill>
+                <a:latin typeface="Inter" pitchFamily="34" charset="0"/>
+                <a:ea typeface="Inter" pitchFamily="34" charset="-122"/>
+                <a:cs typeface="Inter" pitchFamily="34" charset="-120"/>
               </a:rPr>
               <a:t>On-chain limit enforcement (TIP-1011) · x402 seller + payer · MPP memo-bound charges · CRE orchestration.</a:t>
             </a:r>
@@ -6474,13 +6843,13 @@
       </p:sp>
       <p:sp>
         <p:nvSpPr>
-          <p:cNvPr id="8" name="Shape 6"/>
-          <p:cNvSpPr/>
-          <p:nvPr/>
-        </p:nvSpPr>
-        <p:spPr>
-          <a:xfrm>
-            <a:off x="502920" y="3264408"/>
+          <p:cNvPr id="9" name="Shape 7"/>
+          <p:cNvSpPr/>
+          <p:nvPr/>
+        </p:nvSpPr>
+        <p:spPr>
+          <a:xfrm>
+            <a:off x="502920" y="3328416"/>
             <a:ext cx="11183112" cy="0"/>
           </a:xfrm>
           <a:prstGeom prst="line">
@@ -6489,7 +6858,7 @@
           <a:noFill/>
           <a:ln w="12700">
             <a:solidFill>
-              <a:srgbClr val="D8CDB4"/>
+              <a:srgbClr val="CBD5E1"/>
             </a:solidFill>
             <a:prstDash val="solid"/>
           </a:ln>
@@ -6497,13 +6866,13 @@
       </p:sp>
       <p:sp>
         <p:nvSpPr>
-          <p:cNvPr id="9" name="Text 7"/>
-          <p:cNvSpPr/>
-          <p:nvPr/>
-        </p:nvSpPr>
-        <p:spPr>
-          <a:xfrm>
-            <a:off x="502920" y="3392424"/>
+          <p:cNvPr id="10" name="Text 8"/>
+          <p:cNvSpPr/>
+          <p:nvPr/>
+        </p:nvSpPr>
+        <p:spPr>
+          <a:xfrm>
+            <a:off x="502920" y="3429000"/>
             <a:ext cx="2834640" cy="731520"/>
           </a:xfrm>
           <a:prstGeom prst="rect">
@@ -6522,7 +6891,7 @@
             <a:r>
               <a:rPr lang="en-US" sz="1500" b="1" dirty="0">
                 <a:solidFill>
-                  <a:srgbClr val="211B10"/>
+                  <a:srgbClr val="0F172A"/>
                 </a:solidFill>
                 <a:latin typeface="Consolas" pitchFamily="34" charset="0"/>
                 <a:ea typeface="Consolas" pitchFamily="34" charset="-122"/>
@@ -6536,13 +6905,13 @@
       </p:sp>
       <p:sp>
         <p:nvSpPr>
-          <p:cNvPr id="10" name="Text 8"/>
-          <p:cNvSpPr/>
-          <p:nvPr/>
-        </p:nvSpPr>
-        <p:spPr>
-          <a:xfrm>
-            <a:off x="3566160" y="3410712"/>
+          <p:cNvPr id="11" name="Text 9"/>
+          <p:cNvSpPr/>
+          <p:nvPr/>
+        </p:nvSpPr>
+        <p:spPr>
+          <a:xfrm>
+            <a:off x="3566160" y="3447288"/>
             <a:ext cx="8138160" cy="822960"/>
           </a:xfrm>
           <a:prstGeom prst="rect">
@@ -6561,11 +6930,11 @@
             <a:r>
               <a:rPr lang="en-US" sz="1350" dirty="0">
                 <a:solidFill>
-                  <a:srgbClr val="5C5340"/>
-                </a:solidFill>
-                <a:latin typeface="Georgia" pitchFamily="34" charset="0"/>
-                <a:ea typeface="Georgia" pitchFamily="34" charset="-122"/>
-                <a:cs typeface="Georgia" pitchFamily="34" charset="-120"/>
+                  <a:srgbClr val="334155"/>
+                </a:solidFill>
+                <a:latin typeface="Inter" pitchFamily="34" charset="0"/>
+                <a:ea typeface="Inter" pitchFamily="34" charset="-122"/>
+                <a:cs typeface="Inter" pitchFamily="34" charset="-120"/>
               </a:rPr>
               <a:t>The trust layer: leash + receipts + independent audit + fiat on-ramp — the lane comparables left empty.</a:t>
             </a:r>
@@ -6575,13 +6944,13 @@
       </p:sp>
       <p:sp>
         <p:nvSpPr>
-          <p:cNvPr id="11" name="Shape 9"/>
-          <p:cNvSpPr/>
-          <p:nvPr/>
-        </p:nvSpPr>
-        <p:spPr>
-          <a:xfrm>
-            <a:off x="502920" y="4160520"/>
+          <p:cNvPr id="12" name="Shape 10"/>
+          <p:cNvSpPr/>
+          <p:nvPr/>
+        </p:nvSpPr>
+        <p:spPr>
+          <a:xfrm>
+            <a:off x="502920" y="4197096"/>
             <a:ext cx="11183112" cy="0"/>
           </a:xfrm>
           <a:prstGeom prst="line">
@@ -6590,7 +6959,7 @@
           <a:noFill/>
           <a:ln w="12700">
             <a:solidFill>
-              <a:srgbClr val="D8CDB4"/>
+              <a:srgbClr val="CBD5E1"/>
             </a:solidFill>
             <a:prstDash val="solid"/>
           </a:ln>
@@ -6598,13 +6967,13 @@
       </p:sp>
       <p:sp>
         <p:nvSpPr>
-          <p:cNvPr id="12" name="Text 10"/>
-          <p:cNvSpPr/>
-          <p:nvPr/>
-        </p:nvSpPr>
-        <p:spPr>
-          <a:xfrm>
-            <a:off x="502920" y="4288536"/>
+          <p:cNvPr id="13" name="Text 11"/>
+          <p:cNvSpPr/>
+          <p:nvPr/>
+        </p:nvSpPr>
+        <p:spPr>
+          <a:xfrm>
+            <a:off x="502920" y="4297680"/>
             <a:ext cx="2834640" cy="731520"/>
           </a:xfrm>
           <a:prstGeom prst="rect">
@@ -6623,7 +6992,7 @@
             <a:r>
               <a:rPr lang="en-US" sz="1500" b="1" dirty="0">
                 <a:solidFill>
-                  <a:srgbClr val="211B10"/>
+                  <a:srgbClr val="0F172A"/>
                 </a:solidFill>
                 <a:latin typeface="Consolas" pitchFamily="34" charset="0"/>
                 <a:ea typeface="Consolas" pitchFamily="34" charset="-122"/>
@@ -6637,13 +7006,13 @@
       </p:sp>
       <p:sp>
         <p:nvSpPr>
-          <p:cNvPr id="13" name="Text 11"/>
-          <p:cNvSpPr/>
-          <p:nvPr/>
-        </p:nvSpPr>
-        <p:spPr>
-          <a:xfrm>
-            <a:off x="3566160" y="4306824"/>
+          <p:cNvPr id="14" name="Text 12"/>
+          <p:cNvSpPr/>
+          <p:nvPr/>
+        </p:nvSpPr>
+        <p:spPr>
+          <a:xfrm>
+            <a:off x="3566160" y="4315968"/>
             <a:ext cx="8138160" cy="822960"/>
           </a:xfrm>
           <a:prstGeom prst="rect">
@@ -6662,11 +7031,11 @@
             <a:r>
               <a:rPr lang="en-US" sz="1350" dirty="0">
                 <a:solidFill>
-                  <a:srgbClr val="5C5340"/>
-                </a:solidFill>
-                <a:latin typeface="Georgia" pitchFamily="34" charset="0"/>
-                <a:ea typeface="Georgia" pitchFamily="34" charset="-122"/>
-                <a:cs typeface="Georgia" pitchFamily="34" charset="-120"/>
+                  <a:srgbClr val="334155"/>
+                </a:solidFill>
+                <a:latin typeface="Inter" pitchFamily="34" charset="0"/>
+                <a:ea typeface="Inter" pitchFamily="34" charset="-122"/>
+                <a:cs typeface="Inter" pitchFamily="34" charset="-120"/>
               </a:rPr>
               <a:t>A noodle shop owner in Bangkok is the persona. 1 THB = 1 THCFI funding needs no exchange account.</a:t>
             </a:r>
@@ -6676,13 +7045,13 @@
       </p:sp>
       <p:sp>
         <p:nvSpPr>
-          <p:cNvPr id="14" name="Shape 12"/>
-          <p:cNvSpPr/>
-          <p:nvPr/>
-        </p:nvSpPr>
-        <p:spPr>
-          <a:xfrm>
-            <a:off x="502920" y="5056632"/>
+          <p:cNvPr id="15" name="Shape 13"/>
+          <p:cNvSpPr/>
+          <p:nvPr/>
+        </p:nvSpPr>
+        <p:spPr>
+          <a:xfrm>
+            <a:off x="502920" y="5065776"/>
             <a:ext cx="11183112" cy="0"/>
           </a:xfrm>
           <a:prstGeom prst="line">
@@ -6691,7 +7060,7 @@
           <a:noFill/>
           <a:ln w="12700">
             <a:solidFill>
-              <a:srgbClr val="D8CDB4"/>
+              <a:srgbClr val="CBD5E1"/>
             </a:solidFill>
             <a:prstDash val="solid"/>
           </a:ln>
@@ -6699,13 +7068,13 @@
       </p:sp>
       <p:sp>
         <p:nvSpPr>
-          <p:cNvPr id="15" name="Text 13"/>
-          <p:cNvSpPr/>
-          <p:nvPr/>
-        </p:nvSpPr>
-        <p:spPr>
-          <a:xfrm>
-            <a:off x="502920" y="5184648"/>
+          <p:cNvPr id="16" name="Text 14"/>
+          <p:cNvSpPr/>
+          <p:nvPr/>
+        </p:nvSpPr>
+        <p:spPr>
+          <a:xfrm>
+            <a:off x="502920" y="5166360"/>
             <a:ext cx="2834640" cy="731520"/>
           </a:xfrm>
           <a:prstGeom prst="rect">
@@ -6724,7 +7093,7 @@
             <a:r>
               <a:rPr lang="en-US" sz="1500" b="1" dirty="0">
                 <a:solidFill>
-                  <a:srgbClr val="211B10"/>
+                  <a:srgbClr val="0F172A"/>
                 </a:solidFill>
                 <a:latin typeface="Consolas" pitchFamily="34" charset="0"/>
                 <a:ea typeface="Consolas" pitchFamily="34" charset="-122"/>
@@ -6738,13 +7107,13 @@
       </p:sp>
       <p:sp>
         <p:nvSpPr>
-          <p:cNvPr id="16" name="Text 14"/>
-          <p:cNvSpPr/>
-          <p:nvPr/>
-        </p:nvSpPr>
-        <p:spPr>
-          <a:xfrm>
-            <a:off x="3566160" y="5202936"/>
+          <p:cNvPr id="17" name="Text 15"/>
+          <p:cNvSpPr/>
+          <p:nvPr/>
+        </p:nvSpPr>
+        <p:spPr>
+          <a:xfrm>
+            <a:off x="3566160" y="5184648"/>
             <a:ext cx="8138160" cy="822960"/>
           </a:xfrm>
           <a:prstGeom prst="rect">
@@ -6763,11 +7132,11 @@
             <a:r>
               <a:rPr lang="en-US" sz="1350" dirty="0">
                 <a:solidFill>
-                  <a:srgbClr val="5C5340"/>
-                </a:solidFill>
-                <a:latin typeface="Georgia" pitchFamily="34" charset="0"/>
-                <a:ea typeface="Georgia" pitchFamily="34" charset="-122"/>
-                <a:cs typeface="Georgia" pitchFamily="34" charset="-120"/>
+                  <a:srgbClr val="334155"/>
+                </a:solidFill>
+                <a:latin typeface="Inter" pitchFamily="34" charset="0"/>
+                <a:ea typeface="Inter" pitchFamily="34" charset="-122"/>
+                <a:cs typeface="Inter" pitchFamily="34" charset="-120"/>
               </a:rPr>
               <a:t>Recording embedded, judgment-proof: every claim is a clickable transaction.</a:t>
             </a:r>
@@ -6777,13 +7146,13 @@
       </p:sp>
       <p:sp>
         <p:nvSpPr>
-          <p:cNvPr id="17" name="Text 15"/>
+          <p:cNvPr id="18" name="Text 16"/>
           <p:cNvSpPr/>
           <p:nvPr/>
         </p:nvSpPr>
         <p:spPr>
           <a:xfrm rot="180000">
-            <a:off x="8778240" y="411480"/>
+            <a:off x="8778240" y="457200"/>
             <a:ext cx="2926080" cy="457200"/>
           </a:xfrm>
           <a:prstGeom prst="rect">
@@ -6796,7 +7165,7 @@
           </a:solidFill>
           <a:ln w="22225">
             <a:solidFill>
-              <a:srgbClr val="8A7F6C"/>
+              <a:srgbClr val="64748B"/>
             </a:solidFill>
           </a:ln>
         </p:spPr>
@@ -6810,7 +7179,7 @@
             <a:r>
               <a:rPr lang="en-US" sz="1300" b="1" spc="300" kern="0" dirty="0">
                 <a:solidFill>
-                  <a:srgbClr val="8A7F6C"/>
+                  <a:srgbClr val="64748B"/>
                 </a:solidFill>
                 <a:latin typeface="Consolas" pitchFamily="34" charset="0"/>
                 <a:ea typeface="Consolas" pitchFamily="34" charset="-122"/>
@@ -6824,7 +7193,7 @@
       </p:sp>
       <p:sp>
         <p:nvSpPr>
-          <p:cNvPr id="18" name="Text 16"/>
+          <p:cNvPr id="19" name="Text 17"/>
           <p:cNvSpPr/>
           <p:nvPr/>
         </p:nvSpPr>
@@ -6849,7 +7218,7 @@
             <a:r>
               <a:rPr lang="en-US" sz="1150" dirty="0">
                 <a:solidFill>
-                  <a:srgbClr val="8A7F6C"/>
+                  <a:srgbClr val="64748B"/>
                 </a:solidFill>
                 <a:latin typeface="Consolas" pitchFamily="34" charset="0"/>
                 <a:ea typeface="Consolas" pitchFamily="34" charset="-122"/>
@@ -6875,7 +7244,7 @@
     <p:bg>
       <p:bgPr>
         <a:solidFill>
-          <a:srgbClr val="171208"/>
+          <a:srgbClr val="0B1A2F"/>
         </a:solidFill>
       </p:bgPr>
     </p:bg>
@@ -6901,8 +7270,8 @@
         </p:nvSpPr>
         <p:spPr>
           <a:xfrm>
-            <a:off x="502920" y="1463040"/>
-            <a:ext cx="10058400" cy="2377440"/>
+            <a:off x="502920" y="1554480"/>
+            <a:ext cx="7315200" cy="274320"/>
           </a:xfrm>
           <a:prstGeom prst="rect">
             <a:avLst/>
@@ -6915,75 +7284,133 @@
           <a:lstStyle/>
           <a:p>
             <a:pPr indent="0" marL="0">
+              <a:buNone/>
+            </a:pPr>
+            <a:r>
+              <a:rPr lang="en-US" sz="1150" b="1" spc="400" kern="0" dirty="0">
+                <a:solidFill>
+                  <a:srgbClr val="00C2A8"/>
+                </a:solidFill>
+                <a:latin typeface="Consolas" pitchFamily="34" charset="0"/>
+                <a:ea typeface="Consolas" pitchFamily="34" charset="-122"/>
+                <a:cs typeface="Consolas" pitchFamily="34" charset="-120"/>
+              </a:rPr>
+              <a:t>LEASHED AGENT PLATFORM</a:t>
+            </a:r>
+            <a:endParaRPr lang="en-US" sz="1150" dirty="0"/>
+          </a:p>
+        </p:txBody>
+      </p:sp>
+      <p:sp>
+        <p:nvSpPr>
+          <p:cNvPr id="3" name="Text 1"/>
+          <p:cNvSpPr/>
+          <p:nvPr/>
+        </p:nvSpPr>
+        <p:spPr>
+          <a:xfrm>
+            <a:off x="502920" y="1828800"/>
+            <a:ext cx="10058400" cy="2194560"/>
+          </a:xfrm>
+          <a:prstGeom prst="rect">
+            <a:avLst/>
+          </a:prstGeom>
+          <a:noFill/>
+          <a:ln/>
+        </p:spPr>
+        <p:txBody>
+          <a:bodyPr wrap="square" rtlCol="0" anchor="ctr"/>
+          <a:lstStyle/>
+          <a:p>
+            <a:pPr indent="0" marL="0">
               <a:lnSpc>
-                <a:spcPts val="5600"/>
+                <a:spcPts val="6400"/>
               </a:lnSpc>
               <a:buNone/>
             </a:pPr>
             <a:r>
-              <a:rPr lang="en-US" sz="4000" b="1" dirty="0">
-                <a:solidFill>
-                  <a:srgbClr val="F1EBDE"/>
-                </a:solidFill>
-                <a:latin typeface="Georgia" pitchFamily="34" charset="0"/>
-                <a:ea typeface="Georgia" pitchFamily="34" charset="-122"/>
-                <a:cs typeface="Georgia" pitchFamily="34" charset="-120"/>
-              </a:rPr>
-              <a:t>Fund it with a QR.</a:t>
-            </a:r>
-            <a:endParaRPr lang="en-US" sz="4000" dirty="0"/>
+              <a:rPr lang="en-US" sz="5600" b="1" dirty="0">
+                <a:solidFill>
+                  <a:srgbClr val="F4F7FB"/>
+                </a:solidFill>
+                <a:latin typeface="Inter" pitchFamily="34" charset="0"/>
+                <a:ea typeface="Inter" pitchFamily="34" charset="-122"/>
+                <a:cs typeface="Inter" pitchFamily="34" charset="-120"/>
+              </a:rPr>
+              <a:t>The trust layer</a:t>
+            </a:r>
+            <a:endParaRPr lang="en-US" sz="5600" dirty="0"/>
           </a:p>
           <a:p>
             <a:pPr indent="0" marL="0">
               <a:lnSpc>
-                <a:spcPts val="5600"/>
+                <a:spcPts val="6400"/>
               </a:lnSpc>
               <a:buNone/>
             </a:pPr>
             <a:r>
-              <a:rPr lang="en-US" sz="4000" b="1" dirty="0">
-                <a:solidFill>
-                  <a:srgbClr val="F1EBDE"/>
-                </a:solidFill>
-                <a:latin typeface="Georgia" pitchFamily="34" charset="0"/>
-                <a:ea typeface="Georgia" pitchFamily="34" charset="-122"/>
-                <a:cs typeface="Georgia" pitchFamily="34" charset="-120"/>
-              </a:rPr>
-              <a:t>Leash it on-chain.</a:t>
-            </a:r>
-            <a:endParaRPr lang="en-US" sz="4000" dirty="0"/>
-          </a:p>
-          <a:p>
-            <a:pPr indent="0" marL="0">
-              <a:lnSpc>
-                <a:spcPts val="5600"/>
-              </a:lnSpc>
-              <a:buNone/>
-            </a:pPr>
-            <a:r>
-              <a:rPr lang="en-US" sz="4000" b="1" dirty="0">
-                <a:solidFill>
-                  <a:srgbClr val="F1EBDE"/>
-                </a:solidFill>
-                <a:latin typeface="Georgia" pitchFamily="34" charset="0"/>
-                <a:ea typeface="Georgia" pitchFamily="34" charset="-122"/>
-                <a:cs typeface="Georgia" pitchFamily="34" charset="-120"/>
-              </a:rPr>
-              <a:t>Audit it with Chainlink.</a:t>
-            </a:r>
-            <a:endParaRPr lang="en-US" sz="4000" dirty="0"/>
-          </a:p>
-        </p:txBody>
-      </p:sp>
-      <p:sp>
-        <p:nvSpPr>
-          <p:cNvPr id="3" name="Shape 1"/>
-          <p:cNvSpPr/>
-          <p:nvPr/>
-        </p:nvSpPr>
-        <p:spPr>
-          <a:xfrm>
-            <a:off x="502920" y="4297680"/>
+              <a:rPr lang="en-US" sz="5600" b="1" dirty="0">
+                <a:solidFill>
+                  <a:srgbClr val="F4F7FB"/>
+                </a:solidFill>
+                <a:latin typeface="Inter" pitchFamily="34" charset="0"/>
+                <a:ea typeface="Inter" pitchFamily="34" charset="-122"/>
+                <a:cs typeface="Inter" pitchFamily="34" charset="-120"/>
+              </a:rPr>
+              <a:t>for AI agents.</a:t>
+            </a:r>
+            <a:endParaRPr lang="en-US" sz="5600" dirty="0"/>
+          </a:p>
+        </p:txBody>
+      </p:sp>
+      <p:sp>
+        <p:nvSpPr>
+          <p:cNvPr id="4" name="Text 2"/>
+          <p:cNvSpPr/>
+          <p:nvPr/>
+        </p:nvSpPr>
+        <p:spPr>
+          <a:xfrm>
+            <a:off x="502920" y="4114800"/>
+            <a:ext cx="10058400" cy="548640"/>
+          </a:xfrm>
+          <a:prstGeom prst="rect">
+            <a:avLst/>
+          </a:prstGeom>
+          <a:noFill/>
+          <a:ln/>
+        </p:spPr>
+        <p:txBody>
+          <a:bodyPr wrap="square" rtlCol="0" anchor="ctr"/>
+          <a:lstStyle/>
+          <a:p>
+            <a:pPr indent="0" marL="0">
+              <a:buNone/>
+            </a:pPr>
+            <a:r>
+              <a:rPr lang="en-US" sz="1800" i="1" dirty="0">
+                <a:solidFill>
+                  <a:srgbClr val="E6EDF7"/>
+                </a:solidFill>
+                <a:latin typeface="Inter" pitchFamily="34" charset="0"/>
+                <a:ea typeface="Inter" pitchFamily="34" charset="-122"/>
+                <a:cs typeface="Inter" pitchFamily="34" charset="-120"/>
+              </a:rPr>
+              <a:t>Fund with PromptPay. Leash on-chain. Audit with Chainlink CRE.</a:t>
+            </a:r>
+            <a:endParaRPr lang="en-US" sz="1800" dirty="0"/>
+          </a:p>
+        </p:txBody>
+      </p:sp>
+      <p:sp>
+        <p:nvSpPr>
+          <p:cNvPr id="5" name="Shape 3"/>
+          <p:cNvSpPr/>
+          <p:nvPr/>
+        </p:nvSpPr>
+        <p:spPr>
+          <a:xfrm>
+            <a:off x="502920" y="4800600"/>
             <a:ext cx="5029200" cy="0"/>
           </a:xfrm>
           <a:prstGeom prst="line">
@@ -6992,7 +7419,7 @@
           <a:noFill/>
           <a:ln w="19050">
             <a:solidFill>
-              <a:srgbClr val="6E5F45"/>
+              <a:srgbClr val="00C2A8"/>
             </a:solidFill>
             <a:prstDash val="solid"/>
           </a:ln>
@@ -7000,13 +7427,13 @@
       </p:sp>
       <p:sp>
         <p:nvSpPr>
-          <p:cNvPr id="4" name="Text 2"/>
-          <p:cNvSpPr/>
-          <p:nvPr/>
-        </p:nvSpPr>
-        <p:spPr>
-          <a:xfrm>
-            <a:off x="502920" y="4526280"/>
+          <p:cNvPr id="6" name="Text 4"/>
+          <p:cNvSpPr/>
+          <p:nvPr/>
+        </p:nvSpPr>
+        <p:spPr>
+          <a:xfrm>
+            <a:off x="502920" y="4983480"/>
             <a:ext cx="10058400" cy="822960"/>
           </a:xfrm>
           <a:prstGeom prst="rect">
@@ -7056,13 +7483,13 @@
       </p:sp>
       <p:sp>
         <p:nvSpPr>
-          <p:cNvPr id="5" name="Text 3"/>
+          <p:cNvPr id="7" name="Text 5"/>
           <p:cNvSpPr/>
           <p:nvPr/>
         </p:nvSpPr>
         <p:spPr>
           <a:xfrm rot="-240000">
-            <a:off x="9052560" y="5029200"/>
+            <a:off x="9052560" y="5212080"/>
             <a:ext cx="2194560" cy="457200"/>
           </a:xfrm>
           <a:prstGeom prst="rect">
@@ -7075,7 +7502,7 @@
           </a:solidFill>
           <a:ln w="22225">
             <a:solidFill>
-              <a:srgbClr val="B3372B"/>
+              <a:srgbClr val="E5484D"/>
             </a:solidFill>
           </a:ln>
         </p:spPr>
@@ -7089,7 +7516,7 @@
             <a:r>
               <a:rPr lang="en-US" sz="1300" b="1" spc="300" kern="0" dirty="0">
                 <a:solidFill>
-                  <a:srgbClr val="B3372B"/>
+                  <a:srgbClr val="E5484D"/>
                 </a:solidFill>
                 <a:latin typeface="Consolas" pitchFamily="34" charset="0"/>
                 <a:ea typeface="Consolas" pitchFamily="34" charset="-122"/>

--- a/docs/slides/leashed-agent-slides.pptx
+++ b/docs/slides/leashed-agent-slides.pptx
@@ -1569,7 +1569,7 @@
     <p:bg>
       <p:bgPr>
         <a:solidFill>
-          <a:srgbClr val="0B1A2F"/>
+          <a:srgbClr val="1F4E79"/>
         </a:solidFill>
       </p:bgPr>
     </p:bg>
@@ -1614,11 +1614,11 @@
             <a:r>
               <a:rPr lang="en-US" sz="4800" b="1" spc="200" kern="0" dirty="0">
                 <a:solidFill>
-                  <a:srgbClr val="F4F7FB"/>
-                </a:solidFill>
-                <a:latin typeface="Inter" pitchFamily="34" charset="0"/>
-                <a:ea typeface="Inter" pitchFamily="34" charset="-122"/>
-                <a:cs typeface="Inter" pitchFamily="34" charset="-120"/>
+                  <a:srgbClr val="F4F6F7"/>
+                </a:solidFill>
+                <a:latin typeface="IBM Plex Sans" pitchFamily="34" charset="0"/>
+                <a:ea typeface="IBM Plex Sans" pitchFamily="34" charset="-122"/>
+                <a:cs typeface="IBM Plex Sans" pitchFamily="34" charset="-120"/>
               </a:rPr>
               <a:t>LEASHED AGENT PLATFORM</a:t>
             </a:r>
@@ -1653,11 +1653,11 @@
             <a:r>
               <a:rPr lang="en-US" sz="1150" b="1" spc="400" kern="0" dirty="0">
                 <a:solidFill>
-                  <a:srgbClr val="00C2A8"/>
-                </a:solidFill>
-                <a:latin typeface="Consolas" pitchFamily="34" charset="0"/>
-                <a:ea typeface="Consolas" pitchFamily="34" charset="-122"/>
-                <a:cs typeface="Consolas" pitchFamily="34" charset="-120"/>
+                  <a:srgbClr val="1F4E79"/>
+                </a:solidFill>
+                <a:latin typeface="Roboto Mono" pitchFamily="34" charset="0"/>
+                <a:ea typeface="Roboto Mono" pitchFamily="34" charset="-122"/>
+                <a:cs typeface="Roboto Mono" pitchFamily="34" charset="-120"/>
               </a:rPr>
               <a:t>TRUST LAYER FOR AI AGENTS</a:t>
             </a:r>
@@ -1694,9 +1694,9 @@
                 <a:solidFill>
                   <a:srgbClr val="E6EDF7"/>
                 </a:solidFill>
-                <a:latin typeface="Inter" pitchFamily="34" charset="0"/>
-                <a:ea typeface="Inter" pitchFamily="34" charset="-122"/>
-                <a:cs typeface="Inter" pitchFamily="34" charset="-120"/>
+                <a:latin typeface="IBM Plex Sans" pitchFamily="34" charset="0"/>
+                <a:ea typeface="IBM Plex Sans" pitchFamily="34" charset="-122"/>
+                <a:cs typeface="IBM Plex Sans" pitchFamily="34" charset="-120"/>
               </a:rPr>
               <a:t>One leash, every payment, independently checked.</a:t>
             </a:r>
@@ -1733,9 +1733,9 @@
                 <a:solidFill>
                   <a:srgbClr val="8AA0BD"/>
                 </a:solidFill>
-                <a:latin typeface="Inter" pitchFamily="34" charset="0"/>
-                <a:ea typeface="Inter" pitchFamily="34" charset="-122"/>
-                <a:cs typeface="Inter" pitchFamily="34" charset="-120"/>
+                <a:latin typeface="IBM Plex Sans" pitchFamily="34" charset="0"/>
+                <a:ea typeface="IBM Plex Sans" pitchFamily="34" charset="-122"/>
+                <a:cs typeface="IBM Plex Sans" pitchFamily="34" charset="-120"/>
               </a:rPr>
               <a:t>A chain-enforced spending cap. A receipts ledger. A CRE auditor that attests the verdict on Sepolia. A fiat on-ramp via PromptPay.</a:t>
             </a:r>
@@ -1760,7 +1760,7 @@
           <a:noFill/>
           <a:ln w="19050">
             <a:solidFill>
-              <a:srgbClr val="00C2A8"/>
+              <a:srgbClr val="1F4E79"/>
             </a:solidFill>
             <a:prstDash val="solid"/>
           </a:ln>
@@ -1795,9 +1795,9 @@
                 <a:solidFill>
                   <a:srgbClr val="C9BFA8"/>
                 </a:solidFill>
-                <a:latin typeface="Consolas" pitchFamily="34" charset="0"/>
-                <a:ea typeface="Consolas" pitchFamily="34" charset="-122"/>
-                <a:cs typeface="Consolas" pitchFamily="34" charset="-120"/>
+                <a:latin typeface="Roboto Mono" pitchFamily="34" charset="0"/>
+                <a:ea typeface="Roboto Mono" pitchFamily="34" charset="-122"/>
+                <a:cs typeface="Roboto Mono" pitchFamily="34" charset="-120"/>
               </a:rPr>
               <a:t>TOKEN2049 Origins Hackathon · 6–8 Oct 2026 · Marina Bay Sands</a:t>
             </a:r>
@@ -1812,9 +1812,9 @@
                 <a:solidFill>
                   <a:srgbClr val="C9BFA8"/>
                 </a:solidFill>
-                <a:latin typeface="Consolas" pitchFamily="34" charset="0"/>
-                <a:ea typeface="Consolas" pitchFamily="34" charset="-122"/>
-                <a:cs typeface="Consolas" pitchFamily="34" charset="-120"/>
+                <a:latin typeface="Roboto Mono" pitchFamily="34" charset="0"/>
+                <a:ea typeface="Roboto Mono" pitchFamily="34" charset="-122"/>
+                <a:cs typeface="Roboto Mono" pitchFamily="34" charset="-120"/>
               </a:rPr>
               <a:t>Team Leashed — main track + Cardano · Chainlink CRE · NOWNodes</a:t>
             </a:r>
@@ -1843,7 +1843,7 @@
           </a:solidFill>
           <a:ln w="22225">
             <a:solidFill>
-              <a:srgbClr val="E5484D"/>
+              <a:srgbClr val="A93837"/>
             </a:solidFill>
           </a:ln>
         </p:spPr>
@@ -1857,11 +1857,11 @@
             <a:r>
               <a:rPr lang="en-US" sz="1300" b="1" spc="300" kern="0" dirty="0">
                 <a:solidFill>
-                  <a:srgbClr val="E5484D"/>
-                </a:solidFill>
-                <a:latin typeface="Consolas" pitchFamily="34" charset="0"/>
-                <a:ea typeface="Consolas" pitchFamily="34" charset="-122"/>
-                <a:cs typeface="Consolas" pitchFamily="34" charset="-120"/>
+                  <a:srgbClr val="A93837"/>
+                </a:solidFill>
+                <a:latin typeface="Roboto Mono" pitchFamily="34" charset="0"/>
+                <a:ea typeface="Roboto Mono" pitchFamily="34" charset="-122"/>
+                <a:cs typeface="Roboto Mono" pitchFamily="34" charset="-120"/>
               </a:rPr>
               <a:t>EVERY PAYMENT ON-CHAIN</a:t>
             </a:r>
@@ -1898,9 +1898,9 @@
                 <a:solidFill>
                   <a:srgbClr val="8AA0BD"/>
                 </a:solidFill>
-                <a:latin typeface="Consolas" pitchFamily="34" charset="0"/>
-                <a:ea typeface="Consolas" pitchFamily="34" charset="-122"/>
-                <a:cs typeface="Consolas" pitchFamily="34" charset="-120"/>
+                <a:latin typeface="Roboto Mono" pitchFamily="34" charset="0"/>
+                <a:ea typeface="Roboto Mono" pitchFamily="34" charset="-122"/>
+                <a:cs typeface="Roboto Mono" pitchFamily="34" charset="-120"/>
               </a:rPr>
               <a:t>the poster on slide 5 was bought by the agent · every line of code written during the 36h sprint</a:t>
             </a:r>
@@ -1922,7 +1922,7 @@
     <p:bg>
       <p:bgPr>
         <a:solidFill>
-          <a:srgbClr val="F4F7FB"/>
+          <a:srgbClr val="F4F6F7"/>
         </a:solidFill>
       </p:bgPr>
     </p:bg>
@@ -1967,11 +1967,11 @@
             <a:r>
               <a:rPr lang="en-US" sz="1150" b="1" spc="400" kern="0" dirty="0">
                 <a:solidFill>
-                  <a:srgbClr val="00C2A8"/>
-                </a:solidFill>
-                <a:latin typeface="Consolas" pitchFamily="34" charset="0"/>
-                <a:ea typeface="Consolas" pitchFamily="34" charset="-122"/>
-                <a:cs typeface="Consolas" pitchFamily="34" charset="-120"/>
+                  <a:srgbClr val="1F4E79"/>
+                </a:solidFill>
+                <a:latin typeface="Roboto Mono" pitchFamily="34" charset="0"/>
+                <a:ea typeface="Roboto Mono" pitchFamily="34" charset="-122"/>
+                <a:cs typeface="Roboto Mono" pitchFamily="34" charset="-120"/>
               </a:rPr>
               <a:t>POSITIONING · TRUST LAYER FOR AI AGENTS</a:t>
             </a:r>
@@ -2009,11 +2009,11 @@
             <a:r>
               <a:rPr lang="en-US" sz="3600" b="1" dirty="0">
                 <a:solidFill>
-                  <a:srgbClr val="0F172A"/>
-                </a:solidFill>
-                <a:latin typeface="Inter" pitchFamily="34" charset="0"/>
-                <a:ea typeface="Inter" pitchFamily="34" charset="-122"/>
-                <a:cs typeface="Inter" pitchFamily="34" charset="-120"/>
+                  <a:srgbClr val="1B2C3E"/>
+                </a:solidFill>
+                <a:latin typeface="IBM Plex Sans" pitchFamily="34" charset="0"/>
+                <a:ea typeface="IBM Plex Sans" pitchFamily="34" charset="-122"/>
+                <a:cs typeface="IBM Plex Sans" pitchFamily="34" charset="-120"/>
               </a:rPr>
               <a:t>AI agents already spend money.</a:t>
             </a:r>
@@ -2029,11 +2029,11 @@
             <a:r>
               <a:rPr lang="en-US" sz="3600" b="1" dirty="0">
                 <a:solidFill>
-                  <a:srgbClr val="0F172A"/>
-                </a:solidFill>
-                <a:latin typeface="Inter" pitchFamily="34" charset="0"/>
-                <a:ea typeface="Inter" pitchFamily="34" charset="-122"/>
-                <a:cs typeface="Inter" pitchFamily="34" charset="-120"/>
+                  <a:srgbClr val="1B2C3E"/>
+                </a:solidFill>
+                <a:latin typeface="IBM Plex Sans" pitchFamily="34" charset="0"/>
+                <a:ea typeface="IBM Plex Sans" pitchFamily="34" charset="-122"/>
+                <a:cs typeface="IBM Plex Sans" pitchFamily="34" charset="-120"/>
               </a:rPr>
               <a:t>Nobody is holding the leash.</a:t>
             </a:r>
@@ -2068,11 +2068,11 @@
             <a:r>
               <a:rPr lang="en-US" sz="1800" b="1" dirty="0">
                 <a:solidFill>
-                  <a:srgbClr val="0F172A"/>
-                </a:solidFill>
-                <a:latin typeface="Inter" pitchFamily="34" charset="0"/>
-                <a:ea typeface="Inter" pitchFamily="34" charset="-122"/>
-                <a:cs typeface="Inter" pitchFamily="34" charset="-120"/>
+                  <a:srgbClr val="1B2C3E"/>
+                </a:solidFill>
+                <a:latin typeface="IBM Plex Sans" pitchFamily="34" charset="0"/>
+                <a:ea typeface="IBM Plex Sans" pitchFamily="34" charset="-122"/>
+                <a:cs typeface="IBM Plex Sans" pitchFamily="34" charset="-120"/>
               </a:rPr>
               <a:t>No enforced budgets</a:t>
             </a:r>
@@ -2109,9 +2109,9 @@
                 <a:solidFill>
                   <a:srgbClr val="334155"/>
                 </a:solidFill>
-                <a:latin typeface="Inter" pitchFamily="34" charset="0"/>
-                <a:ea typeface="Inter" pitchFamily="34" charset="-122"/>
-                <a:cs typeface="Inter" pitchFamily="34" charset="-120"/>
+                <a:latin typeface="IBM Plex Sans" pitchFamily="34" charset="0"/>
+                <a:ea typeface="IBM Plex Sans" pitchFamily="34" charset="-122"/>
+                <a:cs typeface="IBM Plex Sans" pitchFamily="34" charset="-120"/>
               </a:rPr>
               <a:t>x402 agents pay per call with whatever the key holds — spending caps live in app code, not the chain</a:t>
             </a:r>
@@ -2169,11 +2169,11 @@
             <a:r>
               <a:rPr lang="en-US" sz="1800" b="1" dirty="0">
                 <a:solidFill>
-                  <a:srgbClr val="0F172A"/>
-                </a:solidFill>
-                <a:latin typeface="Inter" pitchFamily="34" charset="0"/>
-                <a:ea typeface="Inter" pitchFamily="34" charset="-122"/>
-                <a:cs typeface="Inter" pitchFamily="34" charset="-120"/>
+                  <a:srgbClr val="1B2C3E"/>
+                </a:solidFill>
+                <a:latin typeface="IBM Plex Sans" pitchFamily="34" charset="0"/>
+                <a:ea typeface="IBM Plex Sans" pitchFamily="34" charset="-122"/>
+                <a:cs typeface="IBM Plex Sans" pitchFamily="34" charset="-120"/>
               </a:rPr>
               <a:t>No receipts</a:t>
             </a:r>
@@ -2210,9 +2210,9 @@
                 <a:solidFill>
                   <a:srgbClr val="334155"/>
                 </a:solidFill>
-                <a:latin typeface="Inter" pitchFamily="34" charset="0"/>
-                <a:ea typeface="Inter" pitchFamily="34" charset="-122"/>
-                <a:cs typeface="Inter" pitchFamily="34" charset="-120"/>
+                <a:latin typeface="IBM Plex Sans" pitchFamily="34" charset="0"/>
+                <a:ea typeface="IBM Plex Sans" pitchFamily="34" charset="-122"/>
+                <a:cs typeface="IBM Plex Sans" pitchFamily="34" charset="-120"/>
               </a:rPr>
               <a:t>once the API call returns, the payment evidence is scattered across explorers, if it exists at all</a:t>
             </a:r>
@@ -2270,11 +2270,11 @@
             <a:r>
               <a:rPr lang="en-US" sz="1800" b="1" dirty="0">
                 <a:solidFill>
-                  <a:srgbClr val="0F172A"/>
-                </a:solidFill>
-                <a:latin typeface="Inter" pitchFamily="34" charset="0"/>
-                <a:ea typeface="Inter" pitchFamily="34" charset="-122"/>
-                <a:cs typeface="Inter" pitchFamily="34" charset="-120"/>
+                  <a:srgbClr val="1B2C3E"/>
+                </a:solidFill>
+                <a:latin typeface="IBM Plex Sans" pitchFamily="34" charset="0"/>
+                <a:ea typeface="IBM Plex Sans" pitchFamily="34" charset="-122"/>
+                <a:cs typeface="IBM Plex Sans" pitchFamily="34" charset="-120"/>
               </a:rPr>
               <a:t>No independent audit</a:t>
             </a:r>
@@ -2311,9 +2311,9 @@
                 <a:solidFill>
                   <a:srgbClr val="334155"/>
                 </a:solidFill>
-                <a:latin typeface="Inter" pitchFamily="34" charset="0"/>
-                <a:ea typeface="Inter" pitchFamily="34" charset="-122"/>
-                <a:cs typeface="Inter" pitchFamily="34" charset="-120"/>
+                <a:latin typeface="IBM Plex Sans" pitchFamily="34" charset="0"/>
+                <a:ea typeface="IBM Plex Sans" pitchFamily="34" charset="-122"/>
+                <a:cs typeface="IBM Plex Sans" pitchFamily="34" charset="-120"/>
               </a:rPr>
               <a:t>the agent's operator grades its own homework — there is no third party vouching for the books</a:t>
             </a:r>
@@ -2371,11 +2371,11 @@
             <a:r>
               <a:rPr lang="en-US" sz="1800" b="1" dirty="0">
                 <a:solidFill>
-                  <a:srgbClr val="0F172A"/>
-                </a:solidFill>
-                <a:latin typeface="Inter" pitchFamily="34" charset="0"/>
-                <a:ea typeface="Inter" pitchFamily="34" charset="-122"/>
-                <a:cs typeface="Inter" pitchFamily="34" charset="-120"/>
+                  <a:srgbClr val="1B2C3E"/>
+                </a:solidFill>
+                <a:latin typeface="IBM Plex Sans" pitchFamily="34" charset="0"/>
+                <a:ea typeface="IBM Plex Sans" pitchFamily="34" charset="-122"/>
+                <a:cs typeface="IBM Plex Sans" pitchFamily="34" charset="-120"/>
               </a:rPr>
               <a:t>No fiat on-ramp</a:t>
             </a:r>
@@ -2412,9 +2412,9 @@
                 <a:solidFill>
                   <a:srgbClr val="334155"/>
                 </a:solidFill>
-                <a:latin typeface="Inter" pitchFamily="34" charset="0"/>
-                <a:ea typeface="Inter" pitchFamily="34" charset="-122"/>
-                <a:cs typeface="Inter" pitchFamily="34" charset="-120"/>
+                <a:latin typeface="IBM Plex Sans" pitchFamily="34" charset="0"/>
+                <a:ea typeface="IBM Plex Sans" pitchFamily="34" charset="-122"/>
+                <a:cs typeface="IBM Plex Sans" pitchFamily="34" charset="-120"/>
               </a:rPr>
               <a:t>a Thai shop owner cannot top up an agent from a bank app today</a:t>
             </a:r>
@@ -2443,7 +2443,7 @@
           </a:solidFill>
           <a:ln w="22225">
             <a:solidFill>
-              <a:srgbClr val="E5484D"/>
+              <a:srgbClr val="A93837"/>
             </a:solidFill>
           </a:ln>
         </p:spPr>
@@ -2457,11 +2457,11 @@
             <a:r>
               <a:rPr lang="en-US" sz="1300" b="1" spc="300" kern="0" dirty="0">
                 <a:solidFill>
-                  <a:srgbClr val="E5484D"/>
-                </a:solidFill>
-                <a:latin typeface="Consolas" pitchFamily="34" charset="0"/>
-                <a:ea typeface="Consolas" pitchFamily="34" charset="-122"/>
-                <a:cs typeface="Consolas" pitchFamily="34" charset="-120"/>
+                  <a:srgbClr val="A93837"/>
+                </a:solidFill>
+                <a:latin typeface="Roboto Mono" pitchFamily="34" charset="0"/>
+                <a:ea typeface="Roboto Mono" pitchFamily="34" charset="-122"/>
+                <a:cs typeface="Roboto Mono" pitchFamily="34" charset="-120"/>
               </a:rPr>
               <a:t>THE TRUST LAYER IS MISSING</a:t>
             </a:r>
@@ -2496,11 +2496,11 @@
             <a:r>
               <a:rPr lang="en-US" sz="1150" dirty="0">
                 <a:solidFill>
-                  <a:srgbClr val="64748B"/>
-                </a:solidFill>
-                <a:latin typeface="Consolas" pitchFamily="34" charset="0"/>
-                <a:ea typeface="Consolas" pitchFamily="34" charset="-122"/>
-                <a:cs typeface="Consolas" pitchFamily="34" charset="-120"/>
+                  <a:srgbClr val="5A6A7E"/>
+                </a:solidFill>
+                <a:latin typeface="Roboto Mono" pitchFamily="34" charset="0"/>
+                <a:ea typeface="Roboto Mono" pitchFamily="34" charset="-122"/>
+                <a:cs typeface="Roboto Mono" pitchFamily="34" charset="-120"/>
               </a:rPr>
               <a:t>x402 Foundation stats — 75.4M txs but only $24.2M volume in 30 days (Aug 2026): micropayments dominate, oversight does not exist.</a:t>
             </a:r>
@@ -2522,7 +2522,7 @@
     <p:bg>
       <p:bgPr>
         <a:solidFill>
-          <a:srgbClr val="F4F7FB"/>
+          <a:srgbClr val="F4F6F7"/>
         </a:solidFill>
       </p:bgPr>
     </p:bg>
@@ -2567,11 +2567,11 @@
             <a:r>
               <a:rPr lang="en-US" sz="1150" b="1" spc="400" kern="0" dirty="0">
                 <a:solidFill>
-                  <a:srgbClr val="00C2A8"/>
-                </a:solidFill>
-                <a:latin typeface="Consolas" pitchFamily="34" charset="0"/>
-                <a:ea typeface="Consolas" pitchFamily="34" charset="-122"/>
-                <a:cs typeface="Consolas" pitchFamily="34" charset="-120"/>
+                  <a:srgbClr val="1F4E79"/>
+                </a:solidFill>
+                <a:latin typeface="Roboto Mono" pitchFamily="34" charset="0"/>
+                <a:ea typeface="Roboto Mono" pitchFamily="34" charset="-122"/>
+                <a:cs typeface="Roboto Mono" pitchFamily="34" charset="-120"/>
               </a:rPr>
               <a:t>SOLUTION · THE FOUR PIECES</a:t>
             </a:r>
@@ -2606,11 +2606,11 @@
             <a:r>
               <a:rPr lang="en-US" sz="3200" b="1" dirty="0">
                 <a:solidFill>
-                  <a:srgbClr val="0F172A"/>
-                </a:solidFill>
-                <a:latin typeface="Inter" pitchFamily="34" charset="0"/>
-                <a:ea typeface="Inter" pitchFamily="34" charset="-122"/>
-                <a:cs typeface="Inter" pitchFamily="34" charset="-120"/>
+                  <a:srgbClr val="1B2C3E"/>
+                </a:solidFill>
+                <a:latin typeface="IBM Plex Sans" pitchFamily="34" charset="0"/>
+                <a:ea typeface="IBM Plex Sans" pitchFamily="34" charset="-122"/>
+                <a:cs typeface="IBM Plex Sans" pitchFamily="34" charset="-120"/>
               </a:rPr>
               <a:t>Leash · Receipts · Audit · Funding</a:t>
             </a:r>
@@ -2647,9 +2647,9 @@
                 <a:solidFill>
                   <a:srgbClr val="334155"/>
                 </a:solidFill>
-                <a:latin typeface="Inter" pitchFamily="34" charset="0"/>
-                <a:ea typeface="Inter" pitchFamily="34" charset="-122"/>
-                <a:cs typeface="Inter" pitchFamily="34" charset="-120"/>
+                <a:latin typeface="IBM Plex Sans" pitchFamily="34" charset="0"/>
+                <a:ea typeface="IBM Plex Sans" pitchFamily="34" charset="-122"/>
+                <a:cs typeface="IBM Plex Sans" pitchFamily="34" charset="-120"/>
               </a:rPr>
               <a:t>The Leashed Agent Platform is the trust layer that holds an AI agent to four chain-enforced promises:</a:t>
             </a:r>
@@ -2676,7 +2676,7 @@
           </a:solidFill>
           <a:ln w="19050">
             <a:solidFill>
-              <a:srgbClr val="00C2A8"/>
+              <a:srgbClr val="1F4E79"/>
             </a:solidFill>
             <a:prstDash val="solid"/>
           </a:ln>
@@ -2716,11 +2716,11 @@
             <a:r>
               <a:rPr lang="en-US" sz="1600" b="1" spc="300" kern="0" dirty="0">
                 <a:solidFill>
-                  <a:srgbClr val="00C2A8"/>
-                </a:solidFill>
-                <a:latin typeface="Consolas" pitchFamily="34" charset="0"/>
-                <a:ea typeface="Consolas" pitchFamily="34" charset="-122"/>
-                <a:cs typeface="Consolas" pitchFamily="34" charset="-120"/>
+                  <a:srgbClr val="1F4E79"/>
+                </a:solidFill>
+                <a:latin typeface="Roboto Mono" pitchFamily="34" charset="0"/>
+                <a:ea typeface="Roboto Mono" pitchFamily="34" charset="-122"/>
+                <a:cs typeface="Roboto Mono" pitchFamily="34" charset="-120"/>
               </a:rPr>
               <a:t>LEASH</a:t>
             </a:r>
@@ -2780,9 +2780,9 @@
                 <a:solidFill>
                   <a:srgbClr val="334155"/>
                 </a:solidFill>
-                <a:latin typeface="Inter" pitchFamily="34" charset="0"/>
-                <a:ea typeface="Inter" pitchFamily="34" charset="-122"/>
-                <a:cs typeface="Inter" pitchFamily="34" charset="-120"/>
+                <a:latin typeface="IBM Plex Sans" pitchFamily="34" charset="0"/>
+                <a:ea typeface="IBM Plex Sans" pitchFamily="34" charset="-122"/>
+                <a:cs typeface="IBM Plex Sans" pitchFamily="34" charset="-120"/>
               </a:rPr>
               <a:t>Spending cap set by the human and enforced by the ThaiFi chain itself (AccountKeychain, TIP-1011). Revocation is instant and on-chain.</a:t>
             </a:r>
@@ -2809,7 +2809,7 @@
           </a:solidFill>
           <a:ln w="19050">
             <a:solidFill>
-              <a:srgbClr val="0F172A"/>
+              <a:srgbClr val="1B2C3E"/>
             </a:solidFill>
             <a:prstDash val="solid"/>
           </a:ln>
@@ -2849,11 +2849,11 @@
             <a:r>
               <a:rPr lang="en-US" sz="1600" b="1" spc="300" kern="0" dirty="0">
                 <a:solidFill>
-                  <a:srgbClr val="0F172A"/>
-                </a:solidFill>
-                <a:latin typeface="Consolas" pitchFamily="34" charset="0"/>
-                <a:ea typeface="Consolas" pitchFamily="34" charset="-122"/>
-                <a:cs typeface="Consolas" pitchFamily="34" charset="-120"/>
+                  <a:srgbClr val="1B2C3E"/>
+                </a:solidFill>
+                <a:latin typeface="Roboto Mono" pitchFamily="34" charset="0"/>
+                <a:ea typeface="Roboto Mono" pitchFamily="34" charset="-122"/>
+                <a:cs typeface="Roboto Mono" pitchFamily="34" charset="-120"/>
               </a:rPr>
               <a:t>RECEIPTS</a:t>
             </a:r>
@@ -2913,9 +2913,9 @@
                 <a:solidFill>
                   <a:srgbClr val="334155"/>
                 </a:solidFill>
-                <a:latin typeface="Inter" pitchFamily="34" charset="0"/>
-                <a:ea typeface="Inter" pitchFamily="34" charset="-122"/>
-                <a:cs typeface="Inter" pitchFamily="34" charset="-120"/>
+                <a:latin typeface="IBM Plex Sans" pitchFamily="34" charset="0"/>
+                <a:ea typeface="IBM Plex Sans" pitchFamily="34" charset="-122"/>
+                <a:cs typeface="IBM Plex Sans" pitchFamily="34" charset="-120"/>
               </a:rPr>
               <a:t>Every payment on every rail becomes one ledger entry — amount, purpose, explorer link — readable like a bank passbook.</a:t>
             </a:r>
@@ -2942,7 +2942,7 @@
           </a:solidFill>
           <a:ln w="19050">
             <a:solidFill>
-              <a:srgbClr val="00C2A8"/>
+              <a:srgbClr val="1F4E79"/>
             </a:solidFill>
             <a:prstDash val="solid"/>
           </a:ln>
@@ -2982,11 +2982,11 @@
             <a:r>
               <a:rPr lang="en-US" sz="1600" b="1" spc="300" kern="0" dirty="0">
                 <a:solidFill>
-                  <a:srgbClr val="00C2A8"/>
-                </a:solidFill>
-                <a:latin typeface="Consolas" pitchFamily="34" charset="0"/>
-                <a:ea typeface="Consolas" pitchFamily="34" charset="-122"/>
-                <a:cs typeface="Consolas" pitchFamily="34" charset="-120"/>
+                  <a:srgbClr val="1F4E79"/>
+                </a:solidFill>
+                <a:latin typeface="Roboto Mono" pitchFamily="34" charset="0"/>
+                <a:ea typeface="Roboto Mono" pitchFamily="34" charset="-122"/>
+                <a:cs typeface="Roboto Mono" pitchFamily="34" charset="-120"/>
               </a:rPr>
               <a:t>AUDIT</a:t>
             </a:r>
@@ -3046,9 +3046,9 @@
                 <a:solidFill>
                   <a:srgbClr val="334155"/>
                 </a:solidFill>
-                <a:latin typeface="Inter" pitchFamily="34" charset="0"/>
-                <a:ea typeface="Inter" pitchFamily="34" charset="-122"/>
-                <a:cs typeface="Inter" pitchFamily="34" charset="-120"/>
+                <a:latin typeface="IBM Plex Sans" pitchFamily="34" charset="0"/>
+                <a:ea typeface="IBM Plex Sans" pitchFamily="34" charset="-122"/>
+                <a:cs typeface="IBM Plex Sans" pitchFamily="34" charset="-120"/>
               </a:rPr>
               <a:t>A Chainlink CRE workflow re-checks the whole ledger and attests the verdict on-chain. Neither the agent nor we can forge it.</a:t>
             </a:r>
@@ -3075,7 +3075,7 @@
           </a:solidFill>
           <a:ln w="19050">
             <a:solidFill>
-              <a:srgbClr val="0F172A"/>
+              <a:srgbClr val="1B2C3E"/>
             </a:solidFill>
             <a:prstDash val="solid"/>
           </a:ln>
@@ -3115,11 +3115,11 @@
             <a:r>
               <a:rPr lang="en-US" sz="1600" b="1" spc="300" kern="0" dirty="0">
                 <a:solidFill>
-                  <a:srgbClr val="0F172A"/>
-                </a:solidFill>
-                <a:latin typeface="Consolas" pitchFamily="34" charset="0"/>
-                <a:ea typeface="Consolas" pitchFamily="34" charset="-122"/>
-                <a:cs typeface="Consolas" pitchFamily="34" charset="-120"/>
+                  <a:srgbClr val="1B2C3E"/>
+                </a:solidFill>
+                <a:latin typeface="Roboto Mono" pitchFamily="34" charset="0"/>
+                <a:ea typeface="Roboto Mono" pitchFamily="34" charset="-122"/>
+                <a:cs typeface="Roboto Mono" pitchFamily="34" charset="-120"/>
               </a:rPr>
               <a:t>FUNDING</a:t>
             </a:r>
@@ -3179,9 +3179,9 @@
                 <a:solidFill>
                   <a:srgbClr val="334155"/>
                 </a:solidFill>
-                <a:latin typeface="Inter" pitchFamily="34" charset="0"/>
-                <a:ea typeface="Inter" pitchFamily="34" charset="-122"/>
-                <a:cs typeface="Inter" pitchFamily="34" charset="-120"/>
+                <a:latin typeface="IBM Plex Sans" pitchFamily="34" charset="0"/>
+                <a:ea typeface="IBM Plex Sans" pitchFamily="34" charset="-122"/>
+                <a:cs typeface="IBM Plex Sans" pitchFamily="34" charset="-120"/>
               </a:rPr>
               <a:t>Budget runs low → the agent shows a PromptPay QR → 1 THB = 1 THCFI, straight from any Thai banking app.</a:t>
             </a:r>
@@ -3210,7 +3210,7 @@
           </a:solidFill>
           <a:ln w="22225">
             <a:solidFill>
-              <a:srgbClr val="E5484D"/>
+              <a:srgbClr val="A93837"/>
             </a:solidFill>
           </a:ln>
         </p:spPr>
@@ -3224,11 +3224,11 @@
             <a:r>
               <a:rPr lang="en-US" sz="1300" b="1" spc="300" kern="0" dirty="0">
                 <a:solidFill>
-                  <a:srgbClr val="E5484D"/>
-                </a:solidFill>
-                <a:latin typeface="Consolas" pitchFamily="34" charset="0"/>
-                <a:ea typeface="Consolas" pitchFamily="34" charset="-122"/>
-                <a:cs typeface="Consolas" pitchFamily="34" charset="-120"/>
+                  <a:srgbClr val="A93837"/>
+                </a:solidFill>
+                <a:latin typeface="Roboto Mono" pitchFamily="34" charset="0"/>
+                <a:ea typeface="Roboto Mono" pitchFamily="34" charset="-122"/>
+                <a:cs typeface="Roboto Mono" pitchFamily="34" charset="-120"/>
               </a:rPr>
               <a:t>IT ALREADY WORKS</a:t>
             </a:r>
@@ -3250,7 +3250,7 @@
     <p:bg>
       <p:bgPr>
         <a:solidFill>
-          <a:srgbClr val="F4F7FB"/>
+          <a:srgbClr val="F4F6F7"/>
         </a:solidFill>
       </p:bgPr>
     </p:bg>
@@ -3295,11 +3295,11 @@
             <a:r>
               <a:rPr lang="en-US" sz="3200" b="1" dirty="0">
                 <a:solidFill>
-                  <a:srgbClr val="0F172A"/>
-                </a:solidFill>
-                <a:latin typeface="Inter" pitchFamily="34" charset="0"/>
-                <a:ea typeface="Inter" pitchFamily="34" charset="-122"/>
-                <a:cs typeface="Inter" pitchFamily="34" charset="-120"/>
+                  <a:srgbClr val="1B2C3E"/>
+                </a:solidFill>
+                <a:latin typeface="IBM Plex Sans" pitchFamily="34" charset="0"/>
+                <a:ea typeface="IBM Plex Sans" pitchFamily="34" charset="-122"/>
+                <a:cs typeface="IBM Plex Sans" pitchFamily="34" charset="-120"/>
               </a:rPr>
               <a:t>One agent, two payment rails, one independent auditor</a:t>
             </a:r>
@@ -3326,7 +3326,7 @@
           </a:solidFill>
           <a:ln w="19050">
             <a:solidFill>
-              <a:srgbClr val="0F172A"/>
+              <a:srgbClr val="1B2C3E"/>
             </a:solidFill>
             <a:prstDash val="solid"/>
           </a:ln>
@@ -3359,11 +3359,11 @@
             <a:r>
               <a:rPr lang="en-US" sz="1350" b="1" dirty="0">
                 <a:solidFill>
-                  <a:srgbClr val="0F172A"/>
-                </a:solidFill>
-                <a:latin typeface="Consolas" pitchFamily="34" charset="0"/>
-                <a:ea typeface="Consolas" pitchFamily="34" charset="-122"/>
-                <a:cs typeface="Consolas" pitchFamily="34" charset="-120"/>
+                  <a:srgbClr val="1B2C3E"/>
+                </a:solidFill>
+                <a:latin typeface="Roboto Mono" pitchFamily="34" charset="0"/>
+                <a:ea typeface="Roboto Mono" pitchFamily="34" charset="-122"/>
+                <a:cs typeface="Roboto Mono" pitchFamily="34" charset="-120"/>
               </a:rPr>
               <a:t>HUMAN OWNER</a:t>
             </a:r>
@@ -3400,9 +3400,9 @@
                 <a:solidFill>
                   <a:srgbClr val="5C5340"/>
                 </a:solidFill>
-                <a:latin typeface="Inter" pitchFamily="34" charset="0"/>
-                <a:ea typeface="Inter" pitchFamily="34" charset="-122"/>
-                <a:cs typeface="Inter" pitchFamily="34" charset="-120"/>
+                <a:latin typeface="IBM Plex Sans" pitchFamily="34" charset="0"/>
+                <a:ea typeface="IBM Plex Sans" pitchFamily="34" charset="-122"/>
+                <a:cs typeface="IBM Plex Sans" pitchFamily="34" charset="-120"/>
               </a:rPr>
               <a:t>passkey wallet · sets the cap · one-click revoke</a:t>
             </a:r>
@@ -3429,7 +3429,7 @@
           </a:solidFill>
           <a:ln w="19050">
             <a:solidFill>
-              <a:srgbClr val="0F172A"/>
+              <a:srgbClr val="1B2C3E"/>
             </a:solidFill>
             <a:prstDash val="solid"/>
           </a:ln>
@@ -3462,11 +3462,11 @@
             <a:r>
               <a:rPr lang="en-US" sz="1350" b="1" dirty="0">
                 <a:solidFill>
-                  <a:srgbClr val="0F172A"/>
-                </a:solidFill>
-                <a:latin typeface="Consolas" pitchFamily="34" charset="0"/>
-                <a:ea typeface="Consolas" pitchFamily="34" charset="-122"/>
-                <a:cs typeface="Consolas" pitchFamily="34" charset="-120"/>
+                  <a:srgbClr val="1B2C3E"/>
+                </a:solidFill>
+                <a:latin typeface="Roboto Mono" pitchFamily="34" charset="0"/>
+                <a:ea typeface="Roboto Mono" pitchFamily="34" charset="-122"/>
+                <a:cs typeface="Roboto Mono" pitchFamily="34" charset="-120"/>
               </a:rPr>
               <a:t>LEASHED AGENT</a:t>
             </a:r>
@@ -3503,9 +3503,9 @@
                 <a:solidFill>
                   <a:srgbClr val="5C5340"/>
                 </a:solidFill>
-                <a:latin typeface="Inter" pitchFamily="34" charset="0"/>
-                <a:ea typeface="Inter" pitchFamily="34" charset="-122"/>
-                <a:cs typeface="Inter" pitchFamily="34" charset="-120"/>
+                <a:latin typeface="IBM Plex Sans" pitchFamily="34" charset="0"/>
+                <a:ea typeface="IBM Plex Sans" pitchFamily="34" charset="-122"/>
+                <a:cs typeface="IBM Plex Sans" pitchFamily="34" charset="-120"/>
               </a:rPr>
               <a:t>plans the job · pays per call · budgets itself</a:t>
             </a:r>
@@ -3567,9 +3567,9 @@
                 <a:solidFill>
                   <a:srgbClr val="8A5A2B"/>
                 </a:solidFill>
-                <a:latin typeface="Consolas" pitchFamily="34" charset="0"/>
-                <a:ea typeface="Consolas" pitchFamily="34" charset="-122"/>
-                <a:cs typeface="Consolas" pitchFamily="34" charset="-120"/>
+                <a:latin typeface="Roboto Mono" pitchFamily="34" charset="0"/>
+                <a:ea typeface="Roboto Mono" pitchFamily="34" charset="-122"/>
+                <a:cs typeface="Roboto Mono" pitchFamily="34" charset="-120"/>
               </a:rPr>
               <a:t>RAIL 1 · THAIFI MPP (chain 17)</a:t>
             </a:r>
@@ -3606,9 +3606,9 @@
                 <a:solidFill>
                   <a:srgbClr val="5C5340"/>
                 </a:solidFill>
-                <a:latin typeface="Inter" pitchFamily="34" charset="0"/>
-                <a:ea typeface="Inter" pitchFamily="34" charset="-122"/>
-                <a:cs typeface="Inter" pitchFamily="34" charset="-120"/>
+                <a:latin typeface="IBM Plex Sans" pitchFamily="34" charset="0"/>
+                <a:ea typeface="IBM Plex Sans" pitchFamily="34" charset="-122"/>
+                <a:cs typeface="IBM Plex Sans" pitchFamily="34" charset="-120"/>
               </a:rPr>
               <a:t>Qwen3.8 copy 0.2 THCFI · iApp poster 1.5 THCFI · PromptPay top-up</a:t>
             </a:r>
@@ -3670,9 +3670,9 @@
                 <a:solidFill>
                   <a:srgbClr val="2456A6"/>
                 </a:solidFill>
-                <a:latin typeface="Consolas" pitchFamily="34" charset="0"/>
-                <a:ea typeface="Consolas" pitchFamily="34" charset="-122"/>
-                <a:cs typeface="Consolas" pitchFamily="34" charset="-120"/>
+                <a:latin typeface="Roboto Mono" pitchFamily="34" charset="0"/>
+                <a:ea typeface="Roboto Mono" pitchFamily="34" charset="-122"/>
+                <a:cs typeface="Roboto Mono" pitchFamily="34" charset="-120"/>
               </a:rPr>
               <a:t>RAIL 2 · CARDANO x402 (preprod)</a:t>
             </a:r>
@@ -3709,9 +3709,9 @@
                 <a:solidFill>
                   <a:srgbClr val="5C5340"/>
                 </a:solidFill>
-                <a:latin typeface="Inter" pitchFamily="34" charset="0"/>
-                <a:ea typeface="Inter" pitchFamily="34" charset="-122"/>
-                <a:cs typeface="Inter" pitchFamily="34" charset="-120"/>
+                <a:latin typeface="IBM Plex Sans" pitchFamily="34" charset="0"/>
+                <a:ea typeface="IBM Plex Sans" pitchFamily="34" charset="-122"/>
+                <a:cs typeface="IBM Plex Sans" pitchFamily="34" charset="-120"/>
               </a:rPr>
               <a:t>our own seller: receipt verification 0.10 tUSDM — payments are core, not a bolt-on</a:t>
             </a:r>
@@ -3738,7 +3738,7 @@
           </a:solidFill>
           <a:ln w="19050">
             <a:solidFill>
-              <a:srgbClr val="1FA968"/>
+              <a:srgbClr val="2D7D4A"/>
             </a:solidFill>
             <a:prstDash val="solid"/>
           </a:ln>
@@ -3771,11 +3771,11 @@
             <a:r>
               <a:rPr lang="en-US" sz="1350" b="1" dirty="0">
                 <a:solidFill>
-                  <a:srgbClr val="1FA968"/>
-                </a:solidFill>
-                <a:latin typeface="Consolas" pitchFamily="34" charset="0"/>
-                <a:ea typeface="Consolas" pitchFamily="34" charset="-122"/>
-                <a:cs typeface="Consolas" pitchFamily="34" charset="-120"/>
+                  <a:srgbClr val="2D7D4A"/>
+                </a:solidFill>
+                <a:latin typeface="Roboto Mono" pitchFamily="34" charset="0"/>
+                <a:ea typeface="Roboto Mono" pitchFamily="34" charset="-122"/>
+                <a:cs typeface="Roboto Mono" pitchFamily="34" charset="-120"/>
               </a:rPr>
               <a:t>CHAINLINK CRE AUDITOR</a:t>
             </a:r>
@@ -3812,9 +3812,9 @@
                 <a:solidFill>
                   <a:srgbClr val="5C5340"/>
                 </a:solidFill>
-                <a:latin typeface="Inter" pitchFamily="34" charset="0"/>
-                <a:ea typeface="Inter" pitchFamily="34" charset="-122"/>
-                <a:cs typeface="Inter" pitchFamily="34" charset="-120"/>
+                <a:latin typeface="IBM Plex Sans" pitchFamily="34" charset="0"/>
+                <a:ea typeface="IBM Plex Sans" pitchFamily="34" charset="-122"/>
+                <a:cs typeface="IBM Plex Sans" pitchFamily="34" charset="-120"/>
               </a:rPr>
               <a:t>cron → fetch receipts → risk checks → on-chain attestation (Sepolia)</a:t>
             </a:r>
@@ -3841,7 +3841,7 @@
           </a:solidFill>
           <a:ln w="19050">
             <a:solidFill>
-              <a:srgbClr val="64748B"/>
+              <a:srgbClr val="5A6A7E"/>
             </a:solidFill>
             <a:prstDash val="solid"/>
           </a:ln>
@@ -3874,11 +3874,11 @@
             <a:r>
               <a:rPr lang="en-US" sz="1350" b="1" dirty="0">
                 <a:solidFill>
-                  <a:srgbClr val="64748B"/>
-                </a:solidFill>
-                <a:latin typeface="Consolas" pitchFamily="34" charset="0"/>
-                <a:ea typeface="Consolas" pitchFamily="34" charset="-122"/>
-                <a:cs typeface="Consolas" pitchFamily="34" charset="-120"/>
+                  <a:srgbClr val="5A6A7E"/>
+                </a:solidFill>
+                <a:latin typeface="Roboto Mono" pitchFamily="34" charset="0"/>
+                <a:ea typeface="Roboto Mono" pitchFamily="34" charset="-122"/>
+                <a:cs typeface="Roboto Mono" pitchFamily="34" charset="-120"/>
               </a:rPr>
               <a:t>NOWNodes RPC</a:t>
             </a:r>
@@ -3915,9 +3915,9 @@
                 <a:solidFill>
                   <a:srgbClr val="5C5340"/>
                 </a:solidFill>
-                <a:latin typeface="Inter" pitchFamily="34" charset="0"/>
-                <a:ea typeface="Inter" pitchFamily="34" charset="-122"/>
-                <a:cs typeface="Inter" pitchFamily="34" charset="-120"/>
+                <a:latin typeface="IBM Plex Sans" pitchFamily="34" charset="0"/>
+                <a:ea typeface="IBM Plex Sans" pitchFamily="34" charset="-122"/>
+                <a:cs typeface="IBM Plex Sans" pitchFamily="34" charset="-120"/>
               </a:rPr>
               <a:t>multichain data plane for receipt verification</a:t>
             </a:r>
@@ -3942,7 +3942,7 @@
           <a:noFill/>
           <a:ln w="25400">
             <a:solidFill>
-              <a:srgbClr val="0F172A"/>
+              <a:srgbClr val="1B2C3E"/>
             </a:solidFill>
             <a:prstDash val="solid"/>
             <a:tailEnd type="triangle"/>
@@ -3966,7 +3966,7 @@
           <a:noFill/>
           <a:ln w="25400">
             <a:solidFill>
-              <a:srgbClr val="0F172A"/>
+              <a:srgbClr val="1B2C3E"/>
             </a:solidFill>
             <a:prstDash val="solid"/>
             <a:tailEnd type="triangle"/>
@@ -3990,7 +3990,7 @@
           <a:noFill/>
           <a:ln w="25400">
             <a:solidFill>
-              <a:srgbClr val="0F172A"/>
+              <a:srgbClr val="1B2C3E"/>
             </a:solidFill>
             <a:prstDash val="solid"/>
             <a:tailEnd type="triangle"/>
@@ -4014,7 +4014,7 @@
           <a:noFill/>
           <a:ln w="25400">
             <a:solidFill>
-              <a:srgbClr val="0F172A"/>
+              <a:srgbClr val="1B2C3E"/>
             </a:solidFill>
             <a:prstDash val="solid"/>
             <a:tailEnd type="triangle"/>
@@ -4038,7 +4038,7 @@
           <a:noFill/>
           <a:ln w="25400">
             <a:solidFill>
-              <a:srgbClr val="0F172A"/>
+              <a:srgbClr val="1B2C3E"/>
             </a:solidFill>
             <a:prstDash val="solid"/>
             <a:tailEnd type="triangle"/>
@@ -4072,11 +4072,11 @@
             <a:r>
               <a:rPr lang="en-US" sz="1200" dirty="0">
                 <a:solidFill>
-                  <a:srgbClr val="64748B"/>
-                </a:solidFill>
-                <a:latin typeface="Consolas" pitchFamily="34" charset="0"/>
-                <a:ea typeface="Consolas" pitchFamily="34" charset="-122"/>
-                <a:cs typeface="Consolas" pitchFamily="34" charset="-120"/>
+                  <a:srgbClr val="5A6A7E"/>
+                </a:solidFill>
+                <a:latin typeface="Roboto Mono" pitchFamily="34" charset="0"/>
+                <a:ea typeface="Roboto Mono" pitchFamily="34" charset="-122"/>
+                <a:cs typeface="Roboto Mono" pitchFamily="34" charset="-120"/>
               </a:rPr>
               <a:t>Solid arrows = real, explorer-linked calls made during the sprint.</a:t>
             </a:r>
@@ -4098,7 +4098,7 @@
     <p:bg>
       <p:bgPr>
         <a:solidFill>
-          <a:srgbClr val="0B1A2F"/>
+          <a:srgbClr val="1F4E79"/>
         </a:solidFill>
       </p:bgPr>
     </p:bg>
@@ -4143,11 +4143,11 @@
             <a:r>
               <a:rPr lang="en-US" sz="1150" b="1" spc="400" kern="0" dirty="0">
                 <a:solidFill>
-                  <a:srgbClr val="00C2A8"/>
-                </a:solidFill>
-                <a:latin typeface="Consolas" pitchFamily="34" charset="0"/>
-                <a:ea typeface="Consolas" pitchFamily="34" charset="-122"/>
-                <a:cs typeface="Consolas" pitchFamily="34" charset="-120"/>
+                  <a:srgbClr val="1F4E79"/>
+                </a:solidFill>
+                <a:latin typeface="Roboto Mono" pitchFamily="34" charset="0"/>
+                <a:ea typeface="Roboto Mono" pitchFamily="34" charset="-122"/>
+                <a:cs typeface="Roboto Mono" pitchFamily="34" charset="-120"/>
               </a:rPr>
               <a:t>EVIDENCE · TRUST LAYER IN ACTION</a:t>
             </a:r>
@@ -4182,11 +4182,11 @@
             <a:r>
               <a:rPr lang="en-US" sz="3000" b="1" dirty="0">
                 <a:solidFill>
-                  <a:srgbClr val="F4F7FB"/>
-                </a:solidFill>
-                <a:latin typeface="Inter" pitchFamily="34" charset="0"/>
-                <a:ea typeface="Inter" pitchFamily="34" charset="-122"/>
-                <a:cs typeface="Inter" pitchFamily="34" charset="-120"/>
+                  <a:srgbClr val="F4F6F7"/>
+                </a:solidFill>
+                <a:latin typeface="IBM Plex Sans" pitchFamily="34" charset="0"/>
+                <a:ea typeface="IBM Plex Sans" pitchFamily="34" charset="-122"/>
+                <a:cs typeface="IBM Plex Sans" pitchFamily="34" charset="-120"/>
               </a:rPr>
               <a:t>Every trust-layer promise was kept, on-chain, during the sprint.</a:t>
             </a:r>
@@ -4271,9 +4271,9 @@
                 <a:solidFill>
                   <a:srgbClr val="C9BFA8"/>
                 </a:solidFill>
-                <a:latin typeface="Consolas" pitchFamily="34" charset="0"/>
-                <a:ea typeface="Consolas" pitchFamily="34" charset="-122"/>
-                <a:cs typeface="Consolas" pitchFamily="34" charset="-120"/>
+                <a:latin typeface="Roboto Mono" pitchFamily="34" charset="0"/>
+                <a:ea typeface="Roboto Mono" pitchFamily="34" charset="-122"/>
+                <a:cs typeface="Roboto Mono" pitchFamily="34" charset="-120"/>
               </a:rPr>
               <a:t>Leash · 4,998.5 / 5,000 THCFI (on-chain cap, decremented by the chain itself)</a:t>
             </a:r>
@@ -4288,9 +4288,9 @@
                 <a:solidFill>
                   <a:srgbClr val="C9BFA8"/>
                 </a:solidFill>
-                <a:latin typeface="Consolas" pitchFamily="34" charset="0"/>
-                <a:ea typeface="Consolas" pitchFamily="34" charset="-122"/>
-                <a:cs typeface="Consolas" pitchFamily="34" charset="-120"/>
+                <a:latin typeface="Roboto Mono" pitchFamily="34" charset="0"/>
+                <a:ea typeface="Roboto Mono" pitchFamily="34" charset="-122"/>
+                <a:cs typeface="Roboto Mono" pitchFamily="34" charset="-120"/>
               </a:rPr>
               <a:t>Receipts · 2 on-chain payments, explorer-linked</a:t>
             </a:r>
@@ -4305,9 +4305,9 @@
                 <a:solidFill>
                   <a:srgbClr val="C9BFA8"/>
                 </a:solidFill>
-                <a:latin typeface="Consolas" pitchFamily="34" charset="0"/>
-                <a:ea typeface="Consolas" pitchFamily="34" charset="-122"/>
-                <a:cs typeface="Consolas" pitchFamily="34" charset="-120"/>
+                <a:latin typeface="Roboto Mono" pitchFamily="34" charset="0"/>
+                <a:ea typeface="Roboto Mono" pitchFamily="34" charset="-122"/>
+                <a:cs typeface="Roboto Mono" pitchFamily="34" charset="-120"/>
               </a:rPr>
               <a:t>Audit · CRE verdict ✔ PASS, attested on Sepolia</a:t>
             </a:r>
@@ -4322,9 +4322,9 @@
                 <a:solidFill>
                   <a:srgbClr val="C9BFA8"/>
                 </a:solidFill>
-                <a:latin typeface="Consolas" pitchFamily="34" charset="0"/>
-                <a:ea typeface="Consolas" pitchFamily="34" charset="-122"/>
-                <a:cs typeface="Consolas" pitchFamily="34" charset="-120"/>
+                <a:latin typeface="Roboto Mono" pitchFamily="34" charset="0"/>
+                <a:ea typeface="Roboto Mono" pitchFamily="34" charset="-122"/>
+                <a:cs typeface="Roboto Mono" pitchFamily="34" charset="-120"/>
               </a:rPr>
               <a:t>Funding · 1 THB → 1 THCFI via PromptPay QR</a:t>
             </a:r>
@@ -4353,7 +4353,7 @@
           </a:solidFill>
           <a:ln w="22225">
             <a:solidFill>
-              <a:srgbClr val="E5484D"/>
+              <a:srgbClr val="A93837"/>
             </a:solidFill>
           </a:ln>
         </p:spPr>
@@ -4367,11 +4367,11 @@
             <a:r>
               <a:rPr lang="en-US" sz="1300" b="1" spc="300" kern="0" dirty="0">
                 <a:solidFill>
-                  <a:srgbClr val="E5484D"/>
-                </a:solidFill>
-                <a:latin typeface="Consolas" pitchFamily="34" charset="0"/>
-                <a:ea typeface="Consolas" pitchFamily="34" charset="-122"/>
-                <a:cs typeface="Consolas" pitchFamily="34" charset="-120"/>
+                  <a:srgbClr val="A93837"/>
+                </a:solidFill>
+                <a:latin typeface="Roboto Mono" pitchFamily="34" charset="0"/>
+                <a:ea typeface="Roboto Mono" pitchFamily="34" charset="-122"/>
+                <a:cs typeface="Roboto Mono" pitchFamily="34" charset="-120"/>
               </a:rPr>
               <a:t>RECORDED IN-SPRINT</a:t>
             </a:r>
@@ -4393,7 +4393,7 @@
     <p:bg>
       <p:bgPr>
         <a:solidFill>
-          <a:srgbClr val="F4F7FB"/>
+          <a:srgbClr val="F4F6F7"/>
         </a:solidFill>
       </p:bgPr>
     </p:bg>
@@ -4438,11 +4438,11 @@
             <a:r>
               <a:rPr lang="en-US" sz="1150" b="1" spc="400" kern="0" dirty="0">
                 <a:solidFill>
-                  <a:srgbClr val="00C2A8"/>
-                </a:solidFill>
-                <a:latin typeface="Consolas" pitchFamily="34" charset="0"/>
-                <a:ea typeface="Consolas" pitchFamily="34" charset="-122"/>
-                <a:cs typeface="Consolas" pitchFamily="34" charset="-120"/>
+                  <a:srgbClr val="1F4E79"/>
+                </a:solidFill>
+                <a:latin typeface="Roboto Mono" pitchFamily="34" charset="0"/>
+                <a:ea typeface="Roboto Mono" pitchFamily="34" charset="-122"/>
+                <a:cs typeface="Roboto Mono" pitchFamily="34" charset="-120"/>
               </a:rPr>
               <a:t>EVIDENCE · THE LEASH HELD</a:t>
             </a:r>
@@ -4477,11 +4477,11 @@
             <a:r>
               <a:rPr lang="en-US" sz="3000" b="1" dirty="0">
                 <a:solidFill>
-                  <a:srgbClr val="0F172A"/>
-                </a:solidFill>
-                <a:latin typeface="Inter" pitchFamily="34" charset="0"/>
-                <a:ea typeface="Inter" pitchFamily="34" charset="-122"/>
-                <a:cs typeface="Inter" pitchFamily="34" charset="-120"/>
+                  <a:srgbClr val="1B2C3E"/>
+                </a:solidFill>
+                <a:latin typeface="IBM Plex Sans" pitchFamily="34" charset="0"/>
+                <a:ea typeface="IBM Plex Sans" pitchFamily="34" charset="-122"/>
+                <a:cs typeface="IBM Plex Sans" pitchFamily="34" charset="-120"/>
               </a:rPr>
               <a:t>The trust-layer evidence chain judges can click</a:t>
             </a:r>
@@ -4531,16 +4531,16 @@
                           <a:solidFill>
                             <a:srgbClr val="FFFFFF"/>
                           </a:solidFill>
-                          <a:latin typeface="Inter" pitchFamily="34" charset="0"/>
-                          <a:ea typeface="Inter" pitchFamily="34" charset="-122"/>
-                          <a:cs typeface="Inter" pitchFamily="34" charset="-120"/>
+                          <a:latin typeface="IBM Plex Sans" pitchFamily="34" charset="0"/>
+                          <a:ea typeface="IBM Plex Sans" pitchFamily="34" charset="-122"/>
+                          <a:cs typeface="IBM Plex Sans" pitchFamily="34" charset="-120"/>
                         </a:rPr>
                         <a:t>Promise</a:t>
                       </a:r>
                       <a:endParaRPr lang="en-US" sz="1250" dirty="0">
-                        <a:latin typeface="Inter" charset="0"/>
-                        <a:ea typeface="Inter" charset="0"/>
-                        <a:cs typeface="Inter" charset="0"/>
+                        <a:latin typeface="IBM Plex Sans" charset="0"/>
+                        <a:ea typeface="IBM Plex Sans" charset="0"/>
+                        <a:cs typeface="IBM Plex Sans" charset="0"/>
                       </a:endParaRPr>
                     </a:p>
                   </a:txBody>
@@ -4599,16 +4599,16 @@
                           <a:solidFill>
                             <a:srgbClr val="FFFFFF"/>
                           </a:solidFill>
-                          <a:latin typeface="Inter" pitchFamily="34" charset="0"/>
-                          <a:ea typeface="Inter" pitchFamily="34" charset="-122"/>
-                          <a:cs typeface="Inter" pitchFamily="34" charset="-120"/>
+                          <a:latin typeface="IBM Plex Sans" pitchFamily="34" charset="0"/>
+                          <a:ea typeface="IBM Plex Sans" pitchFamily="34" charset="-122"/>
+                          <a:cs typeface="IBM Plex Sans" pitchFamily="34" charset="-120"/>
                         </a:rPr>
                         <a:t>Rail</a:t>
                       </a:r>
                       <a:endParaRPr lang="en-US" sz="1250" dirty="0">
-                        <a:latin typeface="Inter" charset="0"/>
-                        <a:ea typeface="Inter" charset="0"/>
-                        <a:cs typeface="Inter" charset="0"/>
+                        <a:latin typeface="IBM Plex Sans" charset="0"/>
+                        <a:ea typeface="IBM Plex Sans" charset="0"/>
+                        <a:cs typeface="IBM Plex Sans" charset="0"/>
                       </a:endParaRPr>
                     </a:p>
                   </a:txBody>
@@ -4667,16 +4667,16 @@
                           <a:solidFill>
                             <a:srgbClr val="FFFFFF"/>
                           </a:solidFill>
-                          <a:latin typeface="Inter" pitchFamily="34" charset="0"/>
-                          <a:ea typeface="Inter" pitchFamily="34" charset="-122"/>
-                          <a:cs typeface="Inter" pitchFamily="34" charset="-120"/>
+                          <a:latin typeface="IBM Plex Sans" pitchFamily="34" charset="0"/>
+                          <a:ea typeface="IBM Plex Sans" pitchFamily="34" charset="-122"/>
+                          <a:cs typeface="IBM Plex Sans" pitchFamily="34" charset="-120"/>
                         </a:rPr>
                         <a:t>Amount</a:t>
                       </a:r>
                       <a:endParaRPr lang="en-US" sz="1250" dirty="0">
-                        <a:latin typeface="Inter" charset="0"/>
-                        <a:ea typeface="Inter" charset="0"/>
-                        <a:cs typeface="Inter" charset="0"/>
+                        <a:latin typeface="IBM Plex Sans" charset="0"/>
+                        <a:ea typeface="IBM Plex Sans" charset="0"/>
+                        <a:cs typeface="IBM Plex Sans" charset="0"/>
                       </a:endParaRPr>
                     </a:p>
                   </a:txBody>
@@ -4735,16 +4735,16 @@
                           <a:solidFill>
                             <a:srgbClr val="FFFFFF"/>
                           </a:solidFill>
-                          <a:latin typeface="Inter" pitchFamily="34" charset="0"/>
-                          <a:ea typeface="Inter" pitchFamily="34" charset="-122"/>
-                          <a:cs typeface="Inter" pitchFamily="34" charset="-120"/>
+                          <a:latin typeface="IBM Plex Sans" pitchFamily="34" charset="0"/>
+                          <a:ea typeface="IBM Plex Sans" pitchFamily="34" charset="-122"/>
+                          <a:cs typeface="IBM Plex Sans" pitchFamily="34" charset="-120"/>
                         </a:rPr>
                         <a:t>Proof (live links)</a:t>
                       </a:r>
                       <a:endParaRPr lang="en-US" sz="1250" dirty="0">
-                        <a:latin typeface="Inter" charset="0"/>
-                        <a:ea typeface="Inter" charset="0"/>
-                        <a:cs typeface="Inter" charset="0"/>
+                        <a:latin typeface="IBM Plex Sans" charset="0"/>
+                        <a:ea typeface="IBM Plex Sans" charset="0"/>
+                        <a:cs typeface="IBM Plex Sans" charset="0"/>
                       </a:endParaRPr>
                     </a:p>
                   </a:txBody>
@@ -4803,18 +4803,18 @@
                       <a:r>
                         <a:rPr lang="en-US" sz="1250" dirty="0">
                           <a:solidFill>
-                            <a:srgbClr val="0F172A"/>
+                            <a:srgbClr val="1B2C3E"/>
                           </a:solidFill>
-                          <a:latin typeface="Inter" pitchFamily="34" charset="0"/>
-                          <a:ea typeface="Inter" pitchFamily="34" charset="-122"/>
-                          <a:cs typeface="Inter" pitchFamily="34" charset="-120"/>
+                          <a:latin typeface="IBM Plex Sans" pitchFamily="34" charset="0"/>
+                          <a:ea typeface="IBM Plex Sans" pitchFamily="34" charset="-122"/>
+                          <a:cs typeface="IBM Plex Sans" pitchFamily="34" charset="-120"/>
                         </a:rPr>
                         <a:t>Receipts · agent buys Thai poster</a:t>
                       </a:r>
                       <a:endParaRPr lang="en-US" sz="1250" dirty="0">
-                        <a:latin typeface="Inter" charset="0"/>
-                        <a:ea typeface="Inter" charset="0"/>
-                        <a:cs typeface="Inter" charset="0"/>
+                        <a:latin typeface="IBM Plex Sans" charset="0"/>
+                        <a:ea typeface="IBM Plex Sans" charset="0"/>
+                        <a:cs typeface="IBM Plex Sans" charset="0"/>
                       </a:endParaRPr>
                     </a:p>
                   </a:txBody>
@@ -4871,18 +4871,18 @@
                       <a:r>
                         <a:rPr lang="en-US" sz="1250" dirty="0">
                           <a:solidFill>
-                            <a:srgbClr val="0F172A"/>
+                            <a:srgbClr val="1B2C3E"/>
                           </a:solidFill>
-                          <a:latin typeface="Inter" pitchFamily="34" charset="0"/>
-                          <a:ea typeface="Inter" pitchFamily="34" charset="-122"/>
-                          <a:cs typeface="Inter" pitchFamily="34" charset="-120"/>
+                          <a:latin typeface="IBM Plex Sans" pitchFamily="34" charset="0"/>
+                          <a:ea typeface="IBM Plex Sans" pitchFamily="34" charset="-122"/>
+                          <a:cs typeface="IBM Plex Sans" pitchFamily="34" charset="-120"/>
                         </a:rPr>
                         <a:t>ThaiFi MPP · chain 17</a:t>
                       </a:r>
                       <a:endParaRPr lang="en-US" sz="1250" dirty="0">
-                        <a:latin typeface="Inter" charset="0"/>
-                        <a:ea typeface="Inter" charset="0"/>
-                        <a:cs typeface="Inter" charset="0"/>
+                        <a:latin typeface="IBM Plex Sans" charset="0"/>
+                        <a:ea typeface="IBM Plex Sans" charset="0"/>
+                        <a:cs typeface="IBM Plex Sans" charset="0"/>
                       </a:endParaRPr>
                     </a:p>
                   </a:txBody>
@@ -4939,18 +4939,18 @@
                       <a:r>
                         <a:rPr lang="en-US" sz="1250" dirty="0">
                           <a:solidFill>
-                            <a:srgbClr val="0F172A"/>
+                            <a:srgbClr val="1B2C3E"/>
                           </a:solidFill>
-                          <a:latin typeface="Inter" pitchFamily="34" charset="0"/>
-                          <a:ea typeface="Inter" pitchFamily="34" charset="-122"/>
-                          <a:cs typeface="Inter" pitchFamily="34" charset="-120"/>
+                          <a:latin typeface="IBM Plex Sans" pitchFamily="34" charset="0"/>
+                          <a:ea typeface="IBM Plex Sans" pitchFamily="34" charset="-122"/>
+                          <a:cs typeface="IBM Plex Sans" pitchFamily="34" charset="-120"/>
                         </a:rPr>
                         <a:t>1.5 THCFI</a:t>
                       </a:r>
                       <a:endParaRPr lang="en-US" sz="1250" dirty="0">
-                        <a:latin typeface="Inter" charset="0"/>
-                        <a:ea typeface="Inter" charset="0"/>
-                        <a:cs typeface="Inter" charset="0"/>
+                        <a:latin typeface="IBM Plex Sans" charset="0"/>
+                        <a:ea typeface="IBM Plex Sans" charset="0"/>
+                        <a:cs typeface="IBM Plex Sans" charset="0"/>
                       </a:endParaRPr>
                     </a:p>
                   </a:txBody>
@@ -5007,11 +5007,11 @@
                       <a:r>
                         <a:rPr lang="en-US" sz="1250" u="sng" dirty="0">
                           <a:solidFill>
-                            <a:srgbClr val="2456A6"/>
+                            <a:srgbClr val="1F4E79"/>
                           </a:solidFill>
-                          <a:latin typeface="Inter" pitchFamily="34" charset="0"/>
-                          <a:ea typeface="Inter" pitchFamily="34" charset="-122"/>
-                          <a:cs typeface="Inter" pitchFamily="34" charset="-120"/>
+                          <a:latin typeface="IBM Plex Sans" pitchFamily="34" charset="0"/>
+                          <a:ea typeface="IBM Plex Sans" pitchFamily="34" charset="-122"/>
+                          <a:cs typeface="IBM Plex Sans" pitchFamily="34" charset="-120"/>
                           <a:hlinkClick r:id="rId1" invalidUrl="" action="" tgtFrame="" tooltip="" history="1" highlightClick="0" endSnd="0">
                             <a:extLst>
                               <a:ext uri="{A12FA001-AC4F-418D-AE19-62706E023703}">
@@ -5023,9 +5023,9 @@
                         <a:t>exp.thaifi.com/tx/0xf6e9…3b65e</a:t>
                       </a:r>
                       <a:endParaRPr lang="en-US" sz="1250" dirty="0">
-                        <a:latin typeface="Inter" charset="0"/>
-                        <a:ea typeface="Inter" charset="0"/>
-                        <a:cs typeface="Inter" charset="0"/>
+                        <a:latin typeface="IBM Plex Sans" charset="0"/>
+                        <a:ea typeface="IBM Plex Sans" charset="0"/>
+                        <a:cs typeface="IBM Plex Sans" charset="0"/>
                       </a:endParaRPr>
                     </a:p>
                   </a:txBody>
@@ -5084,18 +5084,18 @@
                       <a:r>
                         <a:rPr lang="en-US" sz="1250" dirty="0">
                           <a:solidFill>
-                            <a:srgbClr val="0F172A"/>
+                            <a:srgbClr val="1B2C3E"/>
                           </a:solidFill>
-                          <a:latin typeface="Inter" pitchFamily="34" charset="0"/>
-                          <a:ea typeface="Inter" pitchFamily="34" charset="-122"/>
-                          <a:cs typeface="Inter" pitchFamily="34" charset="-120"/>
+                          <a:latin typeface="IBM Plex Sans" pitchFamily="34" charset="0"/>
+                          <a:ea typeface="IBM Plex Sans" pitchFamily="34" charset="-122"/>
+                          <a:cs typeface="IBM Plex Sans" pitchFamily="34" charset="-120"/>
                         </a:rPr>
                         <a:t>Receipts · agent pays OUR x402 seller</a:t>
                       </a:r>
                       <a:endParaRPr lang="en-US" sz="1250" dirty="0">
-                        <a:latin typeface="Inter" charset="0"/>
-                        <a:ea typeface="Inter" charset="0"/>
-                        <a:cs typeface="Inter" charset="0"/>
+                        <a:latin typeface="IBM Plex Sans" charset="0"/>
+                        <a:ea typeface="IBM Plex Sans" charset="0"/>
+                        <a:cs typeface="IBM Plex Sans" charset="0"/>
                       </a:endParaRPr>
                     </a:p>
                   </a:txBody>
@@ -5152,18 +5152,18 @@
                       <a:r>
                         <a:rPr lang="en-US" sz="1250" dirty="0">
                           <a:solidFill>
-                            <a:srgbClr val="0F172A"/>
+                            <a:srgbClr val="1B2C3E"/>
                           </a:solidFill>
-                          <a:latin typeface="Inter" pitchFamily="34" charset="0"/>
-                          <a:ea typeface="Inter" pitchFamily="34" charset="-122"/>
-                          <a:cs typeface="Inter" pitchFamily="34" charset="-120"/>
+                          <a:latin typeface="IBM Plex Sans" pitchFamily="34" charset="0"/>
+                          <a:ea typeface="IBM Plex Sans" pitchFamily="34" charset="-122"/>
+                          <a:cs typeface="IBM Plex Sans" pitchFamily="34" charset="-120"/>
                         </a:rPr>
                         <a:t>x402 · Cardano preprod</a:t>
                       </a:r>
                       <a:endParaRPr lang="en-US" sz="1250" dirty="0">
-                        <a:latin typeface="Inter" charset="0"/>
-                        <a:ea typeface="Inter" charset="0"/>
-                        <a:cs typeface="Inter" charset="0"/>
+                        <a:latin typeface="IBM Plex Sans" charset="0"/>
+                        <a:ea typeface="IBM Plex Sans" charset="0"/>
+                        <a:cs typeface="IBM Plex Sans" charset="0"/>
                       </a:endParaRPr>
                     </a:p>
                   </a:txBody>
@@ -5220,18 +5220,18 @@
                       <a:r>
                         <a:rPr lang="en-US" sz="1250" dirty="0">
                           <a:solidFill>
-                            <a:srgbClr val="0F172A"/>
+                            <a:srgbClr val="1B2C3E"/>
                           </a:solidFill>
-                          <a:latin typeface="Inter" pitchFamily="34" charset="0"/>
-                          <a:ea typeface="Inter" pitchFamily="34" charset="-122"/>
-                          <a:cs typeface="Inter" pitchFamily="34" charset="-120"/>
+                          <a:latin typeface="IBM Plex Sans" pitchFamily="34" charset="0"/>
+                          <a:ea typeface="IBM Plex Sans" pitchFamily="34" charset="-122"/>
+                          <a:cs typeface="IBM Plex Sans" pitchFamily="34" charset="-120"/>
                         </a:rPr>
                         <a:t>0.10 tUSDM</a:t>
                       </a:r>
                       <a:endParaRPr lang="en-US" sz="1250" dirty="0">
-                        <a:latin typeface="Inter" charset="0"/>
-                        <a:ea typeface="Inter" charset="0"/>
-                        <a:cs typeface="Inter" charset="0"/>
+                        <a:latin typeface="IBM Plex Sans" charset="0"/>
+                        <a:ea typeface="IBM Plex Sans" charset="0"/>
+                        <a:cs typeface="IBM Plex Sans" charset="0"/>
                       </a:endParaRPr>
                     </a:p>
                   </a:txBody>
@@ -5288,11 +5288,11 @@
                       <a:r>
                         <a:rPr lang="en-US" sz="1250" u="sng" dirty="0">
                           <a:solidFill>
-                            <a:srgbClr val="2456A6"/>
+                            <a:srgbClr val="1F4E79"/>
                           </a:solidFill>
-                          <a:latin typeface="Inter" pitchFamily="34" charset="0"/>
-                          <a:ea typeface="Inter" pitchFamily="34" charset="-122"/>
-                          <a:cs typeface="Inter" pitchFamily="34" charset="-120"/>
+                          <a:latin typeface="IBM Plex Sans" pitchFamily="34" charset="0"/>
+                          <a:ea typeface="IBM Plex Sans" pitchFamily="34" charset="-122"/>
+                          <a:cs typeface="IBM Plex Sans" pitchFamily="34" charset="-120"/>
                           <a:hlinkClick r:id="rId2" invalidUrl="" action="" tgtFrame="" tooltip="" history="1" highlightClick="0" endSnd="0">
                             <a:extLst>
                               <a:ext uri="{A12FA001-AC4F-418D-AE19-62706E023703}">
@@ -5304,9 +5304,9 @@
                         <a:t>cardanoscan.io/tx/5e796a4c…bdc0</a:t>
                       </a:r>
                       <a:endParaRPr lang="en-US" sz="1250" dirty="0">
-                        <a:latin typeface="Inter" charset="0"/>
-                        <a:ea typeface="Inter" charset="0"/>
-                        <a:cs typeface="Inter" charset="0"/>
+                        <a:latin typeface="IBM Plex Sans" charset="0"/>
+                        <a:ea typeface="IBM Plex Sans" charset="0"/>
+                        <a:cs typeface="IBM Plex Sans" charset="0"/>
                       </a:endParaRPr>
                     </a:p>
                   </a:txBody>
@@ -5365,18 +5365,18 @@
                       <a:r>
                         <a:rPr lang="en-US" sz="1250" dirty="0">
                           <a:solidFill>
-                            <a:srgbClr val="0F172A"/>
+                            <a:srgbClr val="1B2C3E"/>
                           </a:solidFill>
-                          <a:latin typeface="Inter" pitchFamily="34" charset="0"/>
-                          <a:ea typeface="Inter" pitchFamily="34" charset="-122"/>
-                          <a:cs typeface="Inter" pitchFamily="34" charset="-120"/>
+                          <a:latin typeface="IBM Plex Sans" pitchFamily="34" charset="0"/>
+                          <a:ea typeface="IBM Plex Sans" pitchFamily="34" charset="-122"/>
+                          <a:cs typeface="IBM Plex Sans" pitchFamily="34" charset="-120"/>
                         </a:rPr>
                         <a:t>Audit · CRE verdict</a:t>
                       </a:r>
                       <a:endParaRPr lang="en-US" sz="1250" dirty="0">
-                        <a:latin typeface="Inter" charset="0"/>
-                        <a:ea typeface="Inter" charset="0"/>
-                        <a:cs typeface="Inter" charset="0"/>
+                        <a:latin typeface="IBM Plex Sans" charset="0"/>
+                        <a:ea typeface="IBM Plex Sans" charset="0"/>
+                        <a:cs typeface="IBM Plex Sans" charset="0"/>
                       </a:endParaRPr>
                     </a:p>
                   </a:txBody>
@@ -5433,18 +5433,18 @@
                       <a:r>
                         <a:rPr lang="en-US" sz="1250" dirty="0">
                           <a:solidFill>
-                            <a:srgbClr val="0F172A"/>
+                            <a:srgbClr val="1B2C3E"/>
                           </a:solidFill>
-                          <a:latin typeface="Inter" pitchFamily="34" charset="0"/>
-                          <a:ea typeface="Inter" pitchFamily="34" charset="-122"/>
-                          <a:cs typeface="Inter" pitchFamily="34" charset="-120"/>
+                          <a:latin typeface="IBM Plex Sans" pitchFamily="34" charset="0"/>
+                          <a:ea typeface="IBM Plex Sans" pitchFamily="34" charset="-122"/>
+                          <a:cs typeface="IBM Plex Sans" pitchFamily="34" charset="-120"/>
                         </a:rPr>
                         <a:t>Chainlink CRE → Sepolia</a:t>
                       </a:r>
                       <a:endParaRPr lang="en-US" sz="1250" dirty="0">
-                        <a:latin typeface="Inter" charset="0"/>
-                        <a:ea typeface="Inter" charset="0"/>
-                        <a:cs typeface="Inter" charset="0"/>
+                        <a:latin typeface="IBM Plex Sans" charset="0"/>
+                        <a:ea typeface="IBM Plex Sans" charset="0"/>
+                        <a:cs typeface="IBM Plex Sans" charset="0"/>
                       </a:endParaRPr>
                     </a:p>
                   </a:txBody>
@@ -5501,18 +5501,18 @@
                       <a:r>
                         <a:rPr lang="en-US" sz="1250" dirty="0">
                           <a:solidFill>
-                            <a:srgbClr val="0F172A"/>
+                            <a:srgbClr val="1B2C3E"/>
                           </a:solidFill>
-                          <a:latin typeface="Inter" pitchFamily="34" charset="0"/>
-                          <a:ea typeface="Inter" pitchFamily="34" charset="-122"/>
-                          <a:cs typeface="Inter" pitchFamily="34" charset="-120"/>
+                          <a:latin typeface="IBM Plex Sans" pitchFamily="34" charset="0"/>
+                          <a:ea typeface="IBM Plex Sans" pitchFamily="34" charset="-122"/>
+                          <a:cs typeface="IBM Plex Sans" pitchFamily="34" charset="-120"/>
                         </a:rPr>
                         <a:t>PASS ✔ 2 receipts</a:t>
                       </a:r>
                       <a:endParaRPr lang="en-US" sz="1250" dirty="0">
-                        <a:latin typeface="Inter" charset="0"/>
-                        <a:ea typeface="Inter" charset="0"/>
-                        <a:cs typeface="Inter" charset="0"/>
+                        <a:latin typeface="IBM Plex Sans" charset="0"/>
+                        <a:ea typeface="IBM Plex Sans" charset="0"/>
+                        <a:cs typeface="IBM Plex Sans" charset="0"/>
                       </a:endParaRPr>
                     </a:p>
                   </a:txBody>
@@ -5569,18 +5569,18 @@
                       <a:r>
                         <a:rPr lang="en-US" sz="1250" dirty="0">
                           <a:solidFill>
-                            <a:srgbClr val="1FA968"/>
+                            <a:srgbClr val="2D7D4A"/>
                           </a:solidFill>
-                          <a:latin typeface="Inter" pitchFamily="34" charset="0"/>
-                          <a:ea typeface="Inter" pitchFamily="34" charset="-122"/>
-                          <a:cs typeface="Inter" pitchFamily="34" charset="-120"/>
+                          <a:latin typeface="IBM Plex Sans" pitchFamily="34" charset="0"/>
+                          <a:ea typeface="IBM Plex Sans" pitchFamily="34" charset="-122"/>
+                          <a:cs typeface="IBM Plex Sans" pitchFamily="34" charset="-120"/>
                         </a:rPr>
                         <a:t>docs/cre-auditor-evidence.txt (simulate log)</a:t>
                       </a:r>
                       <a:endParaRPr lang="en-US" sz="1250" dirty="0">
-                        <a:latin typeface="Inter" charset="0"/>
-                        <a:ea typeface="Inter" charset="0"/>
-                        <a:cs typeface="Inter" charset="0"/>
+                        <a:latin typeface="IBM Plex Sans" charset="0"/>
+                        <a:ea typeface="IBM Plex Sans" charset="0"/>
+                        <a:cs typeface="IBM Plex Sans" charset="0"/>
                       </a:endParaRPr>
                     </a:p>
                   </a:txBody>
@@ -5639,18 +5639,18 @@
                       <a:r>
                         <a:rPr lang="en-US" sz="1250" dirty="0">
                           <a:solidFill>
-                            <a:srgbClr val="0F172A"/>
+                            <a:srgbClr val="1B2C3E"/>
                           </a:solidFill>
-                          <a:latin typeface="Inter" pitchFamily="34" charset="0"/>
-                          <a:ea typeface="Inter" pitchFamily="34" charset="-122"/>
-                          <a:cs typeface="Inter" pitchFamily="34" charset="-120"/>
+                          <a:latin typeface="IBM Plex Sans" pitchFamily="34" charset="0"/>
+                          <a:ea typeface="IBM Plex Sans" pitchFamily="34" charset="-122"/>
+                          <a:cs typeface="IBM Plex Sans" pitchFamily="34" charset="-120"/>
                         </a:rPr>
                         <a:t>Leash · on-chain enforcement</a:t>
                       </a:r>
                       <a:endParaRPr lang="en-US" sz="1250" dirty="0">
-                        <a:latin typeface="Inter" charset="0"/>
-                        <a:ea typeface="Inter" charset="0"/>
-                        <a:cs typeface="Inter" charset="0"/>
+                        <a:latin typeface="IBM Plex Sans" charset="0"/>
+                        <a:ea typeface="IBM Plex Sans" charset="0"/>
+                        <a:cs typeface="IBM Plex Sans" charset="0"/>
                       </a:endParaRPr>
                     </a:p>
                   </a:txBody>
@@ -5707,18 +5707,18 @@
                       <a:r>
                         <a:rPr lang="en-US" sz="1250" dirty="0">
                           <a:solidFill>
-                            <a:srgbClr val="0F172A"/>
+                            <a:srgbClr val="1B2C3E"/>
                           </a:solidFill>
-                          <a:latin typeface="Inter" pitchFamily="34" charset="0"/>
-                          <a:ea typeface="Inter" pitchFamily="34" charset="-122"/>
-                          <a:cs typeface="Inter" pitchFamily="34" charset="-120"/>
+                          <a:latin typeface="IBM Plex Sans" pitchFamily="34" charset="0"/>
+                          <a:ea typeface="IBM Plex Sans" pitchFamily="34" charset="-122"/>
+                          <a:cs typeface="IBM Plex Sans" pitchFamily="34" charset="-120"/>
                         </a:rPr>
                         <a:t>AccountKeychain · TIP-1011</a:t>
                       </a:r>
                       <a:endParaRPr lang="en-US" sz="1250" dirty="0">
-                        <a:latin typeface="Inter" charset="0"/>
-                        <a:ea typeface="Inter" charset="0"/>
-                        <a:cs typeface="Inter" charset="0"/>
+                        <a:latin typeface="IBM Plex Sans" charset="0"/>
+                        <a:ea typeface="IBM Plex Sans" charset="0"/>
+                        <a:cs typeface="IBM Plex Sans" charset="0"/>
                       </a:endParaRPr>
                     </a:p>
                   </a:txBody>
@@ -5775,18 +5775,18 @@
                       <a:r>
                         <a:rPr lang="en-US" sz="1250" dirty="0">
                           <a:solidFill>
-                            <a:srgbClr val="0F172A"/>
+                            <a:srgbClr val="1B2C3E"/>
                           </a:solidFill>
-                          <a:latin typeface="Inter" pitchFamily="34" charset="0"/>
-                          <a:ea typeface="Inter" pitchFamily="34" charset="-122"/>
-                          <a:cs typeface="Inter" pitchFamily="34" charset="-120"/>
+                          <a:latin typeface="IBM Plex Sans" pitchFamily="34" charset="0"/>
+                          <a:ea typeface="IBM Plex Sans" pitchFamily="34" charset="-122"/>
+                          <a:cs typeface="IBM Plex Sans" pitchFamily="34" charset="-120"/>
                         </a:rPr>
                         <a:t>4,998.5 / 5,000 THCFI</a:t>
                       </a:r>
                       <a:endParaRPr lang="en-US" sz="1250" dirty="0">
-                        <a:latin typeface="Inter" charset="0"/>
-                        <a:ea typeface="Inter" charset="0"/>
-                        <a:cs typeface="Inter" charset="0"/>
+                        <a:latin typeface="IBM Plex Sans" charset="0"/>
+                        <a:ea typeface="IBM Plex Sans" charset="0"/>
+                        <a:cs typeface="IBM Plex Sans" charset="0"/>
                       </a:endParaRPr>
                     </a:p>
                   </a:txBody>
@@ -5843,18 +5843,18 @@
                       <a:r>
                         <a:rPr lang="en-US" sz="1250" dirty="0">
                           <a:solidFill>
-                            <a:srgbClr val="0F172A"/>
+                            <a:srgbClr val="1B2C3E"/>
                           </a:solidFill>
-                          <a:latin typeface="Inter" pitchFamily="34" charset="0"/>
-                          <a:ea typeface="Inter" pitchFamily="34" charset="-122"/>
-                          <a:cs typeface="Inter" pitchFamily="34" charset="-120"/>
+                          <a:latin typeface="IBM Plex Sans" pitchFamily="34" charset="0"/>
+                          <a:ea typeface="IBM Plex Sans" pitchFamily="34" charset="-122"/>
+                          <a:cs typeface="IBM Plex Sans" pitchFamily="34" charset="-120"/>
                         </a:rPr>
                         <a:t>limit decremented by the chain itself — incl. gas</a:t>
                       </a:r>
                       <a:endParaRPr lang="en-US" sz="1250" dirty="0">
-                        <a:latin typeface="Inter" charset="0"/>
-                        <a:ea typeface="Inter" charset="0"/>
-                        <a:cs typeface="Inter" charset="0"/>
+                        <a:latin typeface="IBM Plex Sans" charset="0"/>
+                        <a:ea typeface="IBM Plex Sans" charset="0"/>
+                        <a:cs typeface="IBM Plex Sans" charset="0"/>
                       </a:endParaRPr>
                     </a:p>
                   </a:txBody>
@@ -5932,11 +5932,11 @@
             <a:r>
               <a:rPr lang="en-US" sz="1200" dirty="0">
                 <a:solidFill>
-                  <a:srgbClr val="64748B"/>
-                </a:solidFill>
-                <a:latin typeface="Consolas" pitchFamily="34" charset="0"/>
-                <a:ea typeface="Consolas" pitchFamily="34" charset="-122"/>
-                <a:cs typeface="Consolas" pitchFamily="34" charset="-120"/>
+                  <a:srgbClr val="5A6A7E"/>
+                </a:solidFill>
+                <a:latin typeface="Roboto Mono" pitchFamily="34" charset="0"/>
+                <a:ea typeface="Roboto Mono" pitchFamily="34" charset="-122"/>
+                <a:cs typeface="Roboto Mono" pitchFamily="34" charset="-120"/>
               </a:rPr>
               <a:t>Ledger + policy engine: 10 unit tests · seller: live at :4020 · audit re-runnable: pnpm probe / scripts/demo.sh</a:t>
             </a:r>
@@ -5965,7 +5965,7 @@
           </a:solidFill>
           <a:ln w="22225">
             <a:solidFill>
-              <a:srgbClr val="E5484D"/>
+              <a:srgbClr val="A93837"/>
             </a:solidFill>
           </a:ln>
         </p:spPr>
@@ -5979,11 +5979,11 @@
             <a:r>
               <a:rPr lang="en-US" sz="1300" b="1" spc="300" kern="0" dirty="0">
                 <a:solidFill>
-                  <a:srgbClr val="E5484D"/>
-                </a:solidFill>
-                <a:latin typeface="Consolas" pitchFamily="34" charset="0"/>
-                <a:ea typeface="Consolas" pitchFamily="34" charset="-122"/>
-                <a:cs typeface="Consolas" pitchFamily="34" charset="-120"/>
+                  <a:srgbClr val="A93837"/>
+                </a:solidFill>
+                <a:latin typeface="Roboto Mono" pitchFamily="34" charset="0"/>
+                <a:ea typeface="Roboto Mono" pitchFamily="34" charset="-122"/>
+                <a:cs typeface="Roboto Mono" pitchFamily="34" charset="-120"/>
               </a:rPr>
               <a:t>NOT MOCKS</a:t>
             </a:r>
@@ -6005,7 +6005,7 @@
     <p:bg>
       <p:bgPr>
         <a:solidFill>
-          <a:srgbClr val="F4F7FB"/>
+          <a:srgbClr val="F4F6F7"/>
         </a:solidFill>
       </p:bgPr>
     </p:bg>
@@ -6050,11 +6050,11 @@
             <a:r>
               <a:rPr lang="en-US" sz="1150" b="1" spc="400" kern="0" dirty="0">
                 <a:solidFill>
-                  <a:srgbClr val="00C2A8"/>
-                </a:solidFill>
-                <a:latin typeface="Consolas" pitchFamily="34" charset="0"/>
-                <a:ea typeface="Consolas" pitchFamily="34" charset="-122"/>
-                <a:cs typeface="Consolas" pitchFamily="34" charset="-120"/>
+                  <a:srgbClr val="1F4E79"/>
+                </a:solidFill>
+                <a:latin typeface="Roboto Mono" pitchFamily="34" charset="0"/>
+                <a:ea typeface="Roboto Mono" pitchFamily="34" charset="-122"/>
+                <a:cs typeface="Roboto Mono" pitchFamily="34" charset="-120"/>
               </a:rPr>
               <a:t>TRACK MAP · ONE TRUST LAYER, FOUR TRACKS</a:t>
             </a:r>
@@ -6089,11 +6089,11 @@
             <a:r>
               <a:rPr lang="en-US" sz="3000" b="1" dirty="0">
                 <a:solidFill>
-                  <a:srgbClr val="0F172A"/>
-                </a:solidFill>
-                <a:latin typeface="Inter" pitchFamily="34" charset="0"/>
-                <a:ea typeface="Inter" pitchFamily="34" charset="-122"/>
-                <a:cs typeface="Inter" pitchFamily="34" charset="-120"/>
+                  <a:srgbClr val="1B2C3E"/>
+                </a:solidFill>
+                <a:latin typeface="IBM Plex Sans" pitchFamily="34" charset="0"/>
+                <a:ea typeface="IBM Plex Sans" pitchFamily="34" charset="-122"/>
+                <a:cs typeface="IBM Plex Sans" pitchFamily="34" charset="-120"/>
               </a:rPr>
               <a:t>Each track serves the trust layer — integrations are core, not bolt-ons.</a:t>
             </a:r>
@@ -6120,7 +6120,7 @@
           </a:solidFill>
           <a:ln w="15240">
             <a:solidFill>
-              <a:srgbClr val="0F172A"/>
+              <a:srgbClr val="1B2C3E"/>
             </a:solidFill>
             <a:prstDash val="solid"/>
           </a:ln>
@@ -6153,11 +6153,11 @@
             <a:r>
               <a:rPr lang="en-US" sz="1500" b="1" spc="200" kern="0" dirty="0">
                 <a:solidFill>
-                  <a:srgbClr val="0F172A"/>
-                </a:solidFill>
-                <a:latin typeface="Consolas" pitchFamily="34" charset="0"/>
-                <a:ea typeface="Consolas" pitchFamily="34" charset="-122"/>
-                <a:cs typeface="Consolas" pitchFamily="34" charset="-120"/>
+                  <a:srgbClr val="1B2C3E"/>
+                </a:solidFill>
+                <a:latin typeface="Roboto Mono" pitchFamily="34" charset="0"/>
+                <a:ea typeface="Roboto Mono" pitchFamily="34" charset="-122"/>
+                <a:cs typeface="Roboto Mono" pitchFamily="34" charset="-120"/>
               </a:rPr>
               <a:t>MAIN · $100K AWS</a:t>
             </a:r>
@@ -6194,9 +6194,9 @@
                 <a:solidFill>
                   <a:srgbClr val="334155"/>
                 </a:solidFill>
-                <a:latin typeface="Inter" pitchFamily="34" charset="0"/>
-                <a:ea typeface="Inter" pitchFamily="34" charset="-122"/>
-                <a:cs typeface="Inter" pitchFamily="34" charset="-120"/>
+                <a:latin typeface="IBM Plex Sans" pitchFamily="34" charset="0"/>
+                <a:ea typeface="IBM Plex Sans" pitchFamily="34" charset="-122"/>
+                <a:cs typeface="IBM Plex Sans" pitchFamily="34" charset="-120"/>
               </a:rPr>
               <a:t>The whole product: two-rail agent + passbook oversight + CRE audit. Themes: AI x Crypto · Payments · Consumer.</a:t>
             </a:r>
@@ -6223,7 +6223,7 @@
           </a:solidFill>
           <a:ln w="15240">
             <a:solidFill>
-              <a:srgbClr val="00C2A8"/>
+              <a:srgbClr val="1F4E79"/>
             </a:solidFill>
             <a:prstDash val="solid"/>
           </a:ln>
@@ -6256,11 +6256,11 @@
             <a:r>
               <a:rPr lang="en-US" sz="1500" b="1" spc="200" kern="0" dirty="0">
                 <a:solidFill>
-                  <a:srgbClr val="00C2A8"/>
-                </a:solidFill>
-                <a:latin typeface="Consolas" pitchFamily="34" charset="0"/>
-                <a:ea typeface="Consolas" pitchFamily="34" charset="-122"/>
-                <a:cs typeface="Consolas" pitchFamily="34" charset="-120"/>
+                  <a:srgbClr val="1F4E79"/>
+                </a:solidFill>
+                <a:latin typeface="Roboto Mono" pitchFamily="34" charset="0"/>
+                <a:ea typeface="Roboto Mono" pitchFamily="34" charset="-122"/>
+                <a:cs typeface="Roboto Mono" pitchFamily="34" charset="-120"/>
               </a:rPr>
               <a:t>CARDANO · $27.5K</a:t>
             </a:r>
@@ -6297,9 +6297,9 @@
                 <a:solidFill>
                   <a:srgbClr val="334155"/>
                 </a:solidFill>
-                <a:latin typeface="Inter" pitchFamily="34" charset="0"/>
-                <a:ea typeface="Inter" pitchFamily="34" charset="-122"/>
-                <a:cs typeface="Inter" pitchFamily="34" charset="-120"/>
+                <a:latin typeface="IBM Plex Sans" pitchFamily="34" charset="0"/>
+                <a:ea typeface="IBM Plex Sans" pitchFamily="34" charset="-122"/>
+                <a:cs typeface="IBM Plex Sans" pitchFamily="34" charset="-120"/>
               </a:rPr>
               <a:t>Payments are Cardano-native: x402 preprod tUSDM, our own seller endpoint, TS-only SDK path — 0.10 tUSDM changed hands.</a:t>
             </a:r>
@@ -6326,7 +6326,7 @@
           </a:solidFill>
           <a:ln w="15240">
             <a:solidFill>
-              <a:srgbClr val="00C2A8"/>
+              <a:srgbClr val="1F4E79"/>
             </a:solidFill>
             <a:prstDash val="solid"/>
           </a:ln>
@@ -6359,11 +6359,11 @@
             <a:r>
               <a:rPr lang="en-US" sz="1500" b="1" spc="200" kern="0" dirty="0">
                 <a:solidFill>
-                  <a:srgbClr val="00C2A8"/>
-                </a:solidFill>
-                <a:latin typeface="Consolas" pitchFamily="34" charset="0"/>
-                <a:ea typeface="Consolas" pitchFamily="34" charset="-122"/>
-                <a:cs typeface="Consolas" pitchFamily="34" charset="-120"/>
+                  <a:srgbClr val="1F4E79"/>
+                </a:solidFill>
+                <a:latin typeface="Roboto Mono" pitchFamily="34" charset="0"/>
+                <a:ea typeface="Roboto Mono" pitchFamily="34" charset="-122"/>
+                <a:cs typeface="Roboto Mono" pitchFamily="34" charset="-120"/>
               </a:rPr>
               <a:t>CHAINLINK CRE · $10K</a:t>
             </a:r>
@@ -6400,9 +6400,9 @@
                 <a:solidFill>
                   <a:srgbClr val="334155"/>
                 </a:solidFill>
-                <a:latin typeface="Inter" pitchFamily="34" charset="0"/>
-                <a:ea typeface="Inter" pitchFamily="34" charset="-122"/>
-                <a:cs typeface="Inter" pitchFamily="34" charset="-120"/>
+                <a:latin typeface="IBM Plex Sans" pitchFamily="34" charset="0"/>
+                <a:ea typeface="IBM Plex Sans" pitchFamily="34" charset="-122"/>
+                <a:cs typeface="IBM Plex Sans" pitchFamily="34" charset="-120"/>
               </a:rPr>
               <a:t>The auditor IS a CRE workflow: HTTP fetch + risk logic + EVM write, proven by cre workflow simulate.</a:t>
             </a:r>
@@ -6429,7 +6429,7 @@
           </a:solidFill>
           <a:ln w="15240">
             <a:solidFill>
-              <a:srgbClr val="00C2A8"/>
+              <a:srgbClr val="1F4E79"/>
             </a:solidFill>
             <a:prstDash val="solid"/>
           </a:ln>
@@ -6462,11 +6462,11 @@
             <a:r>
               <a:rPr lang="en-US" sz="1500" b="1" spc="200" kern="0" dirty="0">
                 <a:solidFill>
-                  <a:srgbClr val="00C2A8"/>
-                </a:solidFill>
-                <a:latin typeface="Consolas" pitchFamily="34" charset="0"/>
-                <a:ea typeface="Consolas" pitchFamily="34" charset="-122"/>
-                <a:cs typeface="Consolas" pitchFamily="34" charset="-120"/>
+                  <a:srgbClr val="1F4E79"/>
+                </a:solidFill>
+                <a:latin typeface="Roboto Mono" pitchFamily="34" charset="0"/>
+                <a:ea typeface="Roboto Mono" pitchFamily="34" charset="-122"/>
+                <a:cs typeface="Roboto Mono" pitchFamily="34" charset="-120"/>
               </a:rPr>
               <a:t>NOWNODES · €6.5K</a:t>
             </a:r>
@@ -6503,9 +6503,9 @@
                 <a:solidFill>
                   <a:srgbClr val="334155"/>
                 </a:solidFill>
-                <a:latin typeface="Inter" pitchFamily="34" charset="0"/>
-                <a:ea typeface="Inter" pitchFamily="34" charset="-122"/>
-                <a:cs typeface="Inter" pitchFamily="34" charset="-120"/>
+                <a:latin typeface="IBM Plex Sans" pitchFamily="34" charset="0"/>
+                <a:ea typeface="IBM Plex Sans" pitchFamily="34" charset="-122"/>
+                <a:cs typeface="IBM Plex Sans" pitchFamily="34" charset="-120"/>
               </a:rPr>
               <a:t>The auditor's RPC data plane reads EVM receipt state through NOWNodes — architectural, not decorative.</a:t>
             </a:r>
@@ -6542,9 +6542,9 @@
                 <a:solidFill>
                   <a:srgbClr val="334155"/>
                 </a:solidFill>
-                <a:latin typeface="Inter" pitchFamily="34" charset="0"/>
-                <a:ea typeface="Inter" pitchFamily="34" charset="-122"/>
-                <a:cs typeface="Inter" pitchFamily="34" charset="-120"/>
+                <a:latin typeface="IBM Plex Sans" pitchFamily="34" charset="0"/>
+                <a:ea typeface="IBM Plex Sans" pitchFamily="34" charset="-122"/>
+                <a:cs typeface="IBM Plex Sans" pitchFamily="34" charset="-120"/>
               </a:rPr>
               <a:t>The rules disqualify bolt-ons. Each leg earns its keep — the trust layer can't survive a single missing piece.</a:t>
             </a:r>
@@ -6566,7 +6566,7 @@
     <p:bg>
       <p:bgPr>
         <a:solidFill>
-          <a:srgbClr val="F4F7FB"/>
+          <a:srgbClr val="F4F6F7"/>
         </a:solidFill>
       </p:bgPr>
     </p:bg>
@@ -6611,11 +6611,11 @@
             <a:r>
               <a:rPr lang="en-US" sz="1150" b="1" spc="400" kern="0" dirty="0">
                 <a:solidFill>
-                  <a:srgbClr val="00C2A8"/>
-                </a:solidFill>
-                <a:latin typeface="Consolas" pitchFamily="34" charset="0"/>
-                <a:ea typeface="Consolas" pitchFamily="34" charset="-122"/>
-                <a:cs typeface="Consolas" pitchFamily="34" charset="-120"/>
+                  <a:srgbClr val="1F4E79"/>
+                </a:solidFill>
+                <a:latin typeface="Roboto Mono" pitchFamily="34" charset="0"/>
+                <a:ea typeface="Roboto Mono" pitchFamily="34" charset="-122"/>
+                <a:cs typeface="Roboto Mono" pitchFamily="34" charset="-120"/>
               </a:rPr>
               <a:t>RUBRIC FIT · TRUST LAYER SCORES ON ALL FIVE</a:t>
             </a:r>
@@ -6650,11 +6650,11 @@
             <a:r>
               <a:rPr lang="en-US" sz="2800" b="1" dirty="0">
                 <a:solidFill>
-                  <a:srgbClr val="0F172A"/>
-                </a:solidFill>
-                <a:latin typeface="Inter" pitchFamily="34" charset="0"/>
-                <a:ea typeface="Inter" pitchFamily="34" charset="-122"/>
-                <a:cs typeface="Inter" pitchFamily="34" charset="-120"/>
+                  <a:srgbClr val="1B2C3E"/>
+                </a:solidFill>
+                <a:latin typeface="IBM Plex Sans" pitchFamily="34" charset="0"/>
+                <a:ea typeface="IBM Plex Sans" pitchFamily="34" charset="-122"/>
+                <a:cs typeface="IBM Plex Sans" pitchFamily="34" charset="-120"/>
               </a:rPr>
               <a:t>Built for the rubric, in 30 hours, by humans with a leash of our own.</a:t>
             </a:r>
@@ -6689,11 +6689,11 @@
             <a:r>
               <a:rPr lang="en-US" sz="1500" b="1" dirty="0">
                 <a:solidFill>
-                  <a:srgbClr val="0F172A"/>
-                </a:solidFill>
-                <a:latin typeface="Consolas" pitchFamily="34" charset="0"/>
-                <a:ea typeface="Consolas" pitchFamily="34" charset="-122"/>
-                <a:cs typeface="Consolas" pitchFamily="34" charset="-120"/>
+                  <a:srgbClr val="1B2C3E"/>
+                </a:solidFill>
+                <a:latin typeface="Roboto Mono" pitchFamily="34" charset="0"/>
+                <a:ea typeface="Roboto Mono" pitchFamily="34" charset="-122"/>
+                <a:cs typeface="Roboto Mono" pitchFamily="34" charset="-120"/>
               </a:rPr>
               <a:t>Functionality 30%</a:t>
             </a:r>
@@ -6730,9 +6730,9 @@
                 <a:solidFill>
                   <a:srgbClr val="334155"/>
                 </a:solidFill>
-                <a:latin typeface="Inter" pitchFamily="34" charset="0"/>
-                <a:ea typeface="Inter" pitchFamily="34" charset="-122"/>
-                <a:cs typeface="Inter" pitchFamily="34" charset="-120"/>
+                <a:latin typeface="IBM Plex Sans" pitchFamily="34" charset="0"/>
+                <a:ea typeface="IBM Plex Sans" pitchFamily="34" charset="-122"/>
+                <a:cs typeface="IBM Plex Sans" pitchFamily="34" charset="-120"/>
               </a:rPr>
               <a:t>Two paid journeys ran end-to-end with explorer links; top-up, revoke and auditor flows all execute.</a:t>
             </a:r>
@@ -6790,11 +6790,11 @@
             <a:r>
               <a:rPr lang="en-US" sz="1500" b="1" dirty="0">
                 <a:solidFill>
-                  <a:srgbClr val="0F172A"/>
-                </a:solidFill>
-                <a:latin typeface="Consolas" pitchFamily="34" charset="0"/>
-                <a:ea typeface="Consolas" pitchFamily="34" charset="-122"/>
-                <a:cs typeface="Consolas" pitchFamily="34" charset="-120"/>
+                  <a:srgbClr val="1B2C3E"/>
+                </a:solidFill>
+                <a:latin typeface="Roboto Mono" pitchFamily="34" charset="0"/>
+                <a:ea typeface="Roboto Mono" pitchFamily="34" charset="-122"/>
+                <a:cs typeface="Roboto Mono" pitchFamily="34" charset="-120"/>
               </a:rPr>
               <a:t>Technical 25%</a:t>
             </a:r>
@@ -6831,9 +6831,9 @@
                 <a:solidFill>
                   <a:srgbClr val="334155"/>
                 </a:solidFill>
-                <a:latin typeface="Inter" pitchFamily="34" charset="0"/>
-                <a:ea typeface="Inter" pitchFamily="34" charset="-122"/>
-                <a:cs typeface="Inter" pitchFamily="34" charset="-120"/>
+                <a:latin typeface="IBM Plex Sans" pitchFamily="34" charset="0"/>
+                <a:ea typeface="IBM Plex Sans" pitchFamily="34" charset="-122"/>
+                <a:cs typeface="IBM Plex Sans" pitchFamily="34" charset="-120"/>
               </a:rPr>
               <a:t>On-chain limit enforcement (TIP-1011) · x402 seller + payer · MPP memo-bound charges · CRE orchestration.</a:t>
             </a:r>
@@ -6891,11 +6891,11 @@
             <a:r>
               <a:rPr lang="en-US" sz="1500" b="1" dirty="0">
                 <a:solidFill>
-                  <a:srgbClr val="0F172A"/>
-                </a:solidFill>
-                <a:latin typeface="Consolas" pitchFamily="34" charset="0"/>
-                <a:ea typeface="Consolas" pitchFamily="34" charset="-122"/>
-                <a:cs typeface="Consolas" pitchFamily="34" charset="-120"/>
+                  <a:srgbClr val="1B2C3E"/>
+                </a:solidFill>
+                <a:latin typeface="Roboto Mono" pitchFamily="34" charset="0"/>
+                <a:ea typeface="Roboto Mono" pitchFamily="34" charset="-122"/>
+                <a:cs typeface="Roboto Mono" pitchFamily="34" charset="-120"/>
               </a:rPr>
               <a:t>Innovation 20%</a:t>
             </a:r>
@@ -6932,9 +6932,9 @@
                 <a:solidFill>
                   <a:srgbClr val="334155"/>
                 </a:solidFill>
-                <a:latin typeface="Inter" pitchFamily="34" charset="0"/>
-                <a:ea typeface="Inter" pitchFamily="34" charset="-122"/>
-                <a:cs typeface="Inter" pitchFamily="34" charset="-120"/>
+                <a:latin typeface="IBM Plex Sans" pitchFamily="34" charset="0"/>
+                <a:ea typeface="IBM Plex Sans" pitchFamily="34" charset="-122"/>
+                <a:cs typeface="IBM Plex Sans" pitchFamily="34" charset="-120"/>
               </a:rPr>
               <a:t>The trust layer: leash + receipts + independent audit + fiat on-ramp — the lane comparables left empty.</a:t>
             </a:r>
@@ -6992,11 +6992,11 @@
             <a:r>
               <a:rPr lang="en-US" sz="1500" b="1" dirty="0">
                 <a:solidFill>
-                  <a:srgbClr val="0F172A"/>
-                </a:solidFill>
-                <a:latin typeface="Consolas" pitchFamily="34" charset="0"/>
-                <a:ea typeface="Consolas" pitchFamily="34" charset="-122"/>
-                <a:cs typeface="Consolas" pitchFamily="34" charset="-120"/>
+                  <a:srgbClr val="1B2C3E"/>
+                </a:solidFill>
+                <a:latin typeface="Roboto Mono" pitchFamily="34" charset="0"/>
+                <a:ea typeface="Roboto Mono" pitchFamily="34" charset="-122"/>
+                <a:cs typeface="Roboto Mono" pitchFamily="34" charset="-120"/>
               </a:rPr>
               <a:t>Usefulness 15%</a:t>
             </a:r>
@@ -7033,9 +7033,9 @@
                 <a:solidFill>
                   <a:srgbClr val="334155"/>
                 </a:solidFill>
-                <a:latin typeface="Inter" pitchFamily="34" charset="0"/>
-                <a:ea typeface="Inter" pitchFamily="34" charset="-122"/>
-                <a:cs typeface="Inter" pitchFamily="34" charset="-120"/>
+                <a:latin typeface="IBM Plex Sans" pitchFamily="34" charset="0"/>
+                <a:ea typeface="IBM Plex Sans" pitchFamily="34" charset="-122"/>
+                <a:cs typeface="IBM Plex Sans" pitchFamily="34" charset="-120"/>
               </a:rPr>
               <a:t>A noodle shop owner in Bangkok is the persona. 1 THB = 1 THCFI funding needs no exchange account.</a:t>
             </a:r>
@@ -7093,11 +7093,11 @@
             <a:r>
               <a:rPr lang="en-US" sz="1500" b="1" dirty="0">
                 <a:solidFill>
-                  <a:srgbClr val="0F172A"/>
-                </a:solidFill>
-                <a:latin typeface="Consolas" pitchFamily="34" charset="0"/>
-                <a:ea typeface="Consolas" pitchFamily="34" charset="-122"/>
-                <a:cs typeface="Consolas" pitchFamily="34" charset="-120"/>
+                  <a:srgbClr val="1B2C3E"/>
+                </a:solidFill>
+                <a:latin typeface="Roboto Mono" pitchFamily="34" charset="0"/>
+                <a:ea typeface="Roboto Mono" pitchFamily="34" charset="-122"/>
+                <a:cs typeface="Roboto Mono" pitchFamily="34" charset="-120"/>
               </a:rPr>
               <a:t>Demo 10%</a:t>
             </a:r>
@@ -7134,9 +7134,9 @@
                 <a:solidFill>
                   <a:srgbClr val="334155"/>
                 </a:solidFill>
-                <a:latin typeface="Inter" pitchFamily="34" charset="0"/>
-                <a:ea typeface="Inter" pitchFamily="34" charset="-122"/>
-                <a:cs typeface="Inter" pitchFamily="34" charset="-120"/>
+                <a:latin typeface="IBM Plex Sans" pitchFamily="34" charset="0"/>
+                <a:ea typeface="IBM Plex Sans" pitchFamily="34" charset="-122"/>
+                <a:cs typeface="IBM Plex Sans" pitchFamily="34" charset="-120"/>
               </a:rPr>
               <a:t>Recording embedded, judgment-proof: every claim is a clickable transaction.</a:t>
             </a:r>
@@ -7165,7 +7165,7 @@
           </a:solidFill>
           <a:ln w="22225">
             <a:solidFill>
-              <a:srgbClr val="64748B"/>
+              <a:srgbClr val="5A6A7E"/>
             </a:solidFill>
           </a:ln>
         </p:spPr>
@@ -7179,11 +7179,11 @@
             <a:r>
               <a:rPr lang="en-US" sz="1300" b="1" spc="300" kern="0" dirty="0">
                 <a:solidFill>
-                  <a:srgbClr val="64748B"/>
-                </a:solidFill>
-                <a:latin typeface="Consolas" pitchFamily="34" charset="0"/>
-                <a:ea typeface="Consolas" pitchFamily="34" charset="-122"/>
-                <a:cs typeface="Consolas" pitchFamily="34" charset="-120"/>
+                  <a:srgbClr val="5A6A7E"/>
+                </a:solidFill>
+                <a:latin typeface="Roboto Mono" pitchFamily="34" charset="0"/>
+                <a:ea typeface="Roboto Mono" pitchFamily="34" charset="-122"/>
+                <a:cs typeface="Roboto Mono" pitchFamily="34" charset="-120"/>
               </a:rPr>
               <a:t>PRE-BUILT ≠ SUBMITTED</a:t>
             </a:r>
@@ -7218,11 +7218,11 @@
             <a:r>
               <a:rPr lang="en-US" sz="1150" dirty="0">
                 <a:solidFill>
-                  <a:srgbClr val="64748B"/>
-                </a:solidFill>
-                <a:latin typeface="Consolas" pitchFamily="34" charset="0"/>
-                <a:ea typeface="Consolas" pitchFamily="34" charset="-122"/>
-                <a:cs typeface="Consolas" pitchFamily="34" charset="-120"/>
+                  <a:srgbClr val="5A6A7E"/>
+                </a:solidFill>
+                <a:latin typeface="Roboto Mono" pitchFamily="34" charset="0"/>
+                <a:ea typeface="Roboto Mono" pitchFamily="34" charset="-122"/>
+                <a:cs typeface="Roboto Mono" pitchFamily="34" charset="-120"/>
               </a:rPr>
               <a:t>Eligibility: submitted code written in-sprint. ThaiFi wallet/CLI used as public tooling (npm), affiliation disclosed in the README.</a:t>
             </a:r>
@@ -7244,7 +7244,7 @@
     <p:bg>
       <p:bgPr>
         <a:solidFill>
-          <a:srgbClr val="0B1A2F"/>
+          <a:srgbClr val="1F4E79"/>
         </a:solidFill>
       </p:bgPr>
     </p:bg>
@@ -7289,11 +7289,11 @@
             <a:r>
               <a:rPr lang="en-US" sz="1150" b="1" spc="400" kern="0" dirty="0">
                 <a:solidFill>
-                  <a:srgbClr val="00C2A8"/>
-                </a:solidFill>
-                <a:latin typeface="Consolas" pitchFamily="34" charset="0"/>
-                <a:ea typeface="Consolas" pitchFamily="34" charset="-122"/>
-                <a:cs typeface="Consolas" pitchFamily="34" charset="-120"/>
+                  <a:srgbClr val="1F4E79"/>
+                </a:solidFill>
+                <a:latin typeface="Roboto Mono" pitchFamily="34" charset="0"/>
+                <a:ea typeface="Roboto Mono" pitchFamily="34" charset="-122"/>
+                <a:cs typeface="Roboto Mono" pitchFamily="34" charset="-120"/>
               </a:rPr>
               <a:t>LEASHED AGENT PLATFORM</a:t>
             </a:r>
@@ -7331,11 +7331,11 @@
             <a:r>
               <a:rPr lang="en-US" sz="5600" b="1" dirty="0">
                 <a:solidFill>
-                  <a:srgbClr val="F4F7FB"/>
-                </a:solidFill>
-                <a:latin typeface="Inter" pitchFamily="34" charset="0"/>
-                <a:ea typeface="Inter" pitchFamily="34" charset="-122"/>
-                <a:cs typeface="Inter" pitchFamily="34" charset="-120"/>
+                  <a:srgbClr val="F4F6F7"/>
+                </a:solidFill>
+                <a:latin typeface="IBM Plex Sans" pitchFamily="34" charset="0"/>
+                <a:ea typeface="IBM Plex Sans" pitchFamily="34" charset="-122"/>
+                <a:cs typeface="IBM Plex Sans" pitchFamily="34" charset="-120"/>
               </a:rPr>
               <a:t>The trust layer</a:t>
             </a:r>
@@ -7351,11 +7351,11 @@
             <a:r>
               <a:rPr lang="en-US" sz="5600" b="1" dirty="0">
                 <a:solidFill>
-                  <a:srgbClr val="F4F7FB"/>
-                </a:solidFill>
-                <a:latin typeface="Inter" pitchFamily="34" charset="0"/>
-                <a:ea typeface="Inter" pitchFamily="34" charset="-122"/>
-                <a:cs typeface="Inter" pitchFamily="34" charset="-120"/>
+                  <a:srgbClr val="F4F6F7"/>
+                </a:solidFill>
+                <a:latin typeface="IBM Plex Sans" pitchFamily="34" charset="0"/>
+                <a:ea typeface="IBM Plex Sans" pitchFamily="34" charset="-122"/>
+                <a:cs typeface="IBM Plex Sans" pitchFamily="34" charset="-120"/>
               </a:rPr>
               <a:t>for AI agents.</a:t>
             </a:r>
@@ -7392,9 +7392,9 @@
                 <a:solidFill>
                   <a:srgbClr val="E6EDF7"/>
                 </a:solidFill>
-                <a:latin typeface="Inter" pitchFamily="34" charset="0"/>
-                <a:ea typeface="Inter" pitchFamily="34" charset="-122"/>
-                <a:cs typeface="Inter" pitchFamily="34" charset="-120"/>
+                <a:latin typeface="IBM Plex Sans" pitchFamily="34" charset="0"/>
+                <a:ea typeface="IBM Plex Sans" pitchFamily="34" charset="-122"/>
+                <a:cs typeface="IBM Plex Sans" pitchFamily="34" charset="-120"/>
               </a:rPr>
               <a:t>Fund with PromptPay. Leash on-chain. Audit with Chainlink CRE.</a:t>
             </a:r>
@@ -7419,7 +7419,7 @@
           <a:noFill/>
           <a:ln w="19050">
             <a:solidFill>
-              <a:srgbClr val="00C2A8"/>
+              <a:srgbClr val="1F4E79"/>
             </a:solidFill>
             <a:prstDash val="solid"/>
           </a:ln>
@@ -7454,9 +7454,9 @@
                 <a:solidFill>
                   <a:srgbClr val="C9BFA8"/>
                 </a:solidFill>
-                <a:latin typeface="Consolas" pitchFamily="34" charset="0"/>
-                <a:ea typeface="Consolas" pitchFamily="34" charset="-122"/>
-                <a:cs typeface="Consolas" pitchFamily="34" charset="-120"/>
+                <a:latin typeface="Roboto Mono" pitchFamily="34" charset="0"/>
+                <a:ea typeface="Roboto Mono" pitchFamily="34" charset="-122"/>
+                <a:cs typeface="Roboto Mono" pitchFamily="34" charset="-120"/>
               </a:rPr>
               <a:t>Repo · live dashboard · audit log — linked in the submission</a:t>
             </a:r>
@@ -7471,9 +7471,9 @@
                 <a:solidFill>
                   <a:srgbClr val="C9BFA8"/>
                 </a:solidFill>
-                <a:latin typeface="Consolas" pitchFamily="34" charset="0"/>
-                <a:ea typeface="Consolas" pitchFamily="34" charset="-122"/>
-                <a:cs typeface="Consolas" pitchFamily="34" charset="-120"/>
+                <a:latin typeface="Roboto Mono" pitchFamily="34" charset="0"/>
+                <a:ea typeface="Roboto Mono" pitchFamily="34" charset="-122"/>
+                <a:cs typeface="Roboto Mono" pitchFamily="34" charset="-120"/>
               </a:rPr>
               <a:t>Team Leashed — Jirayu (Dome) Charoenyost · TOKEN2049 Origins 2026</a:t>
             </a:r>
@@ -7502,7 +7502,7 @@
           </a:solidFill>
           <a:ln w="22225">
             <a:solidFill>
-              <a:srgbClr val="E5484D"/>
+              <a:srgbClr val="A93837"/>
             </a:solidFill>
           </a:ln>
         </p:spPr>
@@ -7516,11 +7516,11 @@
             <a:r>
               <a:rPr lang="en-US" sz="1300" b="1" spc="300" kern="0" dirty="0">
                 <a:solidFill>
-                  <a:srgbClr val="E5484D"/>
-                </a:solidFill>
-                <a:latin typeface="Consolas" pitchFamily="34" charset="0"/>
-                <a:ea typeface="Consolas" pitchFamily="34" charset="-122"/>
-                <a:cs typeface="Consolas" pitchFamily="34" charset="-120"/>
+                  <a:srgbClr val="A93837"/>
+                </a:solidFill>
+                <a:latin typeface="Roboto Mono" pitchFamily="34" charset="0"/>
+                <a:ea typeface="Roboto Mono" pitchFamily="34" charset="-122"/>
+                <a:cs typeface="Roboto Mono" pitchFamily="34" charset="-120"/>
               </a:rPr>
               <a:t>ON TIME</a:t>
             </a:r>
